--- a/Projects/DrasseDriehoek/images/voortoetsAGT.pptx
+++ b/Projects/DrasseDriehoek/images/voortoetsAGT.pptx
@@ -7,6 +7,10 @@
   <p:sldIdLst>
     <p:sldId id="256" r:id="rId2"/>
     <p:sldId id="257" r:id="rId3"/>
+    <p:sldId id="258" r:id="rId4"/>
+    <p:sldId id="259" r:id="rId5"/>
+    <p:sldId id="260" r:id="rId6"/>
+    <p:sldId id="261" r:id="rId7"/>
   </p:sldIdLst>
   <p:sldSz cx="12192000" cy="6858000"/>
   <p:notesSz cx="6858000" cy="9144000"/>
@@ -105,6 +109,22 @@
       </a:defRPr>
     </a:lvl9pPr>
   </p:defaultTextStyle>
+  <p:extLst>
+    <p:ext uri="{EFAFB233-063F-42B5-8137-9DF3F51BA10A}">
+      <p15:sldGuideLst xmlns:p15="http://schemas.microsoft.com/office/powerpoint/2012/main">
+        <p15:guide id="1" orient="horz" pos="3672" userDrawn="1">
+          <p15:clr>
+            <a:srgbClr val="A4A3A4"/>
+          </p15:clr>
+        </p15:guide>
+        <p15:guide id="2" pos="1896" userDrawn="1">
+          <p15:clr>
+            <a:srgbClr val="A4A3A4"/>
+          </p15:clr>
+        </p15:guide>
+      </p15:sldGuideLst>
+    </p:ext>
+  </p:extLst>
 </p:presentation>
 </file>
 
@@ -257,7 +277,7 @@
           <a:p>
             <a:fld id="{C39011D5-8D99-4149-A1DF-426936CDB382}" type="datetimeFigureOut">
               <a:rPr lang="en-NL" smtClean="0"/>
-              <a:t>24/12/2023</a:t>
+              <a:t>1/21/26</a:t>
             </a:fld>
             <a:endParaRPr lang="en-NL"/>
           </a:p>
@@ -457,7 +477,7 @@
           <a:p>
             <a:fld id="{C39011D5-8D99-4149-A1DF-426936CDB382}" type="datetimeFigureOut">
               <a:rPr lang="en-NL" smtClean="0"/>
-              <a:t>24/12/2023</a:t>
+              <a:t>1/21/26</a:t>
             </a:fld>
             <a:endParaRPr lang="en-NL"/>
           </a:p>
@@ -667,7 +687,7 @@
           <a:p>
             <a:fld id="{C39011D5-8D99-4149-A1DF-426936CDB382}" type="datetimeFigureOut">
               <a:rPr lang="en-NL" smtClean="0"/>
-              <a:t>24/12/2023</a:t>
+              <a:t>1/21/26</a:t>
             </a:fld>
             <a:endParaRPr lang="en-NL"/>
           </a:p>
@@ -867,7 +887,7 @@
           <a:p>
             <a:fld id="{C39011D5-8D99-4149-A1DF-426936CDB382}" type="datetimeFigureOut">
               <a:rPr lang="en-NL" smtClean="0"/>
-              <a:t>24/12/2023</a:t>
+              <a:t>1/21/26</a:t>
             </a:fld>
             <a:endParaRPr lang="en-NL"/>
           </a:p>
@@ -1143,7 +1163,7 @@
           <a:p>
             <a:fld id="{C39011D5-8D99-4149-A1DF-426936CDB382}" type="datetimeFigureOut">
               <a:rPr lang="en-NL" smtClean="0"/>
-              <a:t>24/12/2023</a:t>
+              <a:t>1/21/26</a:t>
             </a:fld>
             <a:endParaRPr lang="en-NL"/>
           </a:p>
@@ -1411,7 +1431,7 @@
           <a:p>
             <a:fld id="{C39011D5-8D99-4149-A1DF-426936CDB382}" type="datetimeFigureOut">
               <a:rPr lang="en-NL" smtClean="0"/>
-              <a:t>24/12/2023</a:t>
+              <a:t>1/21/26</a:t>
             </a:fld>
             <a:endParaRPr lang="en-NL"/>
           </a:p>
@@ -1826,7 +1846,7 @@
           <a:p>
             <a:fld id="{C39011D5-8D99-4149-A1DF-426936CDB382}" type="datetimeFigureOut">
               <a:rPr lang="en-NL" smtClean="0"/>
-              <a:t>24/12/2023</a:t>
+              <a:t>1/21/26</a:t>
             </a:fld>
             <a:endParaRPr lang="en-NL"/>
           </a:p>
@@ -1968,7 +1988,7 @@
           <a:p>
             <a:fld id="{C39011D5-8D99-4149-A1DF-426936CDB382}" type="datetimeFigureOut">
               <a:rPr lang="en-NL" smtClean="0"/>
-              <a:t>24/12/2023</a:t>
+              <a:t>1/21/26</a:t>
             </a:fld>
             <a:endParaRPr lang="en-NL"/>
           </a:p>
@@ -2081,7 +2101,7 @@
           <a:p>
             <a:fld id="{C39011D5-8D99-4149-A1DF-426936CDB382}" type="datetimeFigureOut">
               <a:rPr lang="en-NL" smtClean="0"/>
-              <a:t>24/12/2023</a:t>
+              <a:t>1/21/26</a:t>
             </a:fld>
             <a:endParaRPr lang="en-NL"/>
           </a:p>
@@ -2394,7 +2414,7 @@
           <a:p>
             <a:fld id="{C39011D5-8D99-4149-A1DF-426936CDB382}" type="datetimeFigureOut">
               <a:rPr lang="en-NL" smtClean="0"/>
-              <a:t>24/12/2023</a:t>
+              <a:t>1/21/26</a:t>
             </a:fld>
             <a:endParaRPr lang="en-NL"/>
           </a:p>
@@ -2683,7 +2703,7 @@
           <a:p>
             <a:fld id="{C39011D5-8D99-4149-A1DF-426936CDB382}" type="datetimeFigureOut">
               <a:rPr lang="en-NL" smtClean="0"/>
-              <a:t>24/12/2023</a:t>
+              <a:t>1/21/26</a:t>
             </a:fld>
             <a:endParaRPr lang="en-NL"/>
           </a:p>
@@ -2926,7 +2946,7 @@
           <a:p>
             <a:fld id="{C39011D5-8D99-4149-A1DF-426936CDB382}" type="datetimeFigureOut">
               <a:rPr lang="en-NL" smtClean="0"/>
-              <a:t>24/12/2023</a:t>
+              <a:t>1/21/26</a:t>
             </a:fld>
             <a:endParaRPr lang="en-NL"/>
           </a:p>
@@ -3469,6 +3489,5507 @@
 </p:sld>
 </file>
 
+<file path=ppt/slides/slide3.xml><?xml version="1.0" encoding="utf-8"?>
+<p:sld xmlns:a="http://schemas.openxmlformats.org/drawingml/2006/main" xmlns:r="http://schemas.openxmlformats.org/officeDocument/2006/relationships" xmlns:p="http://schemas.openxmlformats.org/presentationml/2006/main">
+  <p:cSld>
+    <p:spTree>
+      <p:nvGrpSpPr>
+        <p:cNvPr id="1" name=""/>
+        <p:cNvGrpSpPr/>
+        <p:nvPr/>
+      </p:nvGrpSpPr>
+      <p:grpSpPr>
+        <a:xfrm>
+          <a:off x="0" y="0"/>
+          <a:ext cx="0" cy="0"/>
+          <a:chOff x="0" y="0"/>
+          <a:chExt cx="0" cy="0"/>
+        </a:xfrm>
+      </p:grpSpPr>
+      <p:sp>
+        <p:nvSpPr>
+          <p:cNvPr id="3" name="Freeform 2">
+            <a:extLst>
+              <a:ext uri="{FF2B5EF4-FFF2-40B4-BE49-F238E27FC236}">
+                <a16:creationId xmlns:a16="http://schemas.microsoft.com/office/drawing/2014/main" id="{ACA21EB5-A58B-6C90-A879-7E51EFCCC158}"/>
+              </a:ext>
+            </a:extLst>
+          </p:cNvPr>
+          <p:cNvSpPr/>
+          <p:nvPr/>
+        </p:nvSpPr>
+        <p:spPr>
+          <a:xfrm>
+            <a:off x="3039762" y="1050324"/>
+            <a:ext cx="6376087" cy="4782065"/>
+          </a:xfrm>
+          <a:custGeom>
+            <a:avLst/>
+            <a:gdLst>
+              <a:gd name="csX0" fmla="*/ 0 w 6376087"/>
+              <a:gd name="csY0" fmla="*/ 0 h 4782065"/>
+              <a:gd name="csX1" fmla="*/ 3558746 w 6376087"/>
+              <a:gd name="csY1" fmla="*/ 506627 h 4782065"/>
+              <a:gd name="csX2" fmla="*/ 5980670 w 6376087"/>
+              <a:gd name="csY2" fmla="*/ 2162433 h 4782065"/>
+              <a:gd name="csX3" fmla="*/ 6376087 w 6376087"/>
+              <a:gd name="csY3" fmla="*/ 4782065 h 4782065"/>
+              <a:gd name="csX0" fmla="*/ 0 w 6376087"/>
+              <a:gd name="csY0" fmla="*/ 0 h 4782065"/>
+              <a:gd name="csX1" fmla="*/ 3558746 w 6376087"/>
+              <a:gd name="csY1" fmla="*/ 506627 h 4782065"/>
+              <a:gd name="csX2" fmla="*/ 5980670 w 6376087"/>
+              <a:gd name="csY2" fmla="*/ 2162433 h 4782065"/>
+              <a:gd name="csX3" fmla="*/ 6376087 w 6376087"/>
+              <a:gd name="csY3" fmla="*/ 4782065 h 4782065"/>
+              <a:gd name="csX0" fmla="*/ 0 w 6376087"/>
+              <a:gd name="csY0" fmla="*/ 0 h 4782065"/>
+              <a:gd name="csX1" fmla="*/ 3558746 w 6376087"/>
+              <a:gd name="csY1" fmla="*/ 506627 h 4782065"/>
+              <a:gd name="csX2" fmla="*/ 5980670 w 6376087"/>
+              <a:gd name="csY2" fmla="*/ 2162433 h 4782065"/>
+              <a:gd name="csX3" fmla="*/ 6376087 w 6376087"/>
+              <a:gd name="csY3" fmla="*/ 4782065 h 4782065"/>
+              <a:gd name="csX0" fmla="*/ 0 w 6376087"/>
+              <a:gd name="csY0" fmla="*/ 0 h 4782065"/>
+              <a:gd name="csX1" fmla="*/ 3558746 w 6376087"/>
+              <a:gd name="csY1" fmla="*/ 506627 h 4782065"/>
+              <a:gd name="csX2" fmla="*/ 5980670 w 6376087"/>
+              <a:gd name="csY2" fmla="*/ 2162433 h 4782065"/>
+              <a:gd name="csX3" fmla="*/ 6376087 w 6376087"/>
+              <a:gd name="csY3" fmla="*/ 4782065 h 4782065"/>
+              <a:gd name="csX0" fmla="*/ 0 w 6376087"/>
+              <a:gd name="csY0" fmla="*/ 0 h 4782065"/>
+              <a:gd name="csX1" fmla="*/ 3558746 w 6376087"/>
+              <a:gd name="csY1" fmla="*/ 506627 h 4782065"/>
+              <a:gd name="csX2" fmla="*/ 5980670 w 6376087"/>
+              <a:gd name="csY2" fmla="*/ 2162433 h 4782065"/>
+              <a:gd name="csX3" fmla="*/ 6376087 w 6376087"/>
+              <a:gd name="csY3" fmla="*/ 4782065 h 4782065"/>
+              <a:gd name="csX0" fmla="*/ 0 w 6376087"/>
+              <a:gd name="csY0" fmla="*/ 0 h 4782065"/>
+              <a:gd name="csX1" fmla="*/ 3558746 w 6376087"/>
+              <a:gd name="csY1" fmla="*/ 506627 h 4782065"/>
+              <a:gd name="csX2" fmla="*/ 5980670 w 6376087"/>
+              <a:gd name="csY2" fmla="*/ 2162433 h 4782065"/>
+              <a:gd name="csX3" fmla="*/ 6376087 w 6376087"/>
+              <a:gd name="csY3" fmla="*/ 4782065 h 4782065"/>
+              <a:gd name="csX0" fmla="*/ 0 w 6376087"/>
+              <a:gd name="csY0" fmla="*/ 0 h 4782065"/>
+              <a:gd name="csX1" fmla="*/ 3558746 w 6376087"/>
+              <a:gd name="csY1" fmla="*/ 506627 h 4782065"/>
+              <a:gd name="csX2" fmla="*/ 5980670 w 6376087"/>
+              <a:gd name="csY2" fmla="*/ 2162433 h 4782065"/>
+              <a:gd name="csX3" fmla="*/ 6376087 w 6376087"/>
+              <a:gd name="csY3" fmla="*/ 4782065 h 4782065"/>
+              <a:gd name="csX0" fmla="*/ 0 w 6376087"/>
+              <a:gd name="csY0" fmla="*/ 0 h 4782065"/>
+              <a:gd name="csX1" fmla="*/ 3941806 w 6376087"/>
+              <a:gd name="csY1" fmla="*/ 605481 h 4782065"/>
+              <a:gd name="csX2" fmla="*/ 5980670 w 6376087"/>
+              <a:gd name="csY2" fmla="*/ 2162433 h 4782065"/>
+              <a:gd name="csX3" fmla="*/ 6376087 w 6376087"/>
+              <a:gd name="csY3" fmla="*/ 4782065 h 4782065"/>
+              <a:gd name="csX0" fmla="*/ 0 w 6376087"/>
+              <a:gd name="csY0" fmla="*/ 0 h 4782065"/>
+              <a:gd name="csX1" fmla="*/ 3941806 w 6376087"/>
+              <a:gd name="csY1" fmla="*/ 605481 h 4782065"/>
+              <a:gd name="csX2" fmla="*/ 5980670 w 6376087"/>
+              <a:gd name="csY2" fmla="*/ 2162433 h 4782065"/>
+              <a:gd name="csX3" fmla="*/ 6376087 w 6376087"/>
+              <a:gd name="csY3" fmla="*/ 4782065 h 4782065"/>
+            </a:gdLst>
+            <a:ahLst/>
+            <a:cxnLst>
+              <a:cxn ang="0">
+                <a:pos x="csX0" y="csY0"/>
+              </a:cxn>
+              <a:cxn ang="0">
+                <a:pos x="csX1" y="csY1"/>
+              </a:cxn>
+              <a:cxn ang="0">
+                <a:pos x="csX2" y="csY2"/>
+              </a:cxn>
+              <a:cxn ang="0">
+                <a:pos x="csX3" y="csY3"/>
+              </a:cxn>
+            </a:cxnLst>
+            <a:rect l="l" t="t" r="r" b="b"/>
+            <a:pathLst>
+              <a:path w="6376087" h="4782065">
+                <a:moveTo>
+                  <a:pt x="0" y="0"/>
+                </a:moveTo>
+                <a:cubicBezTo>
+                  <a:pt x="1359243" y="32951"/>
+                  <a:pt x="2945028" y="245076"/>
+                  <a:pt x="3941806" y="605481"/>
+                </a:cubicBezTo>
+                <a:cubicBezTo>
+                  <a:pt x="4938584" y="965887"/>
+                  <a:pt x="5562599" y="1305698"/>
+                  <a:pt x="5980670" y="2162433"/>
+                </a:cubicBezTo>
+                <a:cubicBezTo>
+                  <a:pt x="6398741" y="3019168"/>
+                  <a:pt x="6293708" y="3785286"/>
+                  <a:pt x="6376087" y="4782065"/>
+                </a:cubicBezTo>
+              </a:path>
+            </a:pathLst>
+          </a:custGeom>
+          <a:noFill/>
+          <a:ln w="28575">
+            <a:solidFill>
+              <a:srgbClr val="7030A0"/>
+            </a:solidFill>
+          </a:ln>
+        </p:spPr>
+        <p:style>
+          <a:lnRef idx="2">
+            <a:schemeClr val="accent1">
+              <a:shade val="15000"/>
+            </a:schemeClr>
+          </a:lnRef>
+          <a:fillRef idx="1">
+            <a:schemeClr val="accent1"/>
+          </a:fillRef>
+          <a:effectRef idx="0">
+            <a:schemeClr val="accent1"/>
+          </a:effectRef>
+          <a:fontRef idx="minor">
+            <a:schemeClr val="lt1"/>
+          </a:fontRef>
+        </p:style>
+        <p:txBody>
+          <a:bodyPr rtlCol="0" anchor="ctr"/>
+          <a:lstStyle/>
+          <a:p>
+            <a:pPr algn="ctr"/>
+            <a:endParaRPr lang="en-US"/>
+          </a:p>
+        </p:txBody>
+      </p:sp>
+      <p:sp>
+        <p:nvSpPr>
+          <p:cNvPr id="4" name="Freeform 3">
+            <a:extLst>
+              <a:ext uri="{FF2B5EF4-FFF2-40B4-BE49-F238E27FC236}">
+                <a16:creationId xmlns:a16="http://schemas.microsoft.com/office/drawing/2014/main" id="{F216880B-0D58-E007-A678-9E37BC6192CA}"/>
+              </a:ext>
+            </a:extLst>
+          </p:cNvPr>
+          <p:cNvSpPr/>
+          <p:nvPr/>
+        </p:nvSpPr>
+        <p:spPr>
+          <a:xfrm>
+            <a:off x="3039762" y="1421027"/>
+            <a:ext cx="6351373" cy="790832"/>
+          </a:xfrm>
+          <a:custGeom>
+            <a:avLst/>
+            <a:gdLst>
+              <a:gd name="csX0" fmla="*/ 0 w 6351373"/>
+              <a:gd name="csY0" fmla="*/ 0 h 790832"/>
+              <a:gd name="csX1" fmla="*/ 3361038 w 6351373"/>
+              <a:gd name="csY1" fmla="*/ 333632 h 790832"/>
+              <a:gd name="csX2" fmla="*/ 6351373 w 6351373"/>
+              <a:gd name="csY2" fmla="*/ 790832 h 790832"/>
+              <a:gd name="csX0" fmla="*/ 0 w 6351373"/>
+              <a:gd name="csY0" fmla="*/ 0 h 790832"/>
+              <a:gd name="csX1" fmla="*/ 3361038 w 6351373"/>
+              <a:gd name="csY1" fmla="*/ 333632 h 790832"/>
+              <a:gd name="csX2" fmla="*/ 6351373 w 6351373"/>
+              <a:gd name="csY2" fmla="*/ 790832 h 790832"/>
+              <a:gd name="csX0" fmla="*/ 0 w 6351373"/>
+              <a:gd name="csY0" fmla="*/ 0 h 790832"/>
+              <a:gd name="csX1" fmla="*/ 3361038 w 6351373"/>
+              <a:gd name="csY1" fmla="*/ 333632 h 790832"/>
+              <a:gd name="csX2" fmla="*/ 6351373 w 6351373"/>
+              <a:gd name="csY2" fmla="*/ 790832 h 790832"/>
+              <a:gd name="csX0" fmla="*/ 0 w 6351373"/>
+              <a:gd name="csY0" fmla="*/ 0 h 790832"/>
+              <a:gd name="csX1" fmla="*/ 3361038 w 6351373"/>
+              <a:gd name="csY1" fmla="*/ 333632 h 790832"/>
+              <a:gd name="csX2" fmla="*/ 6351373 w 6351373"/>
+              <a:gd name="csY2" fmla="*/ 790832 h 790832"/>
+              <a:gd name="csX0" fmla="*/ 0 w 6351373"/>
+              <a:gd name="csY0" fmla="*/ 0 h 790832"/>
+              <a:gd name="csX1" fmla="*/ 3361038 w 6351373"/>
+              <a:gd name="csY1" fmla="*/ 333632 h 790832"/>
+              <a:gd name="csX2" fmla="*/ 6351373 w 6351373"/>
+              <a:gd name="csY2" fmla="*/ 790832 h 790832"/>
+            </a:gdLst>
+            <a:ahLst/>
+            <a:cxnLst>
+              <a:cxn ang="0">
+                <a:pos x="csX0" y="csY0"/>
+              </a:cxn>
+              <a:cxn ang="0">
+                <a:pos x="csX1" y="csY1"/>
+              </a:cxn>
+              <a:cxn ang="0">
+                <a:pos x="csX2" y="csY2"/>
+              </a:cxn>
+            </a:cxnLst>
+            <a:rect l="l" t="t" r="r" b="b"/>
+            <a:pathLst>
+              <a:path w="6351373" h="790832">
+                <a:moveTo>
+                  <a:pt x="0" y="0"/>
+                </a:moveTo>
+                <a:cubicBezTo>
+                  <a:pt x="1132703" y="37070"/>
+                  <a:pt x="2277763" y="115330"/>
+                  <a:pt x="3361038" y="333632"/>
+                </a:cubicBezTo>
+                <a:cubicBezTo>
+                  <a:pt x="4444313" y="551934"/>
+                  <a:pt x="5255741" y="737286"/>
+                  <a:pt x="6351373" y="790832"/>
+                </a:cubicBezTo>
+              </a:path>
+            </a:pathLst>
+          </a:custGeom>
+          <a:noFill/>
+          <a:ln w="28575">
+            <a:solidFill>
+              <a:srgbClr val="7030A0"/>
+            </a:solidFill>
+            <a:prstDash val="dash"/>
+          </a:ln>
+        </p:spPr>
+        <p:style>
+          <a:lnRef idx="2">
+            <a:schemeClr val="accent1">
+              <a:shade val="15000"/>
+            </a:schemeClr>
+          </a:lnRef>
+          <a:fillRef idx="1">
+            <a:schemeClr val="accent1"/>
+          </a:fillRef>
+          <a:effectRef idx="0">
+            <a:schemeClr val="accent1"/>
+          </a:effectRef>
+          <a:fontRef idx="minor">
+            <a:schemeClr val="lt1"/>
+          </a:fontRef>
+        </p:style>
+        <p:txBody>
+          <a:bodyPr rtlCol="0" anchor="ctr"/>
+          <a:lstStyle/>
+          <a:p>
+            <a:pPr algn="ctr"/>
+            <a:endParaRPr lang="en-US"/>
+          </a:p>
+        </p:txBody>
+      </p:sp>
+      <p:sp>
+        <p:nvSpPr>
+          <p:cNvPr id="5" name="Freeform 4">
+            <a:extLst>
+              <a:ext uri="{FF2B5EF4-FFF2-40B4-BE49-F238E27FC236}">
+                <a16:creationId xmlns:a16="http://schemas.microsoft.com/office/drawing/2014/main" id="{0C9740EB-3523-52BD-5312-02BDAEB5F3E4}"/>
+              </a:ext>
+            </a:extLst>
+          </p:cNvPr>
+          <p:cNvSpPr/>
+          <p:nvPr/>
+        </p:nvSpPr>
+        <p:spPr>
+          <a:xfrm>
+            <a:off x="3052119" y="2471351"/>
+            <a:ext cx="6376086" cy="3373395"/>
+          </a:xfrm>
+          <a:custGeom>
+            <a:avLst/>
+            <a:gdLst>
+              <a:gd name="csX0" fmla="*/ 0 w 6376086"/>
+              <a:gd name="csY0" fmla="*/ 0 h 3373395"/>
+              <a:gd name="csX1" fmla="*/ 4522573 w 6376086"/>
+              <a:gd name="csY1" fmla="*/ 123568 h 3373395"/>
+              <a:gd name="csX2" fmla="*/ 6091881 w 6376086"/>
+              <a:gd name="csY2" fmla="*/ 1186249 h 3373395"/>
+              <a:gd name="csX3" fmla="*/ 6376086 w 6376086"/>
+              <a:gd name="csY3" fmla="*/ 3373395 h 3373395"/>
+              <a:gd name="csX0" fmla="*/ 0 w 6376086"/>
+              <a:gd name="csY0" fmla="*/ 0 h 3373395"/>
+              <a:gd name="csX1" fmla="*/ 4522573 w 6376086"/>
+              <a:gd name="csY1" fmla="*/ 123568 h 3373395"/>
+              <a:gd name="csX2" fmla="*/ 6091881 w 6376086"/>
+              <a:gd name="csY2" fmla="*/ 1186249 h 3373395"/>
+              <a:gd name="csX3" fmla="*/ 6376086 w 6376086"/>
+              <a:gd name="csY3" fmla="*/ 3373395 h 3373395"/>
+              <a:gd name="csX0" fmla="*/ 0 w 6376086"/>
+              <a:gd name="csY0" fmla="*/ 0 h 3373395"/>
+              <a:gd name="csX1" fmla="*/ 4522573 w 6376086"/>
+              <a:gd name="csY1" fmla="*/ 123568 h 3373395"/>
+              <a:gd name="csX2" fmla="*/ 6091881 w 6376086"/>
+              <a:gd name="csY2" fmla="*/ 1186249 h 3373395"/>
+              <a:gd name="csX3" fmla="*/ 6376086 w 6376086"/>
+              <a:gd name="csY3" fmla="*/ 3373395 h 3373395"/>
+              <a:gd name="csX0" fmla="*/ 0 w 6376086"/>
+              <a:gd name="csY0" fmla="*/ 0 h 3373395"/>
+              <a:gd name="csX1" fmla="*/ 4522573 w 6376086"/>
+              <a:gd name="csY1" fmla="*/ 123568 h 3373395"/>
+              <a:gd name="csX2" fmla="*/ 6091881 w 6376086"/>
+              <a:gd name="csY2" fmla="*/ 1186249 h 3373395"/>
+              <a:gd name="csX3" fmla="*/ 6376086 w 6376086"/>
+              <a:gd name="csY3" fmla="*/ 3373395 h 3373395"/>
+              <a:gd name="csX0" fmla="*/ 0 w 6376086"/>
+              <a:gd name="csY0" fmla="*/ 0 h 3373395"/>
+              <a:gd name="csX1" fmla="*/ 4522573 w 6376086"/>
+              <a:gd name="csY1" fmla="*/ 123568 h 3373395"/>
+              <a:gd name="csX2" fmla="*/ 6091881 w 6376086"/>
+              <a:gd name="csY2" fmla="*/ 1186249 h 3373395"/>
+              <a:gd name="csX3" fmla="*/ 6376086 w 6376086"/>
+              <a:gd name="csY3" fmla="*/ 3373395 h 3373395"/>
+              <a:gd name="csX0" fmla="*/ 0 w 6376086"/>
+              <a:gd name="csY0" fmla="*/ 0 h 3373395"/>
+              <a:gd name="csX1" fmla="*/ 4522573 w 6376086"/>
+              <a:gd name="csY1" fmla="*/ 123568 h 3373395"/>
+              <a:gd name="csX2" fmla="*/ 6091881 w 6376086"/>
+              <a:gd name="csY2" fmla="*/ 1186249 h 3373395"/>
+              <a:gd name="csX3" fmla="*/ 6376086 w 6376086"/>
+              <a:gd name="csY3" fmla="*/ 3373395 h 3373395"/>
+              <a:gd name="csX0" fmla="*/ 0 w 6376086"/>
+              <a:gd name="csY0" fmla="*/ 0 h 3373395"/>
+              <a:gd name="csX1" fmla="*/ 4522573 w 6376086"/>
+              <a:gd name="csY1" fmla="*/ 123568 h 3373395"/>
+              <a:gd name="csX2" fmla="*/ 6091881 w 6376086"/>
+              <a:gd name="csY2" fmla="*/ 1186249 h 3373395"/>
+              <a:gd name="csX3" fmla="*/ 6376086 w 6376086"/>
+              <a:gd name="csY3" fmla="*/ 3373395 h 3373395"/>
+            </a:gdLst>
+            <a:ahLst/>
+            <a:cxnLst>
+              <a:cxn ang="0">
+                <a:pos x="csX0" y="csY0"/>
+              </a:cxn>
+              <a:cxn ang="0">
+                <a:pos x="csX1" y="csY1"/>
+              </a:cxn>
+              <a:cxn ang="0">
+                <a:pos x="csX2" y="csY2"/>
+              </a:cxn>
+              <a:cxn ang="0">
+                <a:pos x="csX3" y="csY3"/>
+              </a:cxn>
+            </a:cxnLst>
+            <a:rect l="l" t="t" r="r" b="b"/>
+            <a:pathLst>
+              <a:path w="6376086" h="3373395">
+                <a:moveTo>
+                  <a:pt x="0" y="0"/>
+                </a:moveTo>
+                <a:cubicBezTo>
+                  <a:pt x="1729946" y="16476"/>
+                  <a:pt x="4050957" y="61785"/>
+                  <a:pt x="4522573" y="123568"/>
+                </a:cubicBezTo>
+                <a:cubicBezTo>
+                  <a:pt x="4994189" y="185351"/>
+                  <a:pt x="5873579" y="457200"/>
+                  <a:pt x="6091881" y="1186249"/>
+                </a:cubicBezTo>
+                <a:cubicBezTo>
+                  <a:pt x="6310183" y="1915298"/>
+                  <a:pt x="6293708" y="2360140"/>
+                  <a:pt x="6376086" y="3373395"/>
+                </a:cubicBezTo>
+              </a:path>
+            </a:pathLst>
+          </a:custGeom>
+          <a:noFill/>
+          <a:ln w="28575">
+            <a:solidFill>
+              <a:schemeClr val="tx1"/>
+            </a:solidFill>
+          </a:ln>
+        </p:spPr>
+        <p:style>
+          <a:lnRef idx="2">
+            <a:schemeClr val="accent1">
+              <a:shade val="15000"/>
+            </a:schemeClr>
+          </a:lnRef>
+          <a:fillRef idx="1">
+            <a:schemeClr val="accent1"/>
+          </a:fillRef>
+          <a:effectRef idx="0">
+            <a:schemeClr val="accent1"/>
+          </a:effectRef>
+          <a:fontRef idx="minor">
+            <a:schemeClr val="lt1"/>
+          </a:fontRef>
+        </p:style>
+        <p:txBody>
+          <a:bodyPr rtlCol="0" anchor="ctr"/>
+          <a:lstStyle/>
+          <a:p>
+            <a:pPr algn="ctr"/>
+            <a:endParaRPr lang="en-US"/>
+          </a:p>
+        </p:txBody>
+      </p:sp>
+      <p:cxnSp>
+        <p:nvCxnSpPr>
+          <p:cNvPr id="13" name="Straight Arrow Connector 12">
+            <a:extLst>
+              <a:ext uri="{FF2B5EF4-FFF2-40B4-BE49-F238E27FC236}">
+                <a16:creationId xmlns:a16="http://schemas.microsoft.com/office/drawing/2014/main" id="{EC015D74-2C1C-7F33-822D-C4991BA113E2}"/>
+              </a:ext>
+            </a:extLst>
+          </p:cNvPr>
+          <p:cNvCxnSpPr>
+            <a:cxnSpLocks/>
+          </p:cNvCxnSpPr>
+          <p:nvPr/>
+        </p:nvCxnSpPr>
+        <p:spPr>
+          <a:xfrm>
+            <a:off x="1828800" y="4473151"/>
+            <a:ext cx="0" cy="1359243"/>
+          </a:xfrm>
+          <a:prstGeom prst="straightConnector1">
+            <a:avLst/>
+          </a:prstGeom>
+          <a:ln w="28575">
+            <a:headEnd type="triangle"/>
+            <a:tailEnd type="triangle"/>
+          </a:ln>
+        </p:spPr>
+        <p:style>
+          <a:lnRef idx="1">
+            <a:schemeClr val="accent1"/>
+          </a:lnRef>
+          <a:fillRef idx="0">
+            <a:schemeClr val="accent1"/>
+          </a:fillRef>
+          <a:effectRef idx="0">
+            <a:schemeClr val="accent1"/>
+          </a:effectRef>
+          <a:fontRef idx="minor">
+            <a:schemeClr val="tx1"/>
+          </a:fontRef>
+        </p:style>
+      </p:cxnSp>
+      <p:grpSp>
+        <p:nvGrpSpPr>
+          <p:cNvPr id="41" name="Group 40">
+            <a:extLst>
+              <a:ext uri="{FF2B5EF4-FFF2-40B4-BE49-F238E27FC236}">
+                <a16:creationId xmlns:a16="http://schemas.microsoft.com/office/drawing/2014/main" id="{70A6E204-B445-4075-A548-543BFD85765F}"/>
+              </a:ext>
+            </a:extLst>
+          </p:cNvPr>
+          <p:cNvGrpSpPr/>
+          <p:nvPr/>
+        </p:nvGrpSpPr>
+        <p:grpSpPr>
+          <a:xfrm>
+            <a:off x="3019165" y="4448435"/>
+            <a:ext cx="6409040" cy="1709355"/>
+            <a:chOff x="3019165" y="4114800"/>
+            <a:chExt cx="6409040" cy="1709355"/>
+          </a:xfrm>
+        </p:grpSpPr>
+        <p:sp>
+          <p:nvSpPr>
+            <p:cNvPr id="6" name="Freeform 5">
+              <a:extLst>
+                <a:ext uri="{FF2B5EF4-FFF2-40B4-BE49-F238E27FC236}">
+                  <a16:creationId xmlns:a16="http://schemas.microsoft.com/office/drawing/2014/main" id="{232D2A62-C716-CBAD-DCBE-352ABD7F8060}"/>
+                </a:ext>
+              </a:extLst>
+            </p:cNvPr>
+            <p:cNvSpPr/>
+            <p:nvPr/>
+          </p:nvSpPr>
+          <p:spPr>
+            <a:xfrm>
+              <a:off x="3076832" y="4114800"/>
+              <a:ext cx="6289590" cy="1359243"/>
+            </a:xfrm>
+            <a:custGeom>
+              <a:avLst/>
+              <a:gdLst>
+                <a:gd name="csX0" fmla="*/ 0 w 6289590"/>
+                <a:gd name="csY0" fmla="*/ 0 h 1359243"/>
+                <a:gd name="csX1" fmla="*/ 4226011 w 6289590"/>
+                <a:gd name="csY1" fmla="*/ 617838 h 1359243"/>
+                <a:gd name="csX2" fmla="*/ 6289590 w 6289590"/>
+                <a:gd name="csY2" fmla="*/ 1359243 h 1359243"/>
+                <a:gd name="csX0" fmla="*/ 0 w 6289590"/>
+                <a:gd name="csY0" fmla="*/ 0 h 1359243"/>
+                <a:gd name="csX1" fmla="*/ 4226011 w 6289590"/>
+                <a:gd name="csY1" fmla="*/ 617838 h 1359243"/>
+                <a:gd name="csX2" fmla="*/ 6289590 w 6289590"/>
+                <a:gd name="csY2" fmla="*/ 1359243 h 1359243"/>
+                <a:gd name="csX0" fmla="*/ 0 w 6289590"/>
+                <a:gd name="csY0" fmla="*/ 0 h 1359243"/>
+                <a:gd name="csX1" fmla="*/ 4226011 w 6289590"/>
+                <a:gd name="csY1" fmla="*/ 617838 h 1359243"/>
+                <a:gd name="csX2" fmla="*/ 6289590 w 6289590"/>
+                <a:gd name="csY2" fmla="*/ 1359243 h 1359243"/>
+                <a:gd name="csX0" fmla="*/ 0 w 6289590"/>
+                <a:gd name="csY0" fmla="*/ 0 h 1359243"/>
+                <a:gd name="csX1" fmla="*/ 4226011 w 6289590"/>
+                <a:gd name="csY1" fmla="*/ 617838 h 1359243"/>
+                <a:gd name="csX2" fmla="*/ 6289590 w 6289590"/>
+                <a:gd name="csY2" fmla="*/ 1359243 h 1359243"/>
+                <a:gd name="csX0" fmla="*/ 0 w 6289590"/>
+                <a:gd name="csY0" fmla="*/ 0 h 1359243"/>
+                <a:gd name="csX1" fmla="*/ 4226011 w 6289590"/>
+                <a:gd name="csY1" fmla="*/ 617838 h 1359243"/>
+                <a:gd name="csX2" fmla="*/ 6289590 w 6289590"/>
+                <a:gd name="csY2" fmla="*/ 1359243 h 1359243"/>
+              </a:gdLst>
+              <a:ahLst/>
+              <a:cxnLst>
+                <a:cxn ang="0">
+                  <a:pos x="csX0" y="csY0"/>
+                </a:cxn>
+                <a:cxn ang="0">
+                  <a:pos x="csX1" y="csY1"/>
+                </a:cxn>
+                <a:cxn ang="0">
+                  <a:pos x="csX2" y="csY2"/>
+                </a:cxn>
+              </a:cxnLst>
+              <a:rect l="l" t="t" r="r" b="b"/>
+              <a:pathLst>
+                <a:path w="6289590" h="1359243">
+                  <a:moveTo>
+                    <a:pt x="0" y="0"/>
+                  </a:moveTo>
+                  <a:cubicBezTo>
+                    <a:pt x="1594022" y="57665"/>
+                    <a:pt x="3165390" y="304800"/>
+                    <a:pt x="4226011" y="617838"/>
+                  </a:cubicBezTo>
+                  <a:cubicBezTo>
+                    <a:pt x="5286632" y="930876"/>
+                    <a:pt x="5354595" y="976184"/>
+                    <a:pt x="6289590" y="1359243"/>
+                  </a:cubicBezTo>
+                </a:path>
+              </a:pathLst>
+            </a:custGeom>
+            <a:noFill/>
+            <a:ln w="28575">
+              <a:solidFill>
+                <a:srgbClr val="00B050"/>
+              </a:solidFill>
+            </a:ln>
+          </p:spPr>
+          <p:style>
+            <a:lnRef idx="2">
+              <a:schemeClr val="accent1">
+                <a:shade val="15000"/>
+              </a:schemeClr>
+            </a:lnRef>
+            <a:fillRef idx="1">
+              <a:schemeClr val="accent1"/>
+            </a:fillRef>
+            <a:effectRef idx="0">
+              <a:schemeClr val="accent1"/>
+            </a:effectRef>
+            <a:fontRef idx="minor">
+              <a:schemeClr val="lt1"/>
+            </a:fontRef>
+          </p:style>
+          <p:txBody>
+            <a:bodyPr rtlCol="0" anchor="ctr"/>
+            <a:lstStyle/>
+            <a:p>
+              <a:pPr algn="ctr"/>
+              <a:endParaRPr lang="en-US"/>
+            </a:p>
+          </p:txBody>
+        </p:sp>
+        <p:cxnSp>
+          <p:nvCxnSpPr>
+            <p:cNvPr id="8" name="Straight Connector 7">
+              <a:extLst>
+                <a:ext uri="{FF2B5EF4-FFF2-40B4-BE49-F238E27FC236}">
+                  <a16:creationId xmlns:a16="http://schemas.microsoft.com/office/drawing/2014/main" id="{78B7A140-A916-AACD-2116-8E45F1043AF6}"/>
+                </a:ext>
+              </a:extLst>
+            </p:cNvPr>
+            <p:cNvCxnSpPr>
+              <a:cxnSpLocks/>
+            </p:cNvCxnSpPr>
+            <p:nvPr/>
+          </p:nvCxnSpPr>
+          <p:spPr>
+            <a:xfrm>
+              <a:off x="3039762" y="5486400"/>
+              <a:ext cx="6388443" cy="0"/>
+            </a:xfrm>
+            <a:prstGeom prst="line">
+              <a:avLst/>
+            </a:prstGeom>
+            <a:ln w="28575">
+              <a:solidFill>
+                <a:srgbClr val="0070C0"/>
+              </a:solidFill>
+            </a:ln>
+          </p:spPr>
+          <p:style>
+            <a:lnRef idx="1">
+              <a:schemeClr val="accent1"/>
+            </a:lnRef>
+            <a:fillRef idx="0">
+              <a:schemeClr val="accent1"/>
+            </a:fillRef>
+            <a:effectRef idx="0">
+              <a:schemeClr val="accent1"/>
+            </a:effectRef>
+            <a:fontRef idx="minor">
+              <a:schemeClr val="tx1"/>
+            </a:fontRef>
+          </p:style>
+        </p:cxnSp>
+        <p:cxnSp>
+          <p:nvCxnSpPr>
+            <p:cNvPr id="10" name="Straight Connector 9">
+              <a:extLst>
+                <a:ext uri="{FF2B5EF4-FFF2-40B4-BE49-F238E27FC236}">
+                  <a16:creationId xmlns:a16="http://schemas.microsoft.com/office/drawing/2014/main" id="{836C800F-82AA-77E5-9B38-BB81F0755954}"/>
+                </a:ext>
+              </a:extLst>
+            </p:cNvPr>
+            <p:cNvCxnSpPr>
+              <a:cxnSpLocks/>
+            </p:cNvCxnSpPr>
+            <p:nvPr/>
+          </p:nvCxnSpPr>
+          <p:spPr>
+            <a:xfrm>
+              <a:off x="3019165" y="5824155"/>
+              <a:ext cx="6388443" cy="0"/>
+            </a:xfrm>
+            <a:prstGeom prst="line">
+              <a:avLst/>
+            </a:prstGeom>
+            <a:ln w="28575">
+              <a:solidFill>
+                <a:srgbClr val="0070C0"/>
+              </a:solidFill>
+              <a:prstDash val="lgDash"/>
+            </a:ln>
+          </p:spPr>
+          <p:style>
+            <a:lnRef idx="1">
+              <a:schemeClr val="accent1"/>
+            </a:lnRef>
+            <a:fillRef idx="0">
+              <a:schemeClr val="accent1"/>
+            </a:fillRef>
+            <a:effectRef idx="0">
+              <a:schemeClr val="accent1"/>
+            </a:effectRef>
+            <a:fontRef idx="minor">
+              <a:schemeClr val="tx1"/>
+            </a:fontRef>
+          </p:style>
+        </p:cxnSp>
+        <p:cxnSp>
+          <p:nvCxnSpPr>
+            <p:cNvPr id="16" name="Straight Arrow Connector 15">
+              <a:extLst>
+                <a:ext uri="{FF2B5EF4-FFF2-40B4-BE49-F238E27FC236}">
+                  <a16:creationId xmlns:a16="http://schemas.microsoft.com/office/drawing/2014/main" id="{4D5F43E8-6CED-77EC-2659-8242637C2686}"/>
+                </a:ext>
+              </a:extLst>
+            </p:cNvPr>
+            <p:cNvCxnSpPr>
+              <a:cxnSpLocks/>
+            </p:cNvCxnSpPr>
+            <p:nvPr/>
+          </p:nvCxnSpPr>
+          <p:spPr>
+            <a:xfrm>
+              <a:off x="3521675" y="5474043"/>
+              <a:ext cx="0" cy="337755"/>
+            </a:xfrm>
+            <a:prstGeom prst="straightConnector1">
+              <a:avLst/>
+            </a:prstGeom>
+            <a:ln w="28575">
+              <a:headEnd type="triangle"/>
+              <a:tailEnd type="triangle"/>
+            </a:ln>
+          </p:spPr>
+          <p:style>
+            <a:lnRef idx="1">
+              <a:schemeClr val="accent1"/>
+            </a:lnRef>
+            <a:fillRef idx="0">
+              <a:schemeClr val="accent1"/>
+            </a:fillRef>
+            <a:effectRef idx="0">
+              <a:schemeClr val="accent1"/>
+            </a:effectRef>
+            <a:fontRef idx="minor">
+              <a:schemeClr val="tx1"/>
+            </a:fontRef>
+          </p:style>
+        </p:cxnSp>
+      </p:grpSp>
+      <p:cxnSp>
+        <p:nvCxnSpPr>
+          <p:cNvPr id="18" name="Straight Arrow Connector 17">
+            <a:extLst>
+              <a:ext uri="{FF2B5EF4-FFF2-40B4-BE49-F238E27FC236}">
+                <a16:creationId xmlns:a16="http://schemas.microsoft.com/office/drawing/2014/main" id="{7EF52DBB-2DAF-4E2B-5ADB-9348A2D24363}"/>
+              </a:ext>
+            </a:extLst>
+          </p:cNvPr>
+          <p:cNvCxnSpPr>
+            <a:cxnSpLocks/>
+          </p:cNvCxnSpPr>
+          <p:nvPr/>
+        </p:nvCxnSpPr>
+        <p:spPr>
+          <a:xfrm>
+            <a:off x="4168343" y="2504299"/>
+            <a:ext cx="0" cy="3340447"/>
+          </a:xfrm>
+          <a:prstGeom prst="straightConnector1">
+            <a:avLst/>
+          </a:prstGeom>
+          <a:ln w="28575">
+            <a:headEnd type="triangle"/>
+            <a:tailEnd type="triangle"/>
+          </a:ln>
+        </p:spPr>
+        <p:style>
+          <a:lnRef idx="1">
+            <a:schemeClr val="accent1"/>
+          </a:lnRef>
+          <a:fillRef idx="0">
+            <a:schemeClr val="accent1"/>
+          </a:fillRef>
+          <a:effectRef idx="0">
+            <a:schemeClr val="accent1"/>
+          </a:effectRef>
+          <a:fontRef idx="minor">
+            <a:schemeClr val="tx1"/>
+          </a:fontRef>
+        </p:style>
+      </p:cxnSp>
+      <p:cxnSp>
+        <p:nvCxnSpPr>
+          <p:cNvPr id="20" name="Straight Arrow Connector 19">
+            <a:extLst>
+              <a:ext uri="{FF2B5EF4-FFF2-40B4-BE49-F238E27FC236}">
+                <a16:creationId xmlns:a16="http://schemas.microsoft.com/office/drawing/2014/main" id="{1E82A1B0-72F3-13BB-B7B6-B78C2D5942F1}"/>
+              </a:ext>
+            </a:extLst>
+          </p:cNvPr>
+          <p:cNvCxnSpPr>
+            <a:cxnSpLocks/>
+          </p:cNvCxnSpPr>
+          <p:nvPr/>
+        </p:nvCxnSpPr>
+        <p:spPr>
+          <a:xfrm flipH="1">
+            <a:off x="1828800" y="1093573"/>
+            <a:ext cx="12356" cy="1421026"/>
+          </a:xfrm>
+          <a:prstGeom prst="straightConnector1">
+            <a:avLst/>
+          </a:prstGeom>
+          <a:ln w="28575">
+            <a:headEnd type="triangle"/>
+            <a:tailEnd type="triangle"/>
+          </a:ln>
+        </p:spPr>
+        <p:style>
+          <a:lnRef idx="1">
+            <a:schemeClr val="accent1"/>
+          </a:lnRef>
+          <a:fillRef idx="0">
+            <a:schemeClr val="accent1"/>
+          </a:fillRef>
+          <a:effectRef idx="0">
+            <a:schemeClr val="accent1"/>
+          </a:effectRef>
+          <a:fontRef idx="minor">
+            <a:schemeClr val="tx1"/>
+          </a:fontRef>
+        </p:style>
+      </p:cxnSp>
+      <p:cxnSp>
+        <p:nvCxnSpPr>
+          <p:cNvPr id="21" name="Straight Arrow Connector 20">
+            <a:extLst>
+              <a:ext uri="{FF2B5EF4-FFF2-40B4-BE49-F238E27FC236}">
+                <a16:creationId xmlns:a16="http://schemas.microsoft.com/office/drawing/2014/main" id="{B4D917B9-B26D-1086-063D-A6F60D83B126}"/>
+              </a:ext>
+            </a:extLst>
+          </p:cNvPr>
+          <p:cNvCxnSpPr>
+            <a:cxnSpLocks/>
+          </p:cNvCxnSpPr>
+          <p:nvPr/>
+        </p:nvCxnSpPr>
+        <p:spPr>
+          <a:xfrm>
+            <a:off x="3538148" y="1091498"/>
+            <a:ext cx="0" cy="337755"/>
+          </a:xfrm>
+          <a:prstGeom prst="straightConnector1">
+            <a:avLst/>
+          </a:prstGeom>
+          <a:ln w="28575">
+            <a:headEnd type="triangle"/>
+            <a:tailEnd type="triangle"/>
+          </a:ln>
+        </p:spPr>
+        <p:style>
+          <a:lnRef idx="1">
+            <a:schemeClr val="accent1"/>
+          </a:lnRef>
+          <a:fillRef idx="0">
+            <a:schemeClr val="accent1"/>
+          </a:fillRef>
+          <a:effectRef idx="0">
+            <a:schemeClr val="accent1"/>
+          </a:effectRef>
+          <a:fontRef idx="minor">
+            <a:schemeClr val="tx1"/>
+          </a:fontRef>
+        </p:style>
+      </p:cxnSp>
+      <p:grpSp>
+        <p:nvGrpSpPr>
+          <p:cNvPr id="28" name="Group 27">
+            <a:extLst>
+              <a:ext uri="{FF2B5EF4-FFF2-40B4-BE49-F238E27FC236}">
+                <a16:creationId xmlns:a16="http://schemas.microsoft.com/office/drawing/2014/main" id="{1F9FB4A9-EE79-D517-7CB0-0137E41BC254}"/>
+              </a:ext>
+            </a:extLst>
+          </p:cNvPr>
+          <p:cNvGrpSpPr/>
+          <p:nvPr/>
+        </p:nvGrpSpPr>
+        <p:grpSpPr>
+          <a:xfrm>
+            <a:off x="2916198" y="370703"/>
+            <a:ext cx="234782" cy="5931243"/>
+            <a:chOff x="2916198" y="370703"/>
+            <a:chExt cx="234782" cy="5931243"/>
+          </a:xfrm>
+        </p:grpSpPr>
+        <p:cxnSp>
+          <p:nvCxnSpPr>
+            <p:cNvPr id="25" name="Straight Connector 24">
+              <a:extLst>
+                <a:ext uri="{FF2B5EF4-FFF2-40B4-BE49-F238E27FC236}">
+                  <a16:creationId xmlns:a16="http://schemas.microsoft.com/office/drawing/2014/main" id="{19A4991A-D991-1BDA-CC98-0997CE6A8821}"/>
+                </a:ext>
+              </a:extLst>
+            </p:cNvPr>
+            <p:cNvCxnSpPr>
+              <a:cxnSpLocks/>
+            </p:cNvCxnSpPr>
+            <p:nvPr/>
+          </p:nvCxnSpPr>
+          <p:spPr>
+            <a:xfrm flipH="1">
+              <a:off x="2997543" y="370703"/>
+              <a:ext cx="42219" cy="5931243"/>
+            </a:xfrm>
+            <a:prstGeom prst="line">
+              <a:avLst/>
+            </a:prstGeom>
+            <a:ln w="12700"/>
+          </p:spPr>
+          <p:style>
+            <a:lnRef idx="1">
+              <a:schemeClr val="accent1"/>
+            </a:lnRef>
+            <a:fillRef idx="0">
+              <a:schemeClr val="accent1"/>
+            </a:fillRef>
+            <a:effectRef idx="0">
+              <a:schemeClr val="accent1"/>
+            </a:effectRef>
+            <a:fontRef idx="minor">
+              <a:schemeClr val="tx1"/>
+            </a:fontRef>
+          </p:style>
+        </p:cxnSp>
+        <p:sp>
+          <p:nvSpPr>
+            <p:cNvPr id="27" name="Heart 26">
+              <a:extLst>
+                <a:ext uri="{FF2B5EF4-FFF2-40B4-BE49-F238E27FC236}">
+                  <a16:creationId xmlns:a16="http://schemas.microsoft.com/office/drawing/2014/main" id="{E1497C85-7CA3-F0EA-6715-04DA961C9BCA}"/>
+                </a:ext>
+              </a:extLst>
+            </p:cNvPr>
+            <p:cNvSpPr/>
+            <p:nvPr/>
+          </p:nvSpPr>
+          <p:spPr>
+            <a:xfrm>
+              <a:off x="2916198" y="481909"/>
+              <a:ext cx="234782" cy="247135"/>
+            </a:xfrm>
+            <a:prstGeom prst="heart">
+              <a:avLst/>
+            </a:prstGeom>
+          </p:spPr>
+          <p:style>
+            <a:lnRef idx="2">
+              <a:schemeClr val="accent1">
+                <a:shade val="15000"/>
+              </a:schemeClr>
+            </a:lnRef>
+            <a:fillRef idx="1">
+              <a:schemeClr val="accent1"/>
+            </a:fillRef>
+            <a:effectRef idx="0">
+              <a:schemeClr val="accent1"/>
+            </a:effectRef>
+            <a:fontRef idx="minor">
+              <a:schemeClr val="lt1"/>
+            </a:fontRef>
+          </p:style>
+          <p:txBody>
+            <a:bodyPr rtlCol="0" anchor="ctr"/>
+            <a:lstStyle/>
+            <a:p>
+              <a:pPr algn="ctr"/>
+              <a:endParaRPr lang="en-US"/>
+            </a:p>
+          </p:txBody>
+        </p:sp>
+      </p:grpSp>
+      <p:grpSp>
+        <p:nvGrpSpPr>
+          <p:cNvPr id="29" name="Group 28">
+            <a:extLst>
+              <a:ext uri="{FF2B5EF4-FFF2-40B4-BE49-F238E27FC236}">
+                <a16:creationId xmlns:a16="http://schemas.microsoft.com/office/drawing/2014/main" id="{34C29E20-971E-4F89-18D9-826004BA0E30}"/>
+              </a:ext>
+            </a:extLst>
+          </p:cNvPr>
+          <p:cNvGrpSpPr/>
+          <p:nvPr/>
+        </p:nvGrpSpPr>
+        <p:grpSpPr>
+          <a:xfrm>
+            <a:off x="9321136" y="374819"/>
+            <a:ext cx="234782" cy="5931243"/>
+            <a:chOff x="2916198" y="370703"/>
+            <a:chExt cx="234782" cy="5931243"/>
+          </a:xfrm>
+        </p:grpSpPr>
+        <p:cxnSp>
+          <p:nvCxnSpPr>
+            <p:cNvPr id="30" name="Straight Connector 29">
+              <a:extLst>
+                <a:ext uri="{FF2B5EF4-FFF2-40B4-BE49-F238E27FC236}">
+                  <a16:creationId xmlns:a16="http://schemas.microsoft.com/office/drawing/2014/main" id="{A76D7835-7443-5035-6F8D-473C0FE0DCB0}"/>
+                </a:ext>
+              </a:extLst>
+            </p:cNvPr>
+            <p:cNvCxnSpPr>
+              <a:cxnSpLocks/>
+            </p:cNvCxnSpPr>
+            <p:nvPr/>
+          </p:nvCxnSpPr>
+          <p:spPr>
+            <a:xfrm flipH="1">
+              <a:off x="2997543" y="370703"/>
+              <a:ext cx="42219" cy="5931243"/>
+            </a:xfrm>
+            <a:prstGeom prst="line">
+              <a:avLst/>
+            </a:prstGeom>
+            <a:ln w="12700"/>
+          </p:spPr>
+          <p:style>
+            <a:lnRef idx="1">
+              <a:schemeClr val="accent1"/>
+            </a:lnRef>
+            <a:fillRef idx="0">
+              <a:schemeClr val="accent1"/>
+            </a:fillRef>
+            <a:effectRef idx="0">
+              <a:schemeClr val="accent1"/>
+            </a:effectRef>
+            <a:fontRef idx="minor">
+              <a:schemeClr val="tx1"/>
+            </a:fontRef>
+          </p:style>
+        </p:cxnSp>
+        <p:sp>
+          <p:nvSpPr>
+            <p:cNvPr id="31" name="Heart 30">
+              <a:extLst>
+                <a:ext uri="{FF2B5EF4-FFF2-40B4-BE49-F238E27FC236}">
+                  <a16:creationId xmlns:a16="http://schemas.microsoft.com/office/drawing/2014/main" id="{D34E4A26-C96C-AD04-717D-04CC87A7995F}"/>
+                </a:ext>
+              </a:extLst>
+            </p:cNvPr>
+            <p:cNvSpPr/>
+            <p:nvPr/>
+          </p:nvSpPr>
+          <p:spPr>
+            <a:xfrm>
+              <a:off x="2916198" y="481909"/>
+              <a:ext cx="234782" cy="247135"/>
+            </a:xfrm>
+            <a:prstGeom prst="heart">
+              <a:avLst/>
+            </a:prstGeom>
+          </p:spPr>
+          <p:style>
+            <a:lnRef idx="2">
+              <a:schemeClr val="accent1">
+                <a:shade val="15000"/>
+              </a:schemeClr>
+            </a:lnRef>
+            <a:fillRef idx="1">
+              <a:schemeClr val="accent1"/>
+            </a:fillRef>
+            <a:effectRef idx="0">
+              <a:schemeClr val="accent1"/>
+            </a:effectRef>
+            <a:fontRef idx="minor">
+              <a:schemeClr val="lt1"/>
+            </a:fontRef>
+          </p:style>
+          <p:txBody>
+            <a:bodyPr rtlCol="0" anchor="ctr"/>
+            <a:lstStyle/>
+            <a:p>
+              <a:pPr algn="ctr"/>
+              <a:endParaRPr lang="en-US"/>
+            </a:p>
+          </p:txBody>
+        </p:sp>
+      </p:grpSp>
+      <p:cxnSp>
+        <p:nvCxnSpPr>
+          <p:cNvPr id="33" name="Straight Connector 32">
+            <a:extLst>
+              <a:ext uri="{FF2B5EF4-FFF2-40B4-BE49-F238E27FC236}">
+                <a16:creationId xmlns:a16="http://schemas.microsoft.com/office/drawing/2014/main" id="{7FAB98A3-7DDA-5836-F8B2-126BBCED6D82}"/>
+              </a:ext>
+            </a:extLst>
+          </p:cNvPr>
+          <p:cNvCxnSpPr>
+            <a:cxnSpLocks/>
+          </p:cNvCxnSpPr>
+          <p:nvPr/>
+        </p:nvCxnSpPr>
+        <p:spPr>
+          <a:xfrm>
+            <a:off x="1421030" y="1091498"/>
+            <a:ext cx="1371600" cy="0"/>
+          </a:xfrm>
+          <a:prstGeom prst="line">
+            <a:avLst/>
+          </a:prstGeom>
+        </p:spPr>
+        <p:style>
+          <a:lnRef idx="1">
+            <a:schemeClr val="accent1"/>
+          </a:lnRef>
+          <a:fillRef idx="0">
+            <a:schemeClr val="accent1"/>
+          </a:fillRef>
+          <a:effectRef idx="0">
+            <a:schemeClr val="accent1"/>
+          </a:effectRef>
+          <a:fontRef idx="minor">
+            <a:schemeClr val="tx1"/>
+          </a:fontRef>
+        </p:style>
+      </p:cxnSp>
+      <p:cxnSp>
+        <p:nvCxnSpPr>
+          <p:cNvPr id="35" name="Straight Connector 34">
+            <a:extLst>
+              <a:ext uri="{FF2B5EF4-FFF2-40B4-BE49-F238E27FC236}">
+                <a16:creationId xmlns:a16="http://schemas.microsoft.com/office/drawing/2014/main" id="{83A11ACB-9F19-F29F-9A22-075E4203A1E4}"/>
+              </a:ext>
+            </a:extLst>
+          </p:cNvPr>
+          <p:cNvCxnSpPr>
+            <a:cxnSpLocks/>
+          </p:cNvCxnSpPr>
+          <p:nvPr/>
+        </p:nvCxnSpPr>
+        <p:spPr>
+          <a:xfrm>
+            <a:off x="1544598" y="2471351"/>
+            <a:ext cx="1371600" cy="0"/>
+          </a:xfrm>
+          <a:prstGeom prst="line">
+            <a:avLst/>
+          </a:prstGeom>
+        </p:spPr>
+        <p:style>
+          <a:lnRef idx="1">
+            <a:schemeClr val="accent1"/>
+          </a:lnRef>
+          <a:fillRef idx="0">
+            <a:schemeClr val="accent1"/>
+          </a:fillRef>
+          <a:effectRef idx="0">
+            <a:schemeClr val="accent1"/>
+          </a:effectRef>
+          <a:fontRef idx="minor">
+            <a:schemeClr val="tx1"/>
+          </a:fontRef>
+        </p:style>
+      </p:cxnSp>
+      <p:cxnSp>
+        <p:nvCxnSpPr>
+          <p:cNvPr id="36" name="Straight Connector 35">
+            <a:extLst>
+              <a:ext uri="{FF2B5EF4-FFF2-40B4-BE49-F238E27FC236}">
+                <a16:creationId xmlns:a16="http://schemas.microsoft.com/office/drawing/2014/main" id="{A9D9FBF8-E57D-3681-16EA-5F4661F041CF}"/>
+              </a:ext>
+            </a:extLst>
+          </p:cNvPr>
+          <p:cNvCxnSpPr>
+            <a:cxnSpLocks/>
+          </p:cNvCxnSpPr>
+          <p:nvPr/>
+        </p:nvCxnSpPr>
+        <p:spPr>
+          <a:xfrm>
+            <a:off x="1449860" y="4456665"/>
+            <a:ext cx="1371600" cy="0"/>
+          </a:xfrm>
+          <a:prstGeom prst="line">
+            <a:avLst/>
+          </a:prstGeom>
+        </p:spPr>
+        <p:style>
+          <a:lnRef idx="1">
+            <a:schemeClr val="accent1"/>
+          </a:lnRef>
+          <a:fillRef idx="0">
+            <a:schemeClr val="accent1"/>
+          </a:fillRef>
+          <a:effectRef idx="0">
+            <a:schemeClr val="accent1"/>
+          </a:effectRef>
+          <a:fontRef idx="minor">
+            <a:schemeClr val="tx1"/>
+          </a:fontRef>
+        </p:style>
+      </p:cxnSp>
+      <p:cxnSp>
+        <p:nvCxnSpPr>
+          <p:cNvPr id="37" name="Straight Connector 36">
+            <a:extLst>
+              <a:ext uri="{FF2B5EF4-FFF2-40B4-BE49-F238E27FC236}">
+                <a16:creationId xmlns:a16="http://schemas.microsoft.com/office/drawing/2014/main" id="{84A0FDB8-A535-FF82-6428-C4F322BEFE13}"/>
+              </a:ext>
+            </a:extLst>
+          </p:cNvPr>
+          <p:cNvCxnSpPr>
+            <a:cxnSpLocks/>
+          </p:cNvCxnSpPr>
+          <p:nvPr/>
+        </p:nvCxnSpPr>
+        <p:spPr>
+          <a:xfrm>
+            <a:off x="1573428" y="5836518"/>
+            <a:ext cx="1371600" cy="0"/>
+          </a:xfrm>
+          <a:prstGeom prst="line">
+            <a:avLst/>
+          </a:prstGeom>
+        </p:spPr>
+        <p:style>
+          <a:lnRef idx="1">
+            <a:schemeClr val="accent1"/>
+          </a:lnRef>
+          <a:fillRef idx="0">
+            <a:schemeClr val="accent1"/>
+          </a:fillRef>
+          <a:effectRef idx="0">
+            <a:schemeClr val="accent1"/>
+          </a:effectRef>
+          <a:fontRef idx="minor">
+            <a:schemeClr val="tx1"/>
+          </a:fontRef>
+        </p:style>
+      </p:cxnSp>
+      <p:sp>
+        <p:nvSpPr>
+          <p:cNvPr id="38" name="TextBox 37">
+            <a:extLst>
+              <a:ext uri="{FF2B5EF4-FFF2-40B4-BE49-F238E27FC236}">
+                <a16:creationId xmlns:a16="http://schemas.microsoft.com/office/drawing/2014/main" id="{FB87CC85-34F7-A9C9-FCE1-16067D5998E5}"/>
+              </a:ext>
+            </a:extLst>
+          </p:cNvPr>
+          <p:cNvSpPr txBox="1"/>
+          <p:nvPr/>
+        </p:nvSpPr>
+        <p:spPr>
+          <a:xfrm>
+            <a:off x="1421030" y="1596759"/>
+            <a:ext cx="822661" cy="369332"/>
+          </a:xfrm>
+          <a:prstGeom prst="rect">
+            <a:avLst/>
+          </a:prstGeom>
+          <a:solidFill>
+            <a:schemeClr val="bg1"/>
+          </a:solidFill>
+        </p:spPr>
+        <p:txBody>
+          <a:bodyPr wrap="none" rtlCol="0">
+            <a:spAutoFit/>
+          </a:bodyPr>
+          <a:lstStyle/>
+          <a:p>
+            <a:r>
+              <a:rPr lang="en-US" dirty="0"/>
+              <a:t>Dupuit</a:t>
+            </a:r>
+          </a:p>
+        </p:txBody>
+      </p:sp>
+      <p:sp>
+        <p:nvSpPr>
+          <p:cNvPr id="39" name="TextBox 38">
+            <a:extLst>
+              <a:ext uri="{FF2B5EF4-FFF2-40B4-BE49-F238E27FC236}">
+                <a16:creationId xmlns:a16="http://schemas.microsoft.com/office/drawing/2014/main" id="{2BDB0B08-51C6-501A-240E-E9F8541F5CAF}"/>
+              </a:ext>
+            </a:extLst>
+          </p:cNvPr>
+          <p:cNvSpPr txBox="1"/>
+          <p:nvPr/>
+        </p:nvSpPr>
+        <p:spPr>
+          <a:xfrm>
+            <a:off x="1449860" y="4949570"/>
+            <a:ext cx="822661" cy="369332"/>
+          </a:xfrm>
+          <a:prstGeom prst="rect">
+            <a:avLst/>
+          </a:prstGeom>
+          <a:solidFill>
+            <a:schemeClr val="bg1"/>
+          </a:solidFill>
+        </p:spPr>
+        <p:txBody>
+          <a:bodyPr wrap="none" rtlCol="0">
+            <a:spAutoFit/>
+          </a:bodyPr>
+          <a:lstStyle/>
+          <a:p>
+            <a:r>
+              <a:rPr lang="en-US" dirty="0"/>
+              <a:t>Dupuit</a:t>
+            </a:r>
+          </a:p>
+        </p:txBody>
+      </p:sp>
+      <p:sp>
+        <p:nvSpPr>
+          <p:cNvPr id="40" name="Rectangular Callout 39">
+            <a:extLst>
+              <a:ext uri="{FF2B5EF4-FFF2-40B4-BE49-F238E27FC236}">
+                <a16:creationId xmlns:a16="http://schemas.microsoft.com/office/drawing/2014/main" id="{37F027C0-AE94-8594-58FA-06349C4FBD85}"/>
+              </a:ext>
+            </a:extLst>
+          </p:cNvPr>
+          <p:cNvSpPr/>
+          <p:nvPr/>
+        </p:nvSpPr>
+        <p:spPr>
+          <a:xfrm>
+            <a:off x="10194324" y="4337221"/>
+            <a:ext cx="1556952" cy="766119"/>
+          </a:xfrm>
+          <a:prstGeom prst="wedgeRectCallout">
+            <a:avLst>
+              <a:gd name="adj1" fmla="val -97817"/>
+              <a:gd name="adj2" fmla="val 141532"/>
+            </a:avLst>
+          </a:prstGeom>
+        </p:spPr>
+        <p:style>
+          <a:lnRef idx="2">
+            <a:schemeClr val="accent1">
+              <a:shade val="15000"/>
+            </a:schemeClr>
+          </a:lnRef>
+          <a:fillRef idx="1">
+            <a:schemeClr val="accent1"/>
+          </a:fillRef>
+          <a:effectRef idx="0">
+            <a:schemeClr val="accent1"/>
+          </a:effectRef>
+          <a:fontRef idx="minor">
+            <a:schemeClr val="lt1"/>
+          </a:fontRef>
+        </p:style>
+        <p:txBody>
+          <a:bodyPr rtlCol="0" anchor="ctr"/>
+          <a:lstStyle/>
+          <a:p>
+            <a:pPr algn="ctr"/>
+            <a:r>
+              <a:rPr lang="en-US" dirty="0" err="1"/>
+              <a:t>slootpeil</a:t>
+            </a:r>
+            <a:endParaRPr lang="en-US" dirty="0"/>
+          </a:p>
+        </p:txBody>
+      </p:sp>
+      <p:sp>
+        <p:nvSpPr>
+          <p:cNvPr id="42" name="Rectangular Callout 41">
+            <a:extLst>
+              <a:ext uri="{FF2B5EF4-FFF2-40B4-BE49-F238E27FC236}">
+                <a16:creationId xmlns:a16="http://schemas.microsoft.com/office/drawing/2014/main" id="{B1534CB2-3BC6-3FBA-F199-8F1150B39D29}"/>
+              </a:ext>
+            </a:extLst>
+          </p:cNvPr>
+          <p:cNvSpPr/>
+          <p:nvPr/>
+        </p:nvSpPr>
+        <p:spPr>
+          <a:xfrm>
+            <a:off x="5033319" y="3064482"/>
+            <a:ext cx="1556952" cy="766119"/>
+          </a:xfrm>
+          <a:prstGeom prst="wedgeRectCallout">
+            <a:avLst>
+              <a:gd name="adj1" fmla="val -103373"/>
+              <a:gd name="adj2" fmla="val 72177"/>
+            </a:avLst>
+          </a:prstGeom>
+        </p:spPr>
+        <p:style>
+          <a:lnRef idx="2">
+            <a:schemeClr val="accent1">
+              <a:shade val="15000"/>
+            </a:schemeClr>
+          </a:lnRef>
+          <a:fillRef idx="1">
+            <a:schemeClr val="accent1"/>
+          </a:fillRef>
+          <a:effectRef idx="0">
+            <a:schemeClr val="accent1"/>
+          </a:effectRef>
+          <a:fontRef idx="minor">
+            <a:schemeClr val="lt1"/>
+          </a:fontRef>
+        </p:style>
+        <p:txBody>
+          <a:bodyPr rtlCol="0" anchor="ctr"/>
+          <a:lstStyle/>
+          <a:p>
+            <a:pPr algn="ctr"/>
+            <a:r>
+              <a:rPr lang="en-US" dirty="0" err="1"/>
+              <a:t>radiaal</a:t>
+            </a:r>
+            <a:endParaRPr lang="en-US" dirty="0"/>
+          </a:p>
+        </p:txBody>
+      </p:sp>
+      <p:sp>
+        <p:nvSpPr>
+          <p:cNvPr id="43" name="Rectangular Callout 42">
+            <a:extLst>
+              <a:ext uri="{FF2B5EF4-FFF2-40B4-BE49-F238E27FC236}">
+                <a16:creationId xmlns:a16="http://schemas.microsoft.com/office/drawing/2014/main" id="{2EB29A67-DA88-FD57-2965-B7DD4510C849}"/>
+              </a:ext>
+            </a:extLst>
+          </p:cNvPr>
+          <p:cNvSpPr/>
+          <p:nvPr/>
+        </p:nvSpPr>
+        <p:spPr>
+          <a:xfrm>
+            <a:off x="4769714" y="350105"/>
+            <a:ext cx="1556952" cy="766119"/>
+          </a:xfrm>
+          <a:prstGeom prst="wedgeRectCallout">
+            <a:avLst>
+              <a:gd name="adj1" fmla="val -127182"/>
+              <a:gd name="adj2" fmla="val 68951"/>
+            </a:avLst>
+          </a:prstGeom>
+        </p:spPr>
+        <p:style>
+          <a:lnRef idx="2">
+            <a:schemeClr val="accent1">
+              <a:shade val="15000"/>
+            </a:schemeClr>
+          </a:lnRef>
+          <a:fillRef idx="1">
+            <a:schemeClr val="accent1"/>
+          </a:fillRef>
+          <a:effectRef idx="0">
+            <a:schemeClr val="accent1"/>
+          </a:effectRef>
+          <a:fontRef idx="minor">
+            <a:schemeClr val="lt1"/>
+          </a:fontRef>
+        </p:style>
+        <p:txBody>
+          <a:bodyPr rtlCol="0" anchor="ctr"/>
+          <a:lstStyle/>
+          <a:p>
+            <a:pPr algn="ctr"/>
+            <a:r>
+              <a:rPr lang="en-US" dirty="0"/>
+              <a:t>D/(2k</a:t>
+            </a:r>
+            <a:r>
+              <a:rPr lang="en-US" baseline="-25000" dirty="0"/>
+              <a:t>v</a:t>
+            </a:r>
+            <a:r>
+              <a:rPr lang="en-US" dirty="0"/>
+              <a:t>)</a:t>
+            </a:r>
+          </a:p>
+        </p:txBody>
+      </p:sp>
+      <p:sp>
+        <p:nvSpPr>
+          <p:cNvPr id="44" name="Rectangular Callout 43">
+            <a:extLst>
+              <a:ext uri="{FF2B5EF4-FFF2-40B4-BE49-F238E27FC236}">
+                <a16:creationId xmlns:a16="http://schemas.microsoft.com/office/drawing/2014/main" id="{8DC43350-86DB-9EBD-CE90-A2BDEB4FA081}"/>
+              </a:ext>
+            </a:extLst>
+          </p:cNvPr>
+          <p:cNvSpPr/>
+          <p:nvPr/>
+        </p:nvSpPr>
+        <p:spPr>
+          <a:xfrm>
+            <a:off x="5589379" y="5612030"/>
+            <a:ext cx="1556952" cy="766119"/>
+          </a:xfrm>
+          <a:prstGeom prst="wedgeRectCallout">
+            <a:avLst>
+              <a:gd name="adj1" fmla="val -180357"/>
+              <a:gd name="adj2" fmla="val 1209"/>
+            </a:avLst>
+          </a:prstGeom>
+        </p:spPr>
+        <p:style>
+          <a:lnRef idx="2">
+            <a:schemeClr val="accent1">
+              <a:shade val="15000"/>
+            </a:schemeClr>
+          </a:lnRef>
+          <a:fillRef idx="1">
+            <a:schemeClr val="accent1"/>
+          </a:fillRef>
+          <a:effectRef idx="0">
+            <a:schemeClr val="accent1"/>
+          </a:effectRef>
+          <a:fontRef idx="minor">
+            <a:schemeClr val="lt1"/>
+          </a:fontRef>
+        </p:style>
+        <p:txBody>
+          <a:bodyPr rtlCol="0" anchor="ctr"/>
+          <a:lstStyle/>
+          <a:p>
+            <a:pPr algn="ctr"/>
+            <a:r>
+              <a:rPr lang="en-US" dirty="0"/>
+              <a:t>D/(2k</a:t>
+            </a:r>
+            <a:r>
+              <a:rPr lang="en-US" baseline="-25000" dirty="0"/>
+              <a:t>v</a:t>
+            </a:r>
+            <a:r>
+              <a:rPr lang="en-US" dirty="0"/>
+              <a:t>)</a:t>
+            </a:r>
+          </a:p>
+        </p:txBody>
+      </p:sp>
+      <p:sp>
+        <p:nvSpPr>
+          <p:cNvPr id="45" name="Rectangular Callout 44">
+            <a:extLst>
+              <a:ext uri="{FF2B5EF4-FFF2-40B4-BE49-F238E27FC236}">
+                <a16:creationId xmlns:a16="http://schemas.microsoft.com/office/drawing/2014/main" id="{A1ADB33F-DB8D-D65F-9718-CC7355A431BB}"/>
+              </a:ext>
+            </a:extLst>
+          </p:cNvPr>
+          <p:cNvSpPr/>
+          <p:nvPr/>
+        </p:nvSpPr>
+        <p:spPr>
+          <a:xfrm>
+            <a:off x="7166924" y="778475"/>
+            <a:ext cx="1556952" cy="766119"/>
+          </a:xfrm>
+          <a:prstGeom prst="wedgeRectCallout">
+            <a:avLst>
+              <a:gd name="adj1" fmla="val -83531"/>
+              <a:gd name="adj2" fmla="val 47983"/>
+            </a:avLst>
+          </a:prstGeom>
+        </p:spPr>
+        <p:style>
+          <a:lnRef idx="2">
+            <a:schemeClr val="accent1">
+              <a:shade val="15000"/>
+            </a:schemeClr>
+          </a:lnRef>
+          <a:fillRef idx="1">
+            <a:schemeClr val="accent1"/>
+          </a:fillRef>
+          <a:effectRef idx="0">
+            <a:schemeClr val="accent1"/>
+          </a:effectRef>
+          <a:fontRef idx="minor">
+            <a:schemeClr val="lt1"/>
+          </a:fontRef>
+        </p:style>
+        <p:txBody>
+          <a:bodyPr rtlCol="0" anchor="ctr"/>
+          <a:lstStyle/>
+          <a:p>
+            <a:pPr algn="ctr"/>
+            <a:r>
+              <a:rPr lang="en-US" dirty="0" err="1"/>
+              <a:t>freatisch</a:t>
+            </a:r>
+            <a:r>
+              <a:rPr lang="en-US" dirty="0"/>
+              <a:t> </a:t>
+            </a:r>
+            <a:r>
+              <a:rPr lang="en-US" dirty="0" err="1"/>
+              <a:t>vlak</a:t>
+            </a:r>
+            <a:endParaRPr lang="en-US" dirty="0"/>
+          </a:p>
+        </p:txBody>
+      </p:sp>
+    </p:spTree>
+    <p:extLst>
+      <p:ext uri="{BB962C8B-B14F-4D97-AF65-F5344CB8AC3E}">
+        <p14:creationId xmlns:p14="http://schemas.microsoft.com/office/powerpoint/2010/main" val="1380083393"/>
+      </p:ext>
+    </p:extLst>
+  </p:cSld>
+  <p:clrMapOvr>
+    <a:masterClrMapping/>
+  </p:clrMapOvr>
+</p:sld>
+</file>
+
+<file path=ppt/slides/slide4.xml><?xml version="1.0" encoding="utf-8"?>
+<p:sld xmlns:a="http://schemas.openxmlformats.org/drawingml/2006/main" xmlns:r="http://schemas.openxmlformats.org/officeDocument/2006/relationships" xmlns:p="http://schemas.openxmlformats.org/presentationml/2006/main">
+  <p:cSld>
+    <p:spTree>
+      <p:nvGrpSpPr>
+        <p:cNvPr id="1" name=""/>
+        <p:cNvGrpSpPr/>
+        <p:nvPr/>
+      </p:nvGrpSpPr>
+      <p:grpSpPr>
+        <a:xfrm>
+          <a:off x="0" y="0"/>
+          <a:ext cx="0" cy="0"/>
+          <a:chOff x="0" y="0"/>
+          <a:chExt cx="0" cy="0"/>
+        </a:xfrm>
+      </p:grpSpPr>
+      <p:pic>
+        <p:nvPicPr>
+          <p:cNvPr id="2" name="Picture 1">
+            <a:extLst>
+              <a:ext uri="{FF2B5EF4-FFF2-40B4-BE49-F238E27FC236}">
+                <a16:creationId xmlns:a16="http://schemas.microsoft.com/office/drawing/2014/main" id="{09822E87-7559-8D38-7C57-D6EA7E005B06}"/>
+              </a:ext>
+            </a:extLst>
+          </p:cNvPr>
+          <p:cNvPicPr>
+            <a:picLocks noChangeAspect="1"/>
+          </p:cNvPicPr>
+          <p:nvPr/>
+        </p:nvPicPr>
+        <p:blipFill>
+          <a:blip r:embed="rId2"/>
+          <a:stretch>
+            <a:fillRect/>
+          </a:stretch>
+        </p:blipFill>
+        <p:spPr>
+          <a:xfrm>
+            <a:off x="2815278" y="516785"/>
+            <a:ext cx="7772400" cy="5824430"/>
+          </a:xfrm>
+          <a:prstGeom prst="rect">
+            <a:avLst/>
+          </a:prstGeom>
+        </p:spPr>
+      </p:pic>
+      <p:cxnSp>
+        <p:nvCxnSpPr>
+          <p:cNvPr id="9" name="Straight Connector 8">
+            <a:extLst>
+              <a:ext uri="{FF2B5EF4-FFF2-40B4-BE49-F238E27FC236}">
+                <a16:creationId xmlns:a16="http://schemas.microsoft.com/office/drawing/2014/main" id="{88A64524-CAE8-8D12-3AF1-818F31BD1895}"/>
+              </a:ext>
+            </a:extLst>
+          </p:cNvPr>
+          <p:cNvCxnSpPr>
+            <a:cxnSpLocks/>
+          </p:cNvCxnSpPr>
+          <p:nvPr/>
+        </p:nvCxnSpPr>
+        <p:spPr>
+          <a:xfrm>
+            <a:off x="2984154" y="5189839"/>
+            <a:ext cx="6555259" cy="0"/>
+          </a:xfrm>
+          <a:prstGeom prst="line">
+            <a:avLst/>
+          </a:prstGeom>
+          <a:ln w="12700"/>
+        </p:spPr>
+        <p:style>
+          <a:lnRef idx="1">
+            <a:schemeClr val="accent1"/>
+          </a:lnRef>
+          <a:fillRef idx="0">
+            <a:schemeClr val="accent1"/>
+          </a:fillRef>
+          <a:effectRef idx="0">
+            <a:schemeClr val="accent1"/>
+          </a:effectRef>
+          <a:fontRef idx="minor">
+            <a:schemeClr val="tx1"/>
+          </a:fontRef>
+        </p:style>
+      </p:cxnSp>
+      <p:grpSp>
+        <p:nvGrpSpPr>
+          <p:cNvPr id="42" name="Group 41">
+            <a:extLst>
+              <a:ext uri="{FF2B5EF4-FFF2-40B4-BE49-F238E27FC236}">
+                <a16:creationId xmlns:a16="http://schemas.microsoft.com/office/drawing/2014/main" id="{FC100632-7550-CC39-E89A-E0A61F0D5E7F}"/>
+              </a:ext>
+            </a:extLst>
+          </p:cNvPr>
+          <p:cNvGrpSpPr/>
+          <p:nvPr/>
+        </p:nvGrpSpPr>
+        <p:grpSpPr>
+          <a:xfrm>
+            <a:off x="1201550" y="1408670"/>
+            <a:ext cx="4502962" cy="4077730"/>
+            <a:chOff x="1201550" y="1408670"/>
+            <a:chExt cx="4502962" cy="4077730"/>
+          </a:xfrm>
+        </p:grpSpPr>
+        <p:cxnSp>
+          <p:nvCxnSpPr>
+            <p:cNvPr id="4" name="Straight Connector 3">
+              <a:extLst>
+                <a:ext uri="{FF2B5EF4-FFF2-40B4-BE49-F238E27FC236}">
+                  <a16:creationId xmlns:a16="http://schemas.microsoft.com/office/drawing/2014/main" id="{34BF98C2-5B45-FA36-5BA6-CFB4D7D465AD}"/>
+                </a:ext>
+              </a:extLst>
+            </p:cNvPr>
+            <p:cNvCxnSpPr>
+              <a:cxnSpLocks/>
+            </p:cNvCxnSpPr>
+            <p:nvPr/>
+          </p:nvCxnSpPr>
+          <p:spPr>
+            <a:xfrm>
+              <a:off x="1779370" y="1408670"/>
+              <a:ext cx="2051222" cy="0"/>
+            </a:xfrm>
+            <a:prstGeom prst="line">
+              <a:avLst/>
+            </a:prstGeom>
+            <a:ln w="12700"/>
+          </p:spPr>
+          <p:style>
+            <a:lnRef idx="1">
+              <a:schemeClr val="accent1"/>
+            </a:lnRef>
+            <a:fillRef idx="0">
+              <a:schemeClr val="accent1"/>
+            </a:fillRef>
+            <a:effectRef idx="0">
+              <a:schemeClr val="accent1"/>
+            </a:effectRef>
+            <a:fontRef idx="minor">
+              <a:schemeClr val="tx1"/>
+            </a:fontRef>
+          </p:style>
+        </p:cxnSp>
+        <p:cxnSp>
+          <p:nvCxnSpPr>
+            <p:cNvPr id="7" name="Straight Connector 6">
+              <a:extLst>
+                <a:ext uri="{FF2B5EF4-FFF2-40B4-BE49-F238E27FC236}">
+                  <a16:creationId xmlns:a16="http://schemas.microsoft.com/office/drawing/2014/main" id="{41BBF669-DEC3-E41C-AAD3-0CBF1E9A8AEB}"/>
+                </a:ext>
+              </a:extLst>
+            </p:cNvPr>
+            <p:cNvCxnSpPr>
+              <a:cxnSpLocks/>
+            </p:cNvCxnSpPr>
+            <p:nvPr/>
+          </p:nvCxnSpPr>
+          <p:spPr>
+            <a:xfrm>
+              <a:off x="1779370" y="2574324"/>
+              <a:ext cx="2051222" cy="0"/>
+            </a:xfrm>
+            <a:prstGeom prst="line">
+              <a:avLst/>
+            </a:prstGeom>
+            <a:ln w="12700"/>
+          </p:spPr>
+          <p:style>
+            <a:lnRef idx="1">
+              <a:schemeClr val="accent1"/>
+            </a:lnRef>
+            <a:fillRef idx="0">
+              <a:schemeClr val="accent1"/>
+            </a:fillRef>
+            <a:effectRef idx="0">
+              <a:schemeClr val="accent1"/>
+            </a:effectRef>
+            <a:fontRef idx="minor">
+              <a:schemeClr val="tx1"/>
+            </a:fontRef>
+          </p:style>
+        </p:cxnSp>
+        <p:cxnSp>
+          <p:nvCxnSpPr>
+            <p:cNvPr id="8" name="Straight Connector 7">
+              <a:extLst>
+                <a:ext uri="{FF2B5EF4-FFF2-40B4-BE49-F238E27FC236}">
+                  <a16:creationId xmlns:a16="http://schemas.microsoft.com/office/drawing/2014/main" id="{CFD0D5F0-92D0-8825-4A2B-AF3E9AD990BB}"/>
+                </a:ext>
+              </a:extLst>
+            </p:cNvPr>
+            <p:cNvCxnSpPr>
+              <a:cxnSpLocks/>
+            </p:cNvCxnSpPr>
+            <p:nvPr/>
+          </p:nvCxnSpPr>
+          <p:spPr>
+            <a:xfrm>
+              <a:off x="2984154" y="3987113"/>
+              <a:ext cx="846438" cy="0"/>
+            </a:xfrm>
+            <a:prstGeom prst="line">
+              <a:avLst/>
+            </a:prstGeom>
+            <a:ln w="12700"/>
+          </p:spPr>
+          <p:style>
+            <a:lnRef idx="1">
+              <a:schemeClr val="accent1"/>
+            </a:lnRef>
+            <a:fillRef idx="0">
+              <a:schemeClr val="accent1"/>
+            </a:fillRef>
+            <a:effectRef idx="0">
+              <a:schemeClr val="accent1"/>
+            </a:effectRef>
+            <a:fontRef idx="minor">
+              <a:schemeClr val="tx1"/>
+            </a:fontRef>
+          </p:style>
+        </p:cxnSp>
+        <p:cxnSp>
+          <p:nvCxnSpPr>
+            <p:cNvPr id="13" name="Straight Connector 12">
+              <a:extLst>
+                <a:ext uri="{FF2B5EF4-FFF2-40B4-BE49-F238E27FC236}">
+                  <a16:creationId xmlns:a16="http://schemas.microsoft.com/office/drawing/2014/main" id="{9E98D2B4-DC0E-097E-3D6B-D8FB929961DB}"/>
+                </a:ext>
+              </a:extLst>
+            </p:cNvPr>
+            <p:cNvCxnSpPr>
+              <a:cxnSpLocks/>
+            </p:cNvCxnSpPr>
+            <p:nvPr/>
+          </p:nvCxnSpPr>
+          <p:spPr>
+            <a:xfrm>
+              <a:off x="2164489" y="4296032"/>
+              <a:ext cx="1692876" cy="0"/>
+            </a:xfrm>
+            <a:prstGeom prst="line">
+              <a:avLst/>
+            </a:prstGeom>
+            <a:ln w="12700"/>
+          </p:spPr>
+          <p:style>
+            <a:lnRef idx="1">
+              <a:schemeClr val="accent1"/>
+            </a:lnRef>
+            <a:fillRef idx="0">
+              <a:schemeClr val="accent1"/>
+            </a:fillRef>
+            <a:effectRef idx="0">
+              <a:schemeClr val="accent1"/>
+            </a:effectRef>
+            <a:fontRef idx="minor">
+              <a:schemeClr val="tx1"/>
+            </a:fontRef>
+          </p:style>
+        </p:cxnSp>
+        <p:cxnSp>
+          <p:nvCxnSpPr>
+            <p:cNvPr id="14" name="Straight Connector 13">
+              <a:extLst>
+                <a:ext uri="{FF2B5EF4-FFF2-40B4-BE49-F238E27FC236}">
+                  <a16:creationId xmlns:a16="http://schemas.microsoft.com/office/drawing/2014/main" id="{6A677DDE-C132-F474-0A74-8EAFB0E9A189}"/>
+                </a:ext>
+              </a:extLst>
+            </p:cNvPr>
+            <p:cNvCxnSpPr>
+              <a:cxnSpLocks/>
+            </p:cNvCxnSpPr>
+            <p:nvPr/>
+          </p:nvCxnSpPr>
+          <p:spPr>
+            <a:xfrm>
+              <a:off x="1551800" y="5486400"/>
+              <a:ext cx="2278792" cy="0"/>
+            </a:xfrm>
+            <a:prstGeom prst="line">
+              <a:avLst/>
+            </a:prstGeom>
+            <a:ln w="12700"/>
+          </p:spPr>
+          <p:style>
+            <a:lnRef idx="1">
+              <a:schemeClr val="accent1"/>
+            </a:lnRef>
+            <a:fillRef idx="0">
+              <a:schemeClr val="accent1"/>
+            </a:fillRef>
+            <a:effectRef idx="0">
+              <a:schemeClr val="accent1"/>
+            </a:effectRef>
+            <a:fontRef idx="minor">
+              <a:schemeClr val="tx1"/>
+            </a:fontRef>
+          </p:style>
+        </p:cxnSp>
+        <p:cxnSp>
+          <p:nvCxnSpPr>
+            <p:cNvPr id="16" name="Straight Arrow Connector 15">
+              <a:extLst>
+                <a:ext uri="{FF2B5EF4-FFF2-40B4-BE49-F238E27FC236}">
+                  <a16:creationId xmlns:a16="http://schemas.microsoft.com/office/drawing/2014/main" id="{DC99AD01-B9CA-0106-A332-9EA13B4FFC5B}"/>
+                </a:ext>
+              </a:extLst>
+            </p:cNvPr>
+            <p:cNvCxnSpPr>
+              <a:cxnSpLocks/>
+            </p:cNvCxnSpPr>
+            <p:nvPr/>
+          </p:nvCxnSpPr>
+          <p:spPr>
+            <a:xfrm>
+              <a:off x="1779370" y="1408670"/>
+              <a:ext cx="0" cy="1165654"/>
+            </a:xfrm>
+            <a:prstGeom prst="straightConnector1">
+              <a:avLst/>
+            </a:prstGeom>
+            <a:ln w="15875">
+              <a:headEnd type="triangle" w="lg" len="lg"/>
+              <a:tailEnd type="triangle" w="lg" len="lg"/>
+            </a:ln>
+          </p:spPr>
+          <p:style>
+            <a:lnRef idx="1">
+              <a:schemeClr val="accent1"/>
+            </a:lnRef>
+            <a:fillRef idx="0">
+              <a:schemeClr val="accent1"/>
+            </a:fillRef>
+            <a:effectRef idx="0">
+              <a:schemeClr val="accent1"/>
+            </a:effectRef>
+            <a:fontRef idx="minor">
+              <a:schemeClr val="tx1"/>
+            </a:fontRef>
+          </p:style>
+        </p:cxnSp>
+        <p:cxnSp>
+          <p:nvCxnSpPr>
+            <p:cNvPr id="19" name="Straight Arrow Connector 18">
+              <a:extLst>
+                <a:ext uri="{FF2B5EF4-FFF2-40B4-BE49-F238E27FC236}">
+                  <a16:creationId xmlns:a16="http://schemas.microsoft.com/office/drawing/2014/main" id="{0B7ABD89-4FB4-92D3-35EE-30802E07FF71}"/>
+                </a:ext>
+              </a:extLst>
+            </p:cNvPr>
+            <p:cNvCxnSpPr>
+              <a:cxnSpLocks/>
+            </p:cNvCxnSpPr>
+            <p:nvPr/>
+          </p:nvCxnSpPr>
+          <p:spPr>
+            <a:xfrm>
+              <a:off x="3015046" y="3987113"/>
+              <a:ext cx="0" cy="1165654"/>
+            </a:xfrm>
+            <a:prstGeom prst="straightConnector1">
+              <a:avLst/>
+            </a:prstGeom>
+            <a:ln w="15875">
+              <a:headEnd type="triangle" w="lg" len="lg"/>
+              <a:tailEnd type="triangle" w="lg" len="lg"/>
+            </a:ln>
+          </p:spPr>
+          <p:style>
+            <a:lnRef idx="1">
+              <a:schemeClr val="accent1"/>
+            </a:lnRef>
+            <a:fillRef idx="0">
+              <a:schemeClr val="accent1"/>
+            </a:fillRef>
+            <a:effectRef idx="0">
+              <a:schemeClr val="accent1"/>
+            </a:effectRef>
+            <a:fontRef idx="minor">
+              <a:schemeClr val="tx1"/>
+            </a:fontRef>
+          </p:style>
+        </p:cxnSp>
+        <p:cxnSp>
+          <p:nvCxnSpPr>
+            <p:cNvPr id="20" name="Straight Arrow Connector 19">
+              <a:extLst>
+                <a:ext uri="{FF2B5EF4-FFF2-40B4-BE49-F238E27FC236}">
+                  <a16:creationId xmlns:a16="http://schemas.microsoft.com/office/drawing/2014/main" id="{CCF8DC35-CF03-1112-5EC9-D68823151752}"/>
+                </a:ext>
+              </a:extLst>
+            </p:cNvPr>
+            <p:cNvCxnSpPr>
+              <a:cxnSpLocks/>
+            </p:cNvCxnSpPr>
+            <p:nvPr/>
+          </p:nvCxnSpPr>
+          <p:spPr>
+            <a:xfrm>
+              <a:off x="2483706" y="4296032"/>
+              <a:ext cx="0" cy="1165654"/>
+            </a:xfrm>
+            <a:prstGeom prst="straightConnector1">
+              <a:avLst/>
+            </a:prstGeom>
+            <a:ln w="15875">
+              <a:headEnd type="triangle" w="lg" len="lg"/>
+              <a:tailEnd type="triangle" w="lg" len="lg"/>
+            </a:ln>
+          </p:spPr>
+          <p:style>
+            <a:lnRef idx="1">
+              <a:schemeClr val="accent1"/>
+            </a:lnRef>
+            <a:fillRef idx="0">
+              <a:schemeClr val="accent1"/>
+            </a:fillRef>
+            <a:effectRef idx="0">
+              <a:schemeClr val="accent1"/>
+            </a:effectRef>
+            <a:fontRef idx="minor">
+              <a:schemeClr val="tx1"/>
+            </a:fontRef>
+          </p:style>
+        </p:cxnSp>
+        <p:cxnSp>
+          <p:nvCxnSpPr>
+            <p:cNvPr id="24" name="Straight Arrow Connector 23">
+              <a:extLst>
+                <a:ext uri="{FF2B5EF4-FFF2-40B4-BE49-F238E27FC236}">
+                  <a16:creationId xmlns:a16="http://schemas.microsoft.com/office/drawing/2014/main" id="{82C2A513-239C-72C2-0A86-06D9995B4C37}"/>
+                </a:ext>
+              </a:extLst>
+            </p:cNvPr>
+            <p:cNvCxnSpPr>
+              <a:cxnSpLocks/>
+            </p:cNvCxnSpPr>
+            <p:nvPr/>
+          </p:nvCxnSpPr>
+          <p:spPr>
+            <a:xfrm>
+              <a:off x="1779370" y="2574324"/>
+              <a:ext cx="0" cy="2887362"/>
+            </a:xfrm>
+            <a:prstGeom prst="straightConnector1">
+              <a:avLst/>
+            </a:prstGeom>
+            <a:ln w="15875">
+              <a:headEnd type="triangle" w="lg" len="lg"/>
+              <a:tailEnd type="triangle" w="lg" len="lg"/>
+            </a:ln>
+          </p:spPr>
+          <p:style>
+            <a:lnRef idx="1">
+              <a:schemeClr val="accent1"/>
+            </a:lnRef>
+            <a:fillRef idx="0">
+              <a:schemeClr val="accent1"/>
+            </a:fillRef>
+            <a:effectRef idx="0">
+              <a:schemeClr val="accent1"/>
+            </a:effectRef>
+            <a:fontRef idx="minor">
+              <a:schemeClr val="tx1"/>
+            </a:fontRef>
+          </p:style>
+        </p:cxnSp>
+        <p:sp>
+          <p:nvSpPr>
+            <p:cNvPr id="26" name="TextBox 25">
+              <a:extLst>
+                <a:ext uri="{FF2B5EF4-FFF2-40B4-BE49-F238E27FC236}">
+                  <a16:creationId xmlns:a16="http://schemas.microsoft.com/office/drawing/2014/main" id="{6FEBFDB1-6D5C-22DA-D7B0-15BF8F27E7F9}"/>
+                </a:ext>
+              </a:extLst>
+            </p:cNvPr>
+            <p:cNvSpPr txBox="1"/>
+            <p:nvPr/>
+          </p:nvSpPr>
+          <p:spPr>
+            <a:xfrm>
+              <a:off x="1368039" y="1819188"/>
+              <a:ext cx="822661" cy="369332"/>
+            </a:xfrm>
+            <a:prstGeom prst="rect">
+              <a:avLst/>
+            </a:prstGeom>
+            <a:solidFill>
+              <a:schemeClr val="bg1"/>
+            </a:solidFill>
+          </p:spPr>
+          <p:txBody>
+            <a:bodyPr wrap="none" rtlCol="0">
+              <a:spAutoFit/>
+            </a:bodyPr>
+            <a:lstStyle/>
+            <a:p>
+              <a:r>
+                <a:rPr lang="en-US" dirty="0"/>
+                <a:t>Dupuit</a:t>
+              </a:r>
+            </a:p>
+          </p:txBody>
+        </p:sp>
+        <p:sp>
+          <p:nvSpPr>
+            <p:cNvPr id="27" name="TextBox 26">
+              <a:extLst>
+                <a:ext uri="{FF2B5EF4-FFF2-40B4-BE49-F238E27FC236}">
+                  <a16:creationId xmlns:a16="http://schemas.microsoft.com/office/drawing/2014/main" id="{BF61ECD8-D126-EE00-746E-C9DAB9637D65}"/>
+                </a:ext>
+              </a:extLst>
+            </p:cNvPr>
+            <p:cNvSpPr txBox="1"/>
+            <p:nvPr/>
+          </p:nvSpPr>
+          <p:spPr>
+            <a:xfrm>
+              <a:off x="2631518" y="4378135"/>
+              <a:ext cx="822661" cy="369332"/>
+            </a:xfrm>
+            <a:prstGeom prst="rect">
+              <a:avLst/>
+            </a:prstGeom>
+            <a:solidFill>
+              <a:schemeClr val="bg1"/>
+            </a:solidFill>
+          </p:spPr>
+          <p:txBody>
+            <a:bodyPr wrap="none" rtlCol="0">
+              <a:spAutoFit/>
+            </a:bodyPr>
+            <a:lstStyle/>
+            <a:p>
+              <a:r>
+                <a:rPr lang="en-US" dirty="0"/>
+                <a:t>Dupuit</a:t>
+              </a:r>
+            </a:p>
+          </p:txBody>
+        </p:sp>
+        <p:sp>
+          <p:nvSpPr>
+            <p:cNvPr id="28" name="TextBox 27">
+              <a:extLst>
+                <a:ext uri="{FF2B5EF4-FFF2-40B4-BE49-F238E27FC236}">
+                  <a16:creationId xmlns:a16="http://schemas.microsoft.com/office/drawing/2014/main" id="{4A96FB0E-936A-225E-36C5-9B04B18B27F6}"/>
+                </a:ext>
+              </a:extLst>
+            </p:cNvPr>
+            <p:cNvSpPr txBox="1"/>
+            <p:nvPr/>
+          </p:nvSpPr>
+          <p:spPr>
+            <a:xfrm>
+              <a:off x="2072375" y="4677853"/>
+              <a:ext cx="822661" cy="369332"/>
+            </a:xfrm>
+            <a:prstGeom prst="rect">
+              <a:avLst/>
+            </a:prstGeom>
+            <a:solidFill>
+              <a:schemeClr val="bg1"/>
+            </a:solidFill>
+          </p:spPr>
+          <p:txBody>
+            <a:bodyPr wrap="none" rtlCol="0">
+              <a:spAutoFit/>
+            </a:bodyPr>
+            <a:lstStyle/>
+            <a:p>
+              <a:r>
+                <a:rPr lang="en-US" dirty="0"/>
+                <a:t>Dupuit</a:t>
+              </a:r>
+            </a:p>
+          </p:txBody>
+        </p:sp>
+        <p:sp>
+          <p:nvSpPr>
+            <p:cNvPr id="29" name="TextBox 28">
+              <a:extLst>
+                <a:ext uri="{FF2B5EF4-FFF2-40B4-BE49-F238E27FC236}">
+                  <a16:creationId xmlns:a16="http://schemas.microsoft.com/office/drawing/2014/main" id="{C3667DF6-ABAB-DDB8-D444-5EDD73D1B505}"/>
+                </a:ext>
+              </a:extLst>
+            </p:cNvPr>
+            <p:cNvSpPr txBox="1"/>
+            <p:nvPr/>
+          </p:nvSpPr>
+          <p:spPr>
+            <a:xfrm>
+              <a:off x="1201550" y="3429000"/>
+              <a:ext cx="1155637" cy="369332"/>
+            </a:xfrm>
+            <a:prstGeom prst="rect">
+              <a:avLst/>
+            </a:prstGeom>
+            <a:solidFill>
+              <a:schemeClr val="bg1"/>
+            </a:solidFill>
+          </p:spPr>
+          <p:txBody>
+            <a:bodyPr wrap="none" rtlCol="0">
+              <a:spAutoFit/>
+            </a:bodyPr>
+            <a:lstStyle/>
+            <a:p>
+              <a:r>
+                <a:rPr lang="en-US" dirty="0" err="1"/>
+                <a:t>Contractie</a:t>
+              </a:r>
+              <a:endParaRPr lang="en-US" dirty="0"/>
+            </a:p>
+          </p:txBody>
+        </p:sp>
+        <p:cxnSp>
+          <p:nvCxnSpPr>
+            <p:cNvPr id="30" name="Straight Arrow Connector 29">
+              <a:extLst>
+                <a:ext uri="{FF2B5EF4-FFF2-40B4-BE49-F238E27FC236}">
+                  <a16:creationId xmlns:a16="http://schemas.microsoft.com/office/drawing/2014/main" id="{89A01670-5B2B-9500-22B4-E31CD39D463E}"/>
+                </a:ext>
+              </a:extLst>
+            </p:cNvPr>
+            <p:cNvCxnSpPr>
+              <a:cxnSpLocks/>
+            </p:cNvCxnSpPr>
+            <p:nvPr/>
+          </p:nvCxnSpPr>
+          <p:spPr>
+            <a:xfrm>
+              <a:off x="4749112" y="1408670"/>
+              <a:ext cx="0" cy="284206"/>
+            </a:xfrm>
+            <a:prstGeom prst="straightConnector1">
+              <a:avLst/>
+            </a:prstGeom>
+            <a:ln w="15875">
+              <a:headEnd type="triangle" w="med" len="med"/>
+              <a:tailEnd type="triangle" w="med" len="med"/>
+            </a:ln>
+          </p:spPr>
+          <p:style>
+            <a:lnRef idx="1">
+              <a:schemeClr val="accent1"/>
+            </a:lnRef>
+            <a:fillRef idx="0">
+              <a:schemeClr val="accent1"/>
+            </a:fillRef>
+            <a:effectRef idx="0">
+              <a:schemeClr val="accent1"/>
+            </a:effectRef>
+            <a:fontRef idx="minor">
+              <a:schemeClr val="tx1"/>
+            </a:fontRef>
+          </p:style>
+        </p:cxnSp>
+        <p:cxnSp>
+          <p:nvCxnSpPr>
+            <p:cNvPr id="33" name="Straight Arrow Connector 32">
+              <a:extLst>
+                <a:ext uri="{FF2B5EF4-FFF2-40B4-BE49-F238E27FC236}">
+                  <a16:creationId xmlns:a16="http://schemas.microsoft.com/office/drawing/2014/main" id="{CDF23A0F-DC8C-89D8-7A88-6F97E36CEB97}"/>
+                </a:ext>
+              </a:extLst>
+            </p:cNvPr>
+            <p:cNvCxnSpPr>
+              <a:cxnSpLocks/>
+            </p:cNvCxnSpPr>
+            <p:nvPr/>
+          </p:nvCxnSpPr>
+          <p:spPr>
+            <a:xfrm>
+              <a:off x="4716159" y="3995357"/>
+              <a:ext cx="0" cy="284206"/>
+            </a:xfrm>
+            <a:prstGeom prst="straightConnector1">
+              <a:avLst/>
+            </a:prstGeom>
+            <a:ln w="15875">
+              <a:headEnd type="triangle" w="med" len="med"/>
+              <a:tailEnd type="triangle" w="med" len="med"/>
+            </a:ln>
+          </p:spPr>
+          <p:style>
+            <a:lnRef idx="1">
+              <a:schemeClr val="accent1"/>
+            </a:lnRef>
+            <a:fillRef idx="0">
+              <a:schemeClr val="accent1"/>
+            </a:fillRef>
+            <a:effectRef idx="0">
+              <a:schemeClr val="accent1"/>
+            </a:effectRef>
+            <a:fontRef idx="minor">
+              <a:schemeClr val="tx1"/>
+            </a:fontRef>
+          </p:style>
+        </p:cxnSp>
+        <p:sp>
+          <p:nvSpPr>
+            <p:cNvPr id="34" name="TextBox 33">
+              <a:extLst>
+                <a:ext uri="{FF2B5EF4-FFF2-40B4-BE49-F238E27FC236}">
+                  <a16:creationId xmlns:a16="http://schemas.microsoft.com/office/drawing/2014/main" id="{89D166E0-2F25-F1A0-9DCD-D4B520CE78F4}"/>
+                </a:ext>
+              </a:extLst>
+            </p:cNvPr>
+            <p:cNvSpPr txBox="1"/>
+            <p:nvPr/>
+          </p:nvSpPr>
+          <p:spPr>
+            <a:xfrm>
+              <a:off x="4856203" y="2832166"/>
+              <a:ext cx="848309" cy="369332"/>
+            </a:xfrm>
+            <a:prstGeom prst="rect">
+              <a:avLst/>
+            </a:prstGeom>
+            <a:noFill/>
+            <a:ln>
+              <a:solidFill>
+                <a:schemeClr val="accent1"/>
+              </a:solidFill>
+            </a:ln>
+          </p:spPr>
+          <p:txBody>
+            <a:bodyPr wrap="none" rtlCol="0">
+              <a:spAutoFit/>
+            </a:bodyPr>
+            <a:lstStyle/>
+            <a:p>
+              <a:r>
+                <a:rPr lang="en-US" i="1" dirty="0"/>
+                <a:t>D/(2k</a:t>
+              </a:r>
+              <a:r>
+                <a:rPr lang="en-US" i="1" baseline="-25000" dirty="0"/>
+                <a:t>v</a:t>
+              </a:r>
+              <a:r>
+                <a:rPr lang="en-US" i="1" dirty="0"/>
+                <a:t>)</a:t>
+              </a:r>
+            </a:p>
+          </p:txBody>
+        </p:sp>
+        <p:cxnSp>
+          <p:nvCxnSpPr>
+            <p:cNvPr id="36" name="Straight Arrow Connector 35">
+              <a:extLst>
+                <a:ext uri="{FF2B5EF4-FFF2-40B4-BE49-F238E27FC236}">
+                  <a16:creationId xmlns:a16="http://schemas.microsoft.com/office/drawing/2014/main" id="{EBE1CA5B-51EA-978E-041C-5AF1D4E1CB1C}"/>
+                </a:ext>
+              </a:extLst>
+            </p:cNvPr>
+            <p:cNvCxnSpPr>
+              <a:cxnSpLocks/>
+            </p:cNvCxnSpPr>
+            <p:nvPr/>
+          </p:nvCxnSpPr>
+          <p:spPr>
+            <a:xfrm flipH="1">
+              <a:off x="4736755" y="3201498"/>
+              <a:ext cx="696098" cy="935962"/>
+            </a:xfrm>
+            <a:prstGeom prst="straightConnector1">
+              <a:avLst/>
+            </a:prstGeom>
+            <a:ln>
+              <a:tailEnd type="none"/>
+            </a:ln>
+          </p:spPr>
+          <p:style>
+            <a:lnRef idx="1">
+              <a:schemeClr val="accent1"/>
+            </a:lnRef>
+            <a:fillRef idx="0">
+              <a:schemeClr val="accent1"/>
+            </a:fillRef>
+            <a:effectRef idx="0">
+              <a:schemeClr val="accent1"/>
+            </a:effectRef>
+            <a:fontRef idx="minor">
+              <a:schemeClr val="tx1"/>
+            </a:fontRef>
+          </p:style>
+        </p:cxnSp>
+        <p:cxnSp>
+          <p:nvCxnSpPr>
+            <p:cNvPr id="39" name="Straight Arrow Connector 38">
+              <a:extLst>
+                <a:ext uri="{FF2B5EF4-FFF2-40B4-BE49-F238E27FC236}">
+                  <a16:creationId xmlns:a16="http://schemas.microsoft.com/office/drawing/2014/main" id="{93578427-DFB4-3D80-730B-3EDE0D72EEDF}"/>
+                </a:ext>
+              </a:extLst>
+            </p:cNvPr>
+            <p:cNvCxnSpPr>
+              <a:cxnSpLocks/>
+            </p:cNvCxnSpPr>
+            <p:nvPr/>
+          </p:nvCxnSpPr>
+          <p:spPr>
+            <a:xfrm flipH="1" flipV="1">
+              <a:off x="4782061" y="1550773"/>
+              <a:ext cx="630199" cy="1240953"/>
+            </a:xfrm>
+            <a:prstGeom prst="straightConnector1">
+              <a:avLst/>
+            </a:prstGeom>
+            <a:ln>
+              <a:tailEnd type="none"/>
+            </a:ln>
+          </p:spPr>
+          <p:style>
+            <a:lnRef idx="1">
+              <a:schemeClr val="accent1"/>
+            </a:lnRef>
+            <a:fillRef idx="0">
+              <a:schemeClr val="accent1"/>
+            </a:fillRef>
+            <a:effectRef idx="0">
+              <a:schemeClr val="accent1"/>
+            </a:effectRef>
+            <a:fontRef idx="minor">
+              <a:schemeClr val="tx1"/>
+            </a:fontRef>
+          </p:style>
+        </p:cxnSp>
+      </p:grpSp>
+    </p:spTree>
+    <p:extLst>
+      <p:ext uri="{BB962C8B-B14F-4D97-AF65-F5344CB8AC3E}">
+        <p14:creationId xmlns:p14="http://schemas.microsoft.com/office/powerpoint/2010/main" val="2976748620"/>
+      </p:ext>
+    </p:extLst>
+  </p:cSld>
+  <p:clrMapOvr>
+    <a:masterClrMapping/>
+  </p:clrMapOvr>
+</p:sld>
+</file>
+
+<file path=ppt/slides/slide5.xml><?xml version="1.0" encoding="utf-8"?>
+<p:sld xmlns:a="http://schemas.openxmlformats.org/drawingml/2006/main" xmlns:r="http://schemas.openxmlformats.org/officeDocument/2006/relationships" xmlns:p="http://schemas.openxmlformats.org/presentationml/2006/main">
+  <p:cSld>
+    <p:spTree>
+      <p:nvGrpSpPr>
+        <p:cNvPr id="1" name=""/>
+        <p:cNvGrpSpPr/>
+        <p:nvPr/>
+      </p:nvGrpSpPr>
+      <p:grpSpPr>
+        <a:xfrm>
+          <a:off x="0" y="0"/>
+          <a:ext cx="0" cy="0"/>
+          <a:chOff x="0" y="0"/>
+          <a:chExt cx="0" cy="0"/>
+        </a:xfrm>
+      </p:grpSpPr>
+      <p:pic>
+        <p:nvPicPr>
+          <p:cNvPr id="3" name="Picture 2" descr="A graph with different colored lines&#10;&#10;AI-generated content may be incorrect.">
+            <a:extLst>
+              <a:ext uri="{FF2B5EF4-FFF2-40B4-BE49-F238E27FC236}">
+                <a16:creationId xmlns:a16="http://schemas.microsoft.com/office/drawing/2014/main" id="{A7634DB7-FF74-1D44-F0AC-7117BC1A3DCA}"/>
+              </a:ext>
+            </a:extLst>
+          </p:cNvPr>
+          <p:cNvPicPr>
+            <a:picLocks noChangeAspect="1"/>
+          </p:cNvPicPr>
+          <p:nvPr/>
+        </p:nvPicPr>
+        <p:blipFill>
+          <a:blip r:embed="rId2"/>
+          <a:stretch>
+            <a:fillRect/>
+          </a:stretch>
+        </p:blipFill>
+        <p:spPr>
+          <a:xfrm>
+            <a:off x="2920316" y="685800"/>
+            <a:ext cx="7315200" cy="5486400"/>
+          </a:xfrm>
+          <a:prstGeom prst="rect">
+            <a:avLst/>
+          </a:prstGeom>
+        </p:spPr>
+      </p:pic>
+      <p:cxnSp>
+        <p:nvCxnSpPr>
+          <p:cNvPr id="5" name="Straight Connector 4">
+            <a:extLst>
+              <a:ext uri="{FF2B5EF4-FFF2-40B4-BE49-F238E27FC236}">
+                <a16:creationId xmlns:a16="http://schemas.microsoft.com/office/drawing/2014/main" id="{6B2BE234-16DF-212E-8E24-0CCB4B4A26BA}"/>
+              </a:ext>
+            </a:extLst>
+          </p:cNvPr>
+          <p:cNvCxnSpPr>
+            <a:cxnSpLocks/>
+          </p:cNvCxnSpPr>
+          <p:nvPr/>
+        </p:nvCxnSpPr>
+        <p:spPr>
+          <a:xfrm>
+            <a:off x="1912720" y="1507526"/>
+            <a:ext cx="2051222" cy="0"/>
+          </a:xfrm>
+          <a:prstGeom prst="line">
+            <a:avLst/>
+          </a:prstGeom>
+          <a:ln w="12700"/>
+        </p:spPr>
+        <p:style>
+          <a:lnRef idx="1">
+            <a:schemeClr val="accent1"/>
+          </a:lnRef>
+          <a:fillRef idx="0">
+            <a:schemeClr val="accent1"/>
+          </a:fillRef>
+          <a:effectRef idx="0">
+            <a:schemeClr val="accent1"/>
+          </a:effectRef>
+          <a:fontRef idx="minor">
+            <a:schemeClr val="tx1"/>
+          </a:fontRef>
+        </p:style>
+      </p:cxnSp>
+      <p:cxnSp>
+        <p:nvCxnSpPr>
+          <p:cNvPr id="6" name="Straight Connector 5">
+            <a:extLst>
+              <a:ext uri="{FF2B5EF4-FFF2-40B4-BE49-F238E27FC236}">
+                <a16:creationId xmlns:a16="http://schemas.microsoft.com/office/drawing/2014/main" id="{CD734421-8812-D0C1-299D-8044FA1260B8}"/>
+              </a:ext>
+            </a:extLst>
+          </p:cNvPr>
+          <p:cNvCxnSpPr>
+            <a:cxnSpLocks/>
+          </p:cNvCxnSpPr>
+          <p:nvPr/>
+        </p:nvCxnSpPr>
+        <p:spPr>
+          <a:xfrm>
+            <a:off x="1912720" y="2826732"/>
+            <a:ext cx="2051222" cy="0"/>
+          </a:xfrm>
+          <a:prstGeom prst="line">
+            <a:avLst/>
+          </a:prstGeom>
+          <a:ln w="12700"/>
+        </p:spPr>
+        <p:style>
+          <a:lnRef idx="1">
+            <a:schemeClr val="accent1"/>
+          </a:lnRef>
+          <a:fillRef idx="0">
+            <a:schemeClr val="accent1"/>
+          </a:fillRef>
+          <a:effectRef idx="0">
+            <a:schemeClr val="accent1"/>
+          </a:effectRef>
+          <a:fontRef idx="minor">
+            <a:schemeClr val="tx1"/>
+          </a:fontRef>
+        </p:style>
+      </p:cxnSp>
+      <p:cxnSp>
+        <p:nvCxnSpPr>
+          <p:cNvPr id="7" name="Straight Connector 6">
+            <a:extLst>
+              <a:ext uri="{FF2B5EF4-FFF2-40B4-BE49-F238E27FC236}">
+                <a16:creationId xmlns:a16="http://schemas.microsoft.com/office/drawing/2014/main" id="{98659258-328A-CFBF-9AC5-2307E661DA1F}"/>
+              </a:ext>
+            </a:extLst>
+          </p:cNvPr>
+          <p:cNvCxnSpPr>
+            <a:cxnSpLocks/>
+          </p:cNvCxnSpPr>
+          <p:nvPr/>
+        </p:nvCxnSpPr>
+        <p:spPr>
+          <a:xfrm>
+            <a:off x="3117504" y="3862096"/>
+            <a:ext cx="846438" cy="0"/>
+          </a:xfrm>
+          <a:prstGeom prst="line">
+            <a:avLst/>
+          </a:prstGeom>
+          <a:ln w="12700"/>
+        </p:spPr>
+        <p:style>
+          <a:lnRef idx="1">
+            <a:schemeClr val="accent1"/>
+          </a:lnRef>
+          <a:fillRef idx="0">
+            <a:schemeClr val="accent1"/>
+          </a:fillRef>
+          <a:effectRef idx="0">
+            <a:schemeClr val="accent1"/>
+          </a:effectRef>
+          <a:fontRef idx="minor">
+            <a:schemeClr val="tx1"/>
+          </a:fontRef>
+        </p:style>
+      </p:cxnSp>
+      <p:cxnSp>
+        <p:nvCxnSpPr>
+          <p:cNvPr id="8" name="Straight Connector 7">
+            <a:extLst>
+              <a:ext uri="{FF2B5EF4-FFF2-40B4-BE49-F238E27FC236}">
+                <a16:creationId xmlns:a16="http://schemas.microsoft.com/office/drawing/2014/main" id="{A94133A2-DB6B-9E47-7849-B061A6777707}"/>
+              </a:ext>
+            </a:extLst>
+          </p:cNvPr>
+          <p:cNvCxnSpPr>
+            <a:cxnSpLocks/>
+          </p:cNvCxnSpPr>
+          <p:nvPr/>
+        </p:nvCxnSpPr>
+        <p:spPr>
+          <a:xfrm>
+            <a:off x="2297839" y="4057183"/>
+            <a:ext cx="1692876" cy="0"/>
+          </a:xfrm>
+          <a:prstGeom prst="line">
+            <a:avLst/>
+          </a:prstGeom>
+          <a:ln w="12700"/>
+        </p:spPr>
+        <p:style>
+          <a:lnRef idx="1">
+            <a:schemeClr val="accent1"/>
+          </a:lnRef>
+          <a:fillRef idx="0">
+            <a:schemeClr val="accent1"/>
+          </a:fillRef>
+          <a:effectRef idx="0">
+            <a:schemeClr val="accent1"/>
+          </a:effectRef>
+          <a:fontRef idx="minor">
+            <a:schemeClr val="tx1"/>
+          </a:fontRef>
+        </p:style>
+      </p:cxnSp>
+      <p:cxnSp>
+        <p:nvCxnSpPr>
+          <p:cNvPr id="9" name="Straight Connector 8">
+            <a:extLst>
+              <a:ext uri="{FF2B5EF4-FFF2-40B4-BE49-F238E27FC236}">
+                <a16:creationId xmlns:a16="http://schemas.microsoft.com/office/drawing/2014/main" id="{8FFDDAA5-4C35-0F24-B153-14B81415837C}"/>
+              </a:ext>
+            </a:extLst>
+          </p:cNvPr>
+          <p:cNvCxnSpPr>
+            <a:cxnSpLocks/>
+          </p:cNvCxnSpPr>
+          <p:nvPr/>
+        </p:nvCxnSpPr>
+        <p:spPr>
+          <a:xfrm>
+            <a:off x="1685150" y="5387546"/>
+            <a:ext cx="2278792" cy="0"/>
+          </a:xfrm>
+          <a:prstGeom prst="line">
+            <a:avLst/>
+          </a:prstGeom>
+          <a:ln w="12700"/>
+        </p:spPr>
+        <p:style>
+          <a:lnRef idx="1">
+            <a:schemeClr val="accent1"/>
+          </a:lnRef>
+          <a:fillRef idx="0">
+            <a:schemeClr val="accent1"/>
+          </a:fillRef>
+          <a:effectRef idx="0">
+            <a:schemeClr val="accent1"/>
+          </a:effectRef>
+          <a:fontRef idx="minor">
+            <a:schemeClr val="tx1"/>
+          </a:fontRef>
+        </p:style>
+      </p:cxnSp>
+      <p:cxnSp>
+        <p:nvCxnSpPr>
+          <p:cNvPr id="10" name="Straight Arrow Connector 9">
+            <a:extLst>
+              <a:ext uri="{FF2B5EF4-FFF2-40B4-BE49-F238E27FC236}">
+                <a16:creationId xmlns:a16="http://schemas.microsoft.com/office/drawing/2014/main" id="{A66DAC12-BE26-C5D8-F9BE-26B6ADAF9760}"/>
+              </a:ext>
+            </a:extLst>
+          </p:cNvPr>
+          <p:cNvCxnSpPr>
+            <a:cxnSpLocks/>
+          </p:cNvCxnSpPr>
+          <p:nvPr/>
+        </p:nvCxnSpPr>
+        <p:spPr>
+          <a:xfrm>
+            <a:off x="1912720" y="1507526"/>
+            <a:ext cx="0" cy="1354477"/>
+          </a:xfrm>
+          <a:prstGeom prst="straightConnector1">
+            <a:avLst/>
+          </a:prstGeom>
+          <a:ln w="15875">
+            <a:headEnd type="triangle" w="lg" len="lg"/>
+            <a:tailEnd type="triangle" w="lg" len="lg"/>
+          </a:ln>
+        </p:spPr>
+        <p:style>
+          <a:lnRef idx="1">
+            <a:schemeClr val="accent1"/>
+          </a:lnRef>
+          <a:fillRef idx="0">
+            <a:schemeClr val="accent1"/>
+          </a:fillRef>
+          <a:effectRef idx="0">
+            <a:schemeClr val="accent1"/>
+          </a:effectRef>
+          <a:fontRef idx="minor">
+            <a:schemeClr val="tx1"/>
+          </a:fontRef>
+        </p:style>
+      </p:cxnSp>
+      <p:cxnSp>
+        <p:nvCxnSpPr>
+          <p:cNvPr id="11" name="Straight Arrow Connector 10">
+            <a:extLst>
+              <a:ext uri="{FF2B5EF4-FFF2-40B4-BE49-F238E27FC236}">
+                <a16:creationId xmlns:a16="http://schemas.microsoft.com/office/drawing/2014/main" id="{B6D8AD6D-526D-5157-FB42-344174BA4D37}"/>
+              </a:ext>
+            </a:extLst>
+          </p:cNvPr>
+          <p:cNvCxnSpPr>
+            <a:cxnSpLocks/>
+          </p:cNvCxnSpPr>
+          <p:nvPr/>
+        </p:nvCxnSpPr>
+        <p:spPr>
+          <a:xfrm>
+            <a:off x="3148396" y="3849739"/>
+            <a:ext cx="0" cy="1290672"/>
+          </a:xfrm>
+          <a:prstGeom prst="straightConnector1">
+            <a:avLst/>
+          </a:prstGeom>
+          <a:ln w="15875">
+            <a:headEnd type="triangle" w="lg" len="lg"/>
+            <a:tailEnd type="triangle" w="lg" len="lg"/>
+          </a:ln>
+        </p:spPr>
+        <p:style>
+          <a:lnRef idx="1">
+            <a:schemeClr val="accent1"/>
+          </a:lnRef>
+          <a:fillRef idx="0">
+            <a:schemeClr val="accent1"/>
+          </a:fillRef>
+          <a:effectRef idx="0">
+            <a:schemeClr val="accent1"/>
+          </a:effectRef>
+          <a:fontRef idx="minor">
+            <a:schemeClr val="tx1"/>
+          </a:fontRef>
+        </p:style>
+      </p:cxnSp>
+      <p:cxnSp>
+        <p:nvCxnSpPr>
+          <p:cNvPr id="12" name="Straight Arrow Connector 11">
+            <a:extLst>
+              <a:ext uri="{FF2B5EF4-FFF2-40B4-BE49-F238E27FC236}">
+                <a16:creationId xmlns:a16="http://schemas.microsoft.com/office/drawing/2014/main" id="{ABBD7321-5B82-745A-4FDB-791808F89094}"/>
+              </a:ext>
+            </a:extLst>
+          </p:cNvPr>
+          <p:cNvCxnSpPr>
+            <a:cxnSpLocks/>
+          </p:cNvCxnSpPr>
+          <p:nvPr/>
+        </p:nvCxnSpPr>
+        <p:spPr>
+          <a:xfrm>
+            <a:off x="2617056" y="4057181"/>
+            <a:ext cx="0" cy="1330365"/>
+          </a:xfrm>
+          <a:prstGeom prst="straightConnector1">
+            <a:avLst/>
+          </a:prstGeom>
+          <a:ln w="15875">
+            <a:headEnd type="triangle" w="lg" len="lg"/>
+            <a:tailEnd type="triangle" w="lg" len="lg"/>
+          </a:ln>
+        </p:spPr>
+        <p:style>
+          <a:lnRef idx="1">
+            <a:schemeClr val="accent1"/>
+          </a:lnRef>
+          <a:fillRef idx="0">
+            <a:schemeClr val="accent1"/>
+          </a:fillRef>
+          <a:effectRef idx="0">
+            <a:schemeClr val="accent1"/>
+          </a:effectRef>
+          <a:fontRef idx="minor">
+            <a:schemeClr val="tx1"/>
+          </a:fontRef>
+        </p:style>
+      </p:cxnSp>
+      <p:cxnSp>
+        <p:nvCxnSpPr>
+          <p:cNvPr id="13" name="Straight Arrow Connector 12">
+            <a:extLst>
+              <a:ext uri="{FF2B5EF4-FFF2-40B4-BE49-F238E27FC236}">
+                <a16:creationId xmlns:a16="http://schemas.microsoft.com/office/drawing/2014/main" id="{9CFC7C57-8FB5-BDED-F337-87B55BF68A68}"/>
+              </a:ext>
+            </a:extLst>
+          </p:cNvPr>
+          <p:cNvCxnSpPr>
+            <a:cxnSpLocks/>
+          </p:cNvCxnSpPr>
+          <p:nvPr/>
+        </p:nvCxnSpPr>
+        <p:spPr>
+          <a:xfrm>
+            <a:off x="1912720" y="2802017"/>
+            <a:ext cx="0" cy="2585529"/>
+          </a:xfrm>
+          <a:prstGeom prst="straightConnector1">
+            <a:avLst/>
+          </a:prstGeom>
+          <a:ln w="15875">
+            <a:headEnd type="triangle" w="lg" len="lg"/>
+            <a:tailEnd type="triangle" w="lg" len="lg"/>
+          </a:ln>
+        </p:spPr>
+        <p:style>
+          <a:lnRef idx="1">
+            <a:schemeClr val="accent1"/>
+          </a:lnRef>
+          <a:fillRef idx="0">
+            <a:schemeClr val="accent1"/>
+          </a:fillRef>
+          <a:effectRef idx="0">
+            <a:schemeClr val="accent1"/>
+          </a:effectRef>
+          <a:fontRef idx="minor">
+            <a:schemeClr val="tx1"/>
+          </a:fontRef>
+        </p:style>
+      </p:cxnSp>
+      <p:sp>
+        <p:nvSpPr>
+          <p:cNvPr id="14" name="TextBox 13">
+            <a:extLst>
+              <a:ext uri="{FF2B5EF4-FFF2-40B4-BE49-F238E27FC236}">
+                <a16:creationId xmlns:a16="http://schemas.microsoft.com/office/drawing/2014/main" id="{7A66772E-9849-017E-8B87-828DAD1B9E59}"/>
+              </a:ext>
+            </a:extLst>
+          </p:cNvPr>
+          <p:cNvSpPr txBox="1"/>
+          <p:nvPr/>
+        </p:nvSpPr>
+        <p:spPr>
+          <a:xfrm>
+            <a:off x="1501389" y="1898140"/>
+            <a:ext cx="822661" cy="351425"/>
+          </a:xfrm>
+          <a:prstGeom prst="rect">
+            <a:avLst/>
+          </a:prstGeom>
+          <a:solidFill>
+            <a:schemeClr val="bg1"/>
+          </a:solidFill>
+        </p:spPr>
+        <p:txBody>
+          <a:bodyPr wrap="none" rtlCol="0">
+            <a:spAutoFit/>
+          </a:bodyPr>
+          <a:lstStyle/>
+          <a:p>
+            <a:r>
+              <a:rPr lang="en-US" dirty="0"/>
+              <a:t>Dupuit</a:t>
+            </a:r>
+          </a:p>
+        </p:txBody>
+      </p:sp>
+      <p:sp>
+        <p:nvSpPr>
+          <p:cNvPr id="15" name="TextBox 14">
+            <a:extLst>
+              <a:ext uri="{FF2B5EF4-FFF2-40B4-BE49-F238E27FC236}">
+                <a16:creationId xmlns:a16="http://schemas.microsoft.com/office/drawing/2014/main" id="{EE7DDA20-18B1-C5DD-AF61-686445945D72}"/>
+              </a:ext>
+            </a:extLst>
+          </p:cNvPr>
+          <p:cNvSpPr txBox="1"/>
+          <p:nvPr/>
+        </p:nvSpPr>
+        <p:spPr>
+          <a:xfrm>
+            <a:off x="2764868" y="4333016"/>
+            <a:ext cx="822661" cy="351425"/>
+          </a:xfrm>
+          <a:prstGeom prst="rect">
+            <a:avLst/>
+          </a:prstGeom>
+          <a:solidFill>
+            <a:schemeClr val="bg1"/>
+          </a:solidFill>
+        </p:spPr>
+        <p:txBody>
+          <a:bodyPr wrap="none" rtlCol="0">
+            <a:spAutoFit/>
+          </a:bodyPr>
+          <a:lstStyle/>
+          <a:p>
+            <a:r>
+              <a:rPr lang="en-US" dirty="0"/>
+              <a:t>Dupuit</a:t>
+            </a:r>
+          </a:p>
+        </p:txBody>
+      </p:sp>
+      <p:sp>
+        <p:nvSpPr>
+          <p:cNvPr id="16" name="TextBox 15">
+            <a:extLst>
+              <a:ext uri="{FF2B5EF4-FFF2-40B4-BE49-F238E27FC236}">
+                <a16:creationId xmlns:a16="http://schemas.microsoft.com/office/drawing/2014/main" id="{F1FBA18D-6634-8FE7-95C2-3F80587D83EE}"/>
+              </a:ext>
+            </a:extLst>
+          </p:cNvPr>
+          <p:cNvSpPr txBox="1"/>
+          <p:nvPr/>
+        </p:nvSpPr>
+        <p:spPr>
+          <a:xfrm>
+            <a:off x="2133972" y="4623508"/>
+            <a:ext cx="822661" cy="351425"/>
+          </a:xfrm>
+          <a:prstGeom prst="rect">
+            <a:avLst/>
+          </a:prstGeom>
+          <a:solidFill>
+            <a:schemeClr val="bg1"/>
+          </a:solidFill>
+        </p:spPr>
+        <p:txBody>
+          <a:bodyPr wrap="none" rtlCol="0">
+            <a:spAutoFit/>
+          </a:bodyPr>
+          <a:lstStyle/>
+          <a:p>
+            <a:r>
+              <a:rPr lang="en-US" dirty="0"/>
+              <a:t>Dupuit</a:t>
+            </a:r>
+          </a:p>
+        </p:txBody>
+      </p:sp>
+      <p:sp>
+        <p:nvSpPr>
+          <p:cNvPr id="17" name="TextBox 16">
+            <a:extLst>
+              <a:ext uri="{FF2B5EF4-FFF2-40B4-BE49-F238E27FC236}">
+                <a16:creationId xmlns:a16="http://schemas.microsoft.com/office/drawing/2014/main" id="{77464B88-D8E3-0EF9-CF6F-AE704D5F9335}"/>
+              </a:ext>
+            </a:extLst>
+          </p:cNvPr>
+          <p:cNvSpPr txBox="1"/>
+          <p:nvPr/>
+        </p:nvSpPr>
+        <p:spPr>
+          <a:xfrm>
+            <a:off x="1334900" y="3429900"/>
+            <a:ext cx="1155637" cy="351425"/>
+          </a:xfrm>
+          <a:prstGeom prst="rect">
+            <a:avLst/>
+          </a:prstGeom>
+          <a:solidFill>
+            <a:schemeClr val="bg1"/>
+          </a:solidFill>
+        </p:spPr>
+        <p:txBody>
+          <a:bodyPr wrap="none" rtlCol="0">
+            <a:spAutoFit/>
+          </a:bodyPr>
+          <a:lstStyle/>
+          <a:p>
+            <a:r>
+              <a:rPr lang="en-US" dirty="0" err="1"/>
+              <a:t>Contractie</a:t>
+            </a:r>
+            <a:endParaRPr lang="en-US" dirty="0"/>
+          </a:p>
+        </p:txBody>
+      </p:sp>
+      <p:cxnSp>
+        <p:nvCxnSpPr>
+          <p:cNvPr id="18" name="Straight Arrow Connector 17">
+            <a:extLst>
+              <a:ext uri="{FF2B5EF4-FFF2-40B4-BE49-F238E27FC236}">
+                <a16:creationId xmlns:a16="http://schemas.microsoft.com/office/drawing/2014/main" id="{E878BE63-76D3-EBCB-BF1F-ECFD8387B84A}"/>
+              </a:ext>
+            </a:extLst>
+          </p:cNvPr>
+          <p:cNvCxnSpPr>
+            <a:cxnSpLocks/>
+          </p:cNvCxnSpPr>
+          <p:nvPr/>
+        </p:nvCxnSpPr>
+        <p:spPr>
+          <a:xfrm>
+            <a:off x="4749112" y="1564783"/>
+            <a:ext cx="0" cy="213169"/>
+          </a:xfrm>
+          <a:prstGeom prst="straightConnector1">
+            <a:avLst/>
+          </a:prstGeom>
+          <a:ln w="15875">
+            <a:headEnd type="triangle" w="med" len="med"/>
+            <a:tailEnd type="triangle" w="med" len="med"/>
+          </a:ln>
+        </p:spPr>
+        <p:style>
+          <a:lnRef idx="1">
+            <a:schemeClr val="accent1"/>
+          </a:lnRef>
+          <a:fillRef idx="0">
+            <a:schemeClr val="accent1"/>
+          </a:fillRef>
+          <a:effectRef idx="0">
+            <a:schemeClr val="accent1"/>
+          </a:effectRef>
+          <a:fontRef idx="minor">
+            <a:schemeClr val="tx1"/>
+          </a:fontRef>
+        </p:style>
+      </p:cxnSp>
+      <p:cxnSp>
+        <p:nvCxnSpPr>
+          <p:cNvPr id="19" name="Straight Arrow Connector 18">
+            <a:extLst>
+              <a:ext uri="{FF2B5EF4-FFF2-40B4-BE49-F238E27FC236}">
+                <a16:creationId xmlns:a16="http://schemas.microsoft.com/office/drawing/2014/main" id="{6F16D1B7-A4E4-3A1C-4514-4224D2A6B6EA}"/>
+              </a:ext>
+            </a:extLst>
+          </p:cNvPr>
+          <p:cNvCxnSpPr>
+            <a:cxnSpLocks/>
+          </p:cNvCxnSpPr>
+          <p:nvPr/>
+        </p:nvCxnSpPr>
+        <p:spPr>
+          <a:xfrm>
+            <a:off x="4716159" y="3862096"/>
+            <a:ext cx="0" cy="228843"/>
+          </a:xfrm>
+          <a:prstGeom prst="straightConnector1">
+            <a:avLst/>
+          </a:prstGeom>
+          <a:ln w="15875">
+            <a:headEnd type="triangle" w="med" len="med"/>
+            <a:tailEnd type="triangle" w="med" len="med"/>
+          </a:ln>
+        </p:spPr>
+        <p:style>
+          <a:lnRef idx="1">
+            <a:schemeClr val="accent1"/>
+          </a:lnRef>
+          <a:fillRef idx="0">
+            <a:schemeClr val="accent1"/>
+          </a:fillRef>
+          <a:effectRef idx="0">
+            <a:schemeClr val="accent1"/>
+          </a:effectRef>
+          <a:fontRef idx="minor">
+            <a:schemeClr val="tx1"/>
+          </a:fontRef>
+        </p:style>
+      </p:cxnSp>
+      <p:sp>
+        <p:nvSpPr>
+          <p:cNvPr id="20" name="TextBox 19">
+            <a:extLst>
+              <a:ext uri="{FF2B5EF4-FFF2-40B4-BE49-F238E27FC236}">
+                <a16:creationId xmlns:a16="http://schemas.microsoft.com/office/drawing/2014/main" id="{58D399AE-A9A8-570C-83E9-D96A101DD05E}"/>
+              </a:ext>
+            </a:extLst>
+          </p:cNvPr>
+          <p:cNvSpPr txBox="1"/>
+          <p:nvPr/>
+        </p:nvSpPr>
+        <p:spPr>
+          <a:xfrm>
+            <a:off x="4856203" y="2862003"/>
+            <a:ext cx="848309" cy="351425"/>
+          </a:xfrm>
+          <a:prstGeom prst="rect">
+            <a:avLst/>
+          </a:prstGeom>
+          <a:noFill/>
+          <a:ln>
+            <a:solidFill>
+              <a:schemeClr val="accent1"/>
+            </a:solidFill>
+          </a:ln>
+        </p:spPr>
+        <p:txBody>
+          <a:bodyPr wrap="none" rtlCol="0">
+            <a:spAutoFit/>
+          </a:bodyPr>
+          <a:lstStyle/>
+          <a:p>
+            <a:r>
+              <a:rPr lang="en-US" i="1" dirty="0"/>
+              <a:t>D/(2k</a:t>
+            </a:r>
+            <a:r>
+              <a:rPr lang="en-US" i="1" baseline="-25000" dirty="0"/>
+              <a:t>v</a:t>
+            </a:r>
+            <a:r>
+              <a:rPr lang="en-US" i="1" dirty="0"/>
+              <a:t>)</a:t>
+            </a:r>
+          </a:p>
+        </p:txBody>
+      </p:sp>
+      <p:cxnSp>
+        <p:nvCxnSpPr>
+          <p:cNvPr id="21" name="Straight Arrow Connector 20">
+            <a:extLst>
+              <a:ext uri="{FF2B5EF4-FFF2-40B4-BE49-F238E27FC236}">
+                <a16:creationId xmlns:a16="http://schemas.microsoft.com/office/drawing/2014/main" id="{3AF34D89-D363-4517-6DC8-D169230373A5}"/>
+              </a:ext>
+            </a:extLst>
+          </p:cNvPr>
+          <p:cNvCxnSpPr>
+            <a:cxnSpLocks/>
+          </p:cNvCxnSpPr>
+          <p:nvPr/>
+        </p:nvCxnSpPr>
+        <p:spPr>
+          <a:xfrm flipH="1">
+            <a:off x="4736756" y="3213428"/>
+            <a:ext cx="696097" cy="740727"/>
+          </a:xfrm>
+          <a:prstGeom prst="straightConnector1">
+            <a:avLst/>
+          </a:prstGeom>
+          <a:ln>
+            <a:tailEnd type="none"/>
+          </a:ln>
+        </p:spPr>
+        <p:style>
+          <a:lnRef idx="1">
+            <a:schemeClr val="accent1"/>
+          </a:lnRef>
+          <a:fillRef idx="0">
+            <a:schemeClr val="accent1"/>
+          </a:fillRef>
+          <a:effectRef idx="0">
+            <a:schemeClr val="accent1"/>
+          </a:effectRef>
+          <a:fontRef idx="minor">
+            <a:schemeClr val="tx1"/>
+          </a:fontRef>
+        </p:style>
+      </p:cxnSp>
+      <p:cxnSp>
+        <p:nvCxnSpPr>
+          <p:cNvPr id="22" name="Straight Arrow Connector 21">
+            <a:extLst>
+              <a:ext uri="{FF2B5EF4-FFF2-40B4-BE49-F238E27FC236}">
+                <a16:creationId xmlns:a16="http://schemas.microsoft.com/office/drawing/2014/main" id="{73103267-BDEC-8F37-1BA3-FCCAF44F0953}"/>
+              </a:ext>
+            </a:extLst>
+          </p:cNvPr>
+          <p:cNvCxnSpPr>
+            <a:cxnSpLocks/>
+          </p:cNvCxnSpPr>
+          <p:nvPr/>
+        </p:nvCxnSpPr>
+        <p:spPr>
+          <a:xfrm flipH="1" flipV="1">
+            <a:off x="4749112" y="1694322"/>
+            <a:ext cx="663148" cy="1129202"/>
+          </a:xfrm>
+          <a:prstGeom prst="straightConnector1">
+            <a:avLst/>
+          </a:prstGeom>
+          <a:ln>
+            <a:tailEnd type="none"/>
+          </a:ln>
+        </p:spPr>
+        <p:style>
+          <a:lnRef idx="1">
+            <a:schemeClr val="accent1"/>
+          </a:lnRef>
+          <a:fillRef idx="0">
+            <a:schemeClr val="accent1"/>
+          </a:fillRef>
+          <a:effectRef idx="0">
+            <a:schemeClr val="accent1"/>
+          </a:effectRef>
+          <a:fontRef idx="minor">
+            <a:schemeClr val="tx1"/>
+          </a:fontRef>
+        </p:style>
+      </p:cxnSp>
+      <p:cxnSp>
+        <p:nvCxnSpPr>
+          <p:cNvPr id="28" name="Straight Connector 27">
+            <a:extLst>
+              <a:ext uri="{FF2B5EF4-FFF2-40B4-BE49-F238E27FC236}">
+                <a16:creationId xmlns:a16="http://schemas.microsoft.com/office/drawing/2014/main" id="{87F5815A-E86A-FC72-6872-8018BD1A6668}"/>
+              </a:ext>
+            </a:extLst>
+          </p:cNvPr>
+          <p:cNvCxnSpPr>
+            <a:cxnSpLocks/>
+          </p:cNvCxnSpPr>
+          <p:nvPr/>
+        </p:nvCxnSpPr>
+        <p:spPr>
+          <a:xfrm>
+            <a:off x="2963556" y="5163677"/>
+            <a:ext cx="6279297" cy="0"/>
+          </a:xfrm>
+          <a:prstGeom prst="line">
+            <a:avLst/>
+          </a:prstGeom>
+          <a:ln w="12700"/>
+        </p:spPr>
+        <p:style>
+          <a:lnRef idx="1">
+            <a:schemeClr val="accent1"/>
+          </a:lnRef>
+          <a:fillRef idx="0">
+            <a:schemeClr val="accent1"/>
+          </a:fillRef>
+          <a:effectRef idx="0">
+            <a:schemeClr val="accent1"/>
+          </a:effectRef>
+          <a:fontRef idx="minor">
+            <a:schemeClr val="tx1"/>
+          </a:fontRef>
+        </p:style>
+      </p:cxnSp>
+    </p:spTree>
+    <p:extLst>
+      <p:ext uri="{BB962C8B-B14F-4D97-AF65-F5344CB8AC3E}">
+        <p14:creationId xmlns:p14="http://schemas.microsoft.com/office/powerpoint/2010/main" val="1102187609"/>
+      </p:ext>
+    </p:extLst>
+  </p:cSld>
+  <p:clrMapOvr>
+    <a:masterClrMapping/>
+  </p:clrMapOvr>
+</p:sld>
+</file>
+
+<file path=ppt/slides/slide6.xml><?xml version="1.0" encoding="utf-8"?>
+<p:sld xmlns:a="http://schemas.openxmlformats.org/drawingml/2006/main" xmlns:r="http://schemas.openxmlformats.org/officeDocument/2006/relationships" xmlns:p="http://schemas.openxmlformats.org/presentationml/2006/main">
+  <p:cSld>
+    <p:spTree>
+      <p:nvGrpSpPr>
+        <p:cNvPr id="1" name=""/>
+        <p:cNvGrpSpPr/>
+        <p:nvPr/>
+      </p:nvGrpSpPr>
+      <p:grpSpPr>
+        <a:xfrm>
+          <a:off x="0" y="0"/>
+          <a:ext cx="0" cy="0"/>
+          <a:chOff x="0" y="0"/>
+          <a:chExt cx="0" cy="0"/>
+        </a:xfrm>
+      </p:grpSpPr>
+      <p:sp>
+        <p:nvSpPr>
+          <p:cNvPr id="2" name="Freeform 1">
+            <a:extLst>
+              <a:ext uri="{FF2B5EF4-FFF2-40B4-BE49-F238E27FC236}">
+                <a16:creationId xmlns:a16="http://schemas.microsoft.com/office/drawing/2014/main" id="{3DAC6FB7-9CD4-5992-9C95-BD2F71A5AF18}"/>
+              </a:ext>
+            </a:extLst>
+          </p:cNvPr>
+          <p:cNvSpPr/>
+          <p:nvPr/>
+        </p:nvSpPr>
+        <p:spPr>
+          <a:xfrm>
+            <a:off x="3061252" y="357809"/>
+            <a:ext cx="7026965" cy="5933661"/>
+          </a:xfrm>
+          <a:custGeom>
+            <a:avLst/>
+            <a:gdLst>
+              <a:gd name="csX0" fmla="*/ 0 w 7026965"/>
+              <a:gd name="csY0" fmla="*/ 5933661 h 5933661"/>
+              <a:gd name="csX1" fmla="*/ 864705 w 7026965"/>
+              <a:gd name="csY1" fmla="*/ 5307495 h 5933661"/>
+              <a:gd name="csX2" fmla="*/ 2126974 w 7026965"/>
+              <a:gd name="csY2" fmla="*/ 5208104 h 5933661"/>
+              <a:gd name="csX3" fmla="*/ 3339548 w 7026965"/>
+              <a:gd name="csY3" fmla="*/ 4671391 h 5933661"/>
+              <a:gd name="csX4" fmla="*/ 4174435 w 7026965"/>
+              <a:gd name="csY4" fmla="*/ 4412974 h 5933661"/>
+              <a:gd name="csX5" fmla="*/ 4721087 w 7026965"/>
+              <a:gd name="csY5" fmla="*/ 3935895 h 5933661"/>
+              <a:gd name="csX6" fmla="*/ 5983357 w 7026965"/>
+              <a:gd name="csY6" fmla="*/ 3190461 h 5933661"/>
+              <a:gd name="csX7" fmla="*/ 6142383 w 7026965"/>
+              <a:gd name="csY7" fmla="*/ 2107095 h 5933661"/>
+              <a:gd name="csX8" fmla="*/ 6927574 w 7026965"/>
+              <a:gd name="csY8" fmla="*/ 1510748 h 5933661"/>
+              <a:gd name="csX9" fmla="*/ 6848061 w 7026965"/>
+              <a:gd name="csY9" fmla="*/ 1421295 h 5933661"/>
+              <a:gd name="csX10" fmla="*/ 7026965 w 7026965"/>
+              <a:gd name="csY10" fmla="*/ 437321 h 5933661"/>
+              <a:gd name="csX11" fmla="*/ 6957391 w 7026965"/>
+              <a:gd name="csY11" fmla="*/ 0 h 5933661"/>
+            </a:gdLst>
+            <a:ahLst/>
+            <a:cxnLst>
+              <a:cxn ang="0">
+                <a:pos x="csX0" y="csY0"/>
+              </a:cxn>
+              <a:cxn ang="0">
+                <a:pos x="csX1" y="csY1"/>
+              </a:cxn>
+              <a:cxn ang="0">
+                <a:pos x="csX2" y="csY2"/>
+              </a:cxn>
+              <a:cxn ang="0">
+                <a:pos x="csX3" y="csY3"/>
+              </a:cxn>
+              <a:cxn ang="0">
+                <a:pos x="csX4" y="csY4"/>
+              </a:cxn>
+              <a:cxn ang="0">
+                <a:pos x="csX5" y="csY5"/>
+              </a:cxn>
+              <a:cxn ang="0">
+                <a:pos x="csX6" y="csY6"/>
+              </a:cxn>
+              <a:cxn ang="0">
+                <a:pos x="csX7" y="csY7"/>
+              </a:cxn>
+              <a:cxn ang="0">
+                <a:pos x="csX8" y="csY8"/>
+              </a:cxn>
+              <a:cxn ang="0">
+                <a:pos x="csX9" y="csY9"/>
+              </a:cxn>
+              <a:cxn ang="0">
+                <a:pos x="csX10" y="csY10"/>
+              </a:cxn>
+              <a:cxn ang="0">
+                <a:pos x="csX11" y="csY11"/>
+              </a:cxn>
+            </a:cxnLst>
+            <a:rect l="l" t="t" r="r" b="b"/>
+            <a:pathLst>
+              <a:path w="7026965" h="5933661">
+                <a:moveTo>
+                  <a:pt x="0" y="5933661"/>
+                </a:moveTo>
+                <a:lnTo>
+                  <a:pt x="864705" y="5307495"/>
+                </a:lnTo>
+                <a:lnTo>
+                  <a:pt x="2126974" y="5208104"/>
+                </a:lnTo>
+                <a:lnTo>
+                  <a:pt x="3339548" y="4671391"/>
+                </a:lnTo>
+                <a:lnTo>
+                  <a:pt x="4174435" y="4412974"/>
+                </a:lnTo>
+                <a:lnTo>
+                  <a:pt x="4721087" y="3935895"/>
+                </a:lnTo>
+                <a:lnTo>
+                  <a:pt x="5983357" y="3190461"/>
+                </a:lnTo>
+                <a:lnTo>
+                  <a:pt x="6142383" y="2107095"/>
+                </a:lnTo>
+                <a:lnTo>
+                  <a:pt x="6927574" y="1510748"/>
+                </a:lnTo>
+                <a:lnTo>
+                  <a:pt x="6848061" y="1421295"/>
+                </a:lnTo>
+                <a:lnTo>
+                  <a:pt x="7026965" y="437321"/>
+                </a:lnTo>
+                <a:lnTo>
+                  <a:pt x="6957391" y="0"/>
+                </a:lnTo>
+              </a:path>
+            </a:pathLst>
+          </a:custGeom>
+          <a:noFill/>
+        </p:spPr>
+        <p:style>
+          <a:lnRef idx="2">
+            <a:schemeClr val="accent1">
+              <a:shade val="15000"/>
+            </a:schemeClr>
+          </a:lnRef>
+          <a:fillRef idx="1">
+            <a:schemeClr val="accent1"/>
+          </a:fillRef>
+          <a:effectRef idx="0">
+            <a:schemeClr val="accent1"/>
+          </a:effectRef>
+          <a:fontRef idx="minor">
+            <a:schemeClr val="lt1"/>
+          </a:fontRef>
+        </p:style>
+        <p:txBody>
+          <a:bodyPr rtlCol="0" anchor="ctr"/>
+          <a:lstStyle/>
+          <a:p>
+            <a:pPr algn="ctr"/>
+            <a:endParaRPr lang="en-US"/>
+          </a:p>
+        </p:txBody>
+      </p:sp>
+      <p:sp>
+        <p:nvSpPr>
+          <p:cNvPr id="3" name="Freeform 2">
+            <a:extLst>
+              <a:ext uri="{FF2B5EF4-FFF2-40B4-BE49-F238E27FC236}">
+                <a16:creationId xmlns:a16="http://schemas.microsoft.com/office/drawing/2014/main" id="{8CA8F80E-AF38-5D6A-1519-37973F372C5D}"/>
+              </a:ext>
+            </a:extLst>
+          </p:cNvPr>
+          <p:cNvSpPr/>
+          <p:nvPr/>
+        </p:nvSpPr>
+        <p:spPr>
+          <a:xfrm>
+            <a:off x="5148470" y="19878"/>
+            <a:ext cx="2186608" cy="5526157"/>
+          </a:xfrm>
+          <a:custGeom>
+            <a:avLst/>
+            <a:gdLst>
+              <a:gd name="csX0" fmla="*/ 59634 w 2186608"/>
+              <a:gd name="csY0" fmla="*/ 5526157 h 5526157"/>
+              <a:gd name="csX1" fmla="*/ 0 w 2186608"/>
+              <a:gd name="csY1" fmla="*/ 4681331 h 5526157"/>
+              <a:gd name="csX2" fmla="*/ 1103243 w 2186608"/>
+              <a:gd name="csY2" fmla="*/ 3419061 h 5526157"/>
+              <a:gd name="csX3" fmla="*/ 2186608 w 2186608"/>
+              <a:gd name="csY3" fmla="*/ 2802835 h 5526157"/>
+              <a:gd name="csX4" fmla="*/ 1709530 w 2186608"/>
+              <a:gd name="csY4" fmla="*/ 2246244 h 5526157"/>
+              <a:gd name="csX5" fmla="*/ 1958008 w 2186608"/>
+              <a:gd name="csY5" fmla="*/ 1391479 h 5526157"/>
+              <a:gd name="csX6" fmla="*/ 1649895 w 2186608"/>
+              <a:gd name="csY6" fmla="*/ 496957 h 5526157"/>
+              <a:gd name="csX7" fmla="*/ 1987826 w 2186608"/>
+              <a:gd name="csY7" fmla="*/ 0 h 5526157"/>
+            </a:gdLst>
+            <a:ahLst/>
+            <a:cxnLst>
+              <a:cxn ang="0">
+                <a:pos x="csX0" y="csY0"/>
+              </a:cxn>
+              <a:cxn ang="0">
+                <a:pos x="csX1" y="csY1"/>
+              </a:cxn>
+              <a:cxn ang="0">
+                <a:pos x="csX2" y="csY2"/>
+              </a:cxn>
+              <a:cxn ang="0">
+                <a:pos x="csX3" y="csY3"/>
+              </a:cxn>
+              <a:cxn ang="0">
+                <a:pos x="csX4" y="csY4"/>
+              </a:cxn>
+              <a:cxn ang="0">
+                <a:pos x="csX5" y="csY5"/>
+              </a:cxn>
+              <a:cxn ang="0">
+                <a:pos x="csX6" y="csY6"/>
+              </a:cxn>
+              <a:cxn ang="0">
+                <a:pos x="csX7" y="csY7"/>
+              </a:cxn>
+            </a:cxnLst>
+            <a:rect l="l" t="t" r="r" b="b"/>
+            <a:pathLst>
+              <a:path w="2186608" h="5526157">
+                <a:moveTo>
+                  <a:pt x="59634" y="5526157"/>
+                </a:moveTo>
+                <a:lnTo>
+                  <a:pt x="0" y="4681331"/>
+                </a:lnTo>
+                <a:lnTo>
+                  <a:pt x="1103243" y="3419061"/>
+                </a:lnTo>
+                <a:lnTo>
+                  <a:pt x="2186608" y="2802835"/>
+                </a:lnTo>
+                <a:lnTo>
+                  <a:pt x="1709530" y="2246244"/>
+                </a:lnTo>
+                <a:lnTo>
+                  <a:pt x="1958008" y="1391479"/>
+                </a:lnTo>
+                <a:lnTo>
+                  <a:pt x="1649895" y="496957"/>
+                </a:lnTo>
+                <a:lnTo>
+                  <a:pt x="1987826" y="0"/>
+                </a:lnTo>
+              </a:path>
+            </a:pathLst>
+          </a:custGeom>
+          <a:noFill/>
+        </p:spPr>
+        <p:style>
+          <a:lnRef idx="2">
+            <a:schemeClr val="accent1">
+              <a:shade val="15000"/>
+            </a:schemeClr>
+          </a:lnRef>
+          <a:fillRef idx="1">
+            <a:schemeClr val="accent1"/>
+          </a:fillRef>
+          <a:effectRef idx="0">
+            <a:schemeClr val="accent1"/>
+          </a:effectRef>
+          <a:fontRef idx="minor">
+            <a:schemeClr val="lt1"/>
+          </a:fontRef>
+        </p:style>
+        <p:txBody>
+          <a:bodyPr rtlCol="0" anchor="ctr"/>
+          <a:lstStyle/>
+          <a:p>
+            <a:pPr algn="ctr"/>
+            <a:endParaRPr lang="en-US"/>
+          </a:p>
+        </p:txBody>
+      </p:sp>
+      <p:sp>
+        <p:nvSpPr>
+          <p:cNvPr id="4" name="Freeform 3">
+            <a:extLst>
+              <a:ext uri="{FF2B5EF4-FFF2-40B4-BE49-F238E27FC236}">
+                <a16:creationId xmlns:a16="http://schemas.microsoft.com/office/drawing/2014/main" id="{397B0E2D-83CD-A2E6-105F-71D6FB2C125E}"/>
+              </a:ext>
+            </a:extLst>
+          </p:cNvPr>
+          <p:cNvSpPr/>
+          <p:nvPr/>
+        </p:nvSpPr>
+        <p:spPr>
+          <a:xfrm>
+            <a:off x="3896139" y="19878"/>
+            <a:ext cx="1470991" cy="5635487"/>
+          </a:xfrm>
+          <a:custGeom>
+            <a:avLst/>
+            <a:gdLst>
+              <a:gd name="csX0" fmla="*/ 0 w 1470991"/>
+              <a:gd name="csY0" fmla="*/ 5635487 h 5635487"/>
+              <a:gd name="csX1" fmla="*/ 347870 w 1470991"/>
+              <a:gd name="csY1" fmla="*/ 4760844 h 5635487"/>
+              <a:gd name="csX2" fmla="*/ 1470991 w 1470991"/>
+              <a:gd name="csY2" fmla="*/ 2773018 h 5635487"/>
+              <a:gd name="csX3" fmla="*/ 1470991 w 1470991"/>
+              <a:gd name="csY3" fmla="*/ 1540565 h 5635487"/>
+              <a:gd name="csX4" fmla="*/ 1073426 w 1470991"/>
+              <a:gd name="csY4" fmla="*/ 0 h 5635487"/>
+            </a:gdLst>
+            <a:ahLst/>
+            <a:cxnLst>
+              <a:cxn ang="0">
+                <a:pos x="csX0" y="csY0"/>
+              </a:cxn>
+              <a:cxn ang="0">
+                <a:pos x="csX1" y="csY1"/>
+              </a:cxn>
+              <a:cxn ang="0">
+                <a:pos x="csX2" y="csY2"/>
+              </a:cxn>
+              <a:cxn ang="0">
+                <a:pos x="csX3" y="csY3"/>
+              </a:cxn>
+              <a:cxn ang="0">
+                <a:pos x="csX4" y="csY4"/>
+              </a:cxn>
+            </a:cxnLst>
+            <a:rect l="l" t="t" r="r" b="b"/>
+            <a:pathLst>
+              <a:path w="1470991" h="5635487">
+                <a:moveTo>
+                  <a:pt x="0" y="5635487"/>
+                </a:moveTo>
+                <a:lnTo>
+                  <a:pt x="347870" y="4760844"/>
+                </a:lnTo>
+                <a:lnTo>
+                  <a:pt x="1470991" y="2773018"/>
+                </a:lnTo>
+                <a:lnTo>
+                  <a:pt x="1470991" y="1540565"/>
+                </a:lnTo>
+                <a:lnTo>
+                  <a:pt x="1073426" y="0"/>
+                </a:lnTo>
+              </a:path>
+            </a:pathLst>
+          </a:custGeom>
+          <a:noFill/>
+        </p:spPr>
+        <p:style>
+          <a:lnRef idx="2">
+            <a:schemeClr val="accent1">
+              <a:shade val="15000"/>
+            </a:schemeClr>
+          </a:lnRef>
+          <a:fillRef idx="1">
+            <a:schemeClr val="accent1"/>
+          </a:fillRef>
+          <a:effectRef idx="0">
+            <a:schemeClr val="accent1"/>
+          </a:effectRef>
+          <a:fontRef idx="minor">
+            <a:schemeClr val="lt1"/>
+          </a:fontRef>
+        </p:style>
+        <p:txBody>
+          <a:bodyPr rtlCol="0" anchor="ctr"/>
+          <a:lstStyle/>
+          <a:p>
+            <a:pPr algn="ctr"/>
+            <a:endParaRPr lang="en-US"/>
+          </a:p>
+        </p:txBody>
+      </p:sp>
+      <p:sp>
+        <p:nvSpPr>
+          <p:cNvPr id="5" name="Freeform 4">
+            <a:extLst>
+              <a:ext uri="{FF2B5EF4-FFF2-40B4-BE49-F238E27FC236}">
+                <a16:creationId xmlns:a16="http://schemas.microsoft.com/office/drawing/2014/main" id="{E2BCC67B-FEE3-1CBF-4B1F-59EC294D78EA}"/>
+              </a:ext>
+            </a:extLst>
+          </p:cNvPr>
+          <p:cNvSpPr/>
+          <p:nvPr/>
+        </p:nvSpPr>
+        <p:spPr>
+          <a:xfrm>
+            <a:off x="536713" y="19878"/>
+            <a:ext cx="3240157" cy="4770783"/>
+          </a:xfrm>
+          <a:custGeom>
+            <a:avLst/>
+            <a:gdLst>
+              <a:gd name="csX0" fmla="*/ 0 w 3240157"/>
+              <a:gd name="csY0" fmla="*/ 4770783 h 4770783"/>
+              <a:gd name="csX1" fmla="*/ 1739348 w 3240157"/>
+              <a:gd name="csY1" fmla="*/ 4740965 h 4770783"/>
+              <a:gd name="csX2" fmla="*/ 2136913 w 3240157"/>
+              <a:gd name="csY2" fmla="*/ 3438939 h 4770783"/>
+              <a:gd name="csX3" fmla="*/ 3240157 w 3240157"/>
+              <a:gd name="csY3" fmla="*/ 3081131 h 4770783"/>
+              <a:gd name="csX4" fmla="*/ 3071191 w 3240157"/>
+              <a:gd name="csY4" fmla="*/ 2395331 h 4770783"/>
+              <a:gd name="csX5" fmla="*/ 2295939 w 3240157"/>
+              <a:gd name="csY5" fmla="*/ 1938131 h 4770783"/>
+              <a:gd name="csX6" fmla="*/ 2345635 w 3240157"/>
+              <a:gd name="csY6" fmla="*/ 1073426 h 4770783"/>
+              <a:gd name="csX7" fmla="*/ 1798983 w 3240157"/>
+              <a:gd name="csY7" fmla="*/ 0 h 4770783"/>
+            </a:gdLst>
+            <a:ahLst/>
+            <a:cxnLst>
+              <a:cxn ang="0">
+                <a:pos x="csX0" y="csY0"/>
+              </a:cxn>
+              <a:cxn ang="0">
+                <a:pos x="csX1" y="csY1"/>
+              </a:cxn>
+              <a:cxn ang="0">
+                <a:pos x="csX2" y="csY2"/>
+              </a:cxn>
+              <a:cxn ang="0">
+                <a:pos x="csX3" y="csY3"/>
+              </a:cxn>
+              <a:cxn ang="0">
+                <a:pos x="csX4" y="csY4"/>
+              </a:cxn>
+              <a:cxn ang="0">
+                <a:pos x="csX5" y="csY5"/>
+              </a:cxn>
+              <a:cxn ang="0">
+                <a:pos x="csX6" y="csY6"/>
+              </a:cxn>
+              <a:cxn ang="0">
+                <a:pos x="csX7" y="csY7"/>
+              </a:cxn>
+            </a:cxnLst>
+            <a:rect l="l" t="t" r="r" b="b"/>
+            <a:pathLst>
+              <a:path w="3240157" h="4770783">
+                <a:moveTo>
+                  <a:pt x="0" y="4770783"/>
+                </a:moveTo>
+                <a:lnTo>
+                  <a:pt x="1739348" y="4740965"/>
+                </a:lnTo>
+                <a:lnTo>
+                  <a:pt x="2136913" y="3438939"/>
+                </a:lnTo>
+                <a:lnTo>
+                  <a:pt x="3240157" y="3081131"/>
+                </a:lnTo>
+                <a:lnTo>
+                  <a:pt x="3071191" y="2395331"/>
+                </a:lnTo>
+                <a:lnTo>
+                  <a:pt x="2295939" y="1938131"/>
+                </a:lnTo>
+                <a:lnTo>
+                  <a:pt x="2345635" y="1073426"/>
+                </a:lnTo>
+                <a:lnTo>
+                  <a:pt x="1798983" y="0"/>
+                </a:lnTo>
+              </a:path>
+            </a:pathLst>
+          </a:custGeom>
+          <a:noFill/>
+        </p:spPr>
+        <p:style>
+          <a:lnRef idx="2">
+            <a:schemeClr val="accent1">
+              <a:shade val="15000"/>
+            </a:schemeClr>
+          </a:lnRef>
+          <a:fillRef idx="1">
+            <a:schemeClr val="accent1"/>
+          </a:fillRef>
+          <a:effectRef idx="0">
+            <a:schemeClr val="accent1"/>
+          </a:effectRef>
+          <a:fontRef idx="minor">
+            <a:schemeClr val="lt1"/>
+          </a:fontRef>
+        </p:style>
+        <p:txBody>
+          <a:bodyPr rtlCol="0" anchor="ctr"/>
+          <a:lstStyle/>
+          <a:p>
+            <a:pPr algn="ctr"/>
+            <a:endParaRPr lang="en-US"/>
+          </a:p>
+        </p:txBody>
+      </p:sp>
+      <p:sp>
+        <p:nvSpPr>
+          <p:cNvPr id="6" name="Freeform 5">
+            <a:extLst>
+              <a:ext uri="{FF2B5EF4-FFF2-40B4-BE49-F238E27FC236}">
+                <a16:creationId xmlns:a16="http://schemas.microsoft.com/office/drawing/2014/main" id="{8C5431A2-E622-E207-EA26-BFB5B512FF89}"/>
+              </a:ext>
+            </a:extLst>
+          </p:cNvPr>
+          <p:cNvSpPr/>
+          <p:nvPr/>
+        </p:nvSpPr>
+        <p:spPr>
+          <a:xfrm>
+            <a:off x="10028583" y="69574"/>
+            <a:ext cx="1719469" cy="5784574"/>
+          </a:xfrm>
+          <a:custGeom>
+            <a:avLst/>
+            <a:gdLst>
+              <a:gd name="csX0" fmla="*/ 109330 w 1719469"/>
+              <a:gd name="csY0" fmla="*/ 5784574 h 5784574"/>
+              <a:gd name="csX1" fmla="*/ 0 w 1719469"/>
+              <a:gd name="csY1" fmla="*/ 4890052 h 5784574"/>
+              <a:gd name="csX2" fmla="*/ 59634 w 1719469"/>
+              <a:gd name="csY2" fmla="*/ 4810539 h 5784574"/>
+              <a:gd name="csX3" fmla="*/ 646043 w 1719469"/>
+              <a:gd name="csY3" fmla="*/ 4442791 h 5784574"/>
+              <a:gd name="csX4" fmla="*/ 1043608 w 1719469"/>
+              <a:gd name="csY4" fmla="*/ 3190461 h 5784574"/>
+              <a:gd name="csX5" fmla="*/ 1282147 w 1719469"/>
+              <a:gd name="csY5" fmla="*/ 2802835 h 5784574"/>
+              <a:gd name="csX6" fmla="*/ 1719469 w 1719469"/>
+              <a:gd name="csY6" fmla="*/ 1302026 h 5784574"/>
+              <a:gd name="csX7" fmla="*/ 1659834 w 1719469"/>
+              <a:gd name="csY7" fmla="*/ 0 h 5784574"/>
+            </a:gdLst>
+            <a:ahLst/>
+            <a:cxnLst>
+              <a:cxn ang="0">
+                <a:pos x="csX0" y="csY0"/>
+              </a:cxn>
+              <a:cxn ang="0">
+                <a:pos x="csX1" y="csY1"/>
+              </a:cxn>
+              <a:cxn ang="0">
+                <a:pos x="csX2" y="csY2"/>
+              </a:cxn>
+              <a:cxn ang="0">
+                <a:pos x="csX3" y="csY3"/>
+              </a:cxn>
+              <a:cxn ang="0">
+                <a:pos x="csX4" y="csY4"/>
+              </a:cxn>
+              <a:cxn ang="0">
+                <a:pos x="csX5" y="csY5"/>
+              </a:cxn>
+              <a:cxn ang="0">
+                <a:pos x="csX6" y="csY6"/>
+              </a:cxn>
+              <a:cxn ang="0">
+                <a:pos x="csX7" y="csY7"/>
+              </a:cxn>
+            </a:cxnLst>
+            <a:rect l="l" t="t" r="r" b="b"/>
+            <a:pathLst>
+              <a:path w="1719469" h="5784574">
+                <a:moveTo>
+                  <a:pt x="109330" y="5784574"/>
+                </a:moveTo>
+                <a:lnTo>
+                  <a:pt x="0" y="4890052"/>
+                </a:lnTo>
+                <a:lnTo>
+                  <a:pt x="59634" y="4810539"/>
+                </a:lnTo>
+                <a:lnTo>
+                  <a:pt x="646043" y="4442791"/>
+                </a:lnTo>
+                <a:lnTo>
+                  <a:pt x="1043608" y="3190461"/>
+                </a:lnTo>
+                <a:lnTo>
+                  <a:pt x="1282147" y="2802835"/>
+                </a:lnTo>
+                <a:lnTo>
+                  <a:pt x="1719469" y="1302026"/>
+                </a:lnTo>
+                <a:lnTo>
+                  <a:pt x="1659834" y="0"/>
+                </a:lnTo>
+              </a:path>
+            </a:pathLst>
+          </a:custGeom>
+          <a:noFill/>
+        </p:spPr>
+        <p:style>
+          <a:lnRef idx="2">
+            <a:schemeClr val="accent1">
+              <a:shade val="15000"/>
+            </a:schemeClr>
+          </a:lnRef>
+          <a:fillRef idx="1">
+            <a:schemeClr val="accent1"/>
+          </a:fillRef>
+          <a:effectRef idx="0">
+            <a:schemeClr val="accent1"/>
+          </a:effectRef>
+          <a:fontRef idx="minor">
+            <a:schemeClr val="lt1"/>
+          </a:fontRef>
+        </p:style>
+        <p:txBody>
+          <a:bodyPr rtlCol="0" anchor="ctr"/>
+          <a:lstStyle/>
+          <a:p>
+            <a:pPr algn="ctr"/>
+            <a:endParaRPr lang="en-US"/>
+          </a:p>
+        </p:txBody>
+      </p:sp>
+      <p:sp>
+        <p:nvSpPr>
+          <p:cNvPr id="7" name="Freeform 6">
+            <a:extLst>
+              <a:ext uri="{FF2B5EF4-FFF2-40B4-BE49-F238E27FC236}">
+                <a16:creationId xmlns:a16="http://schemas.microsoft.com/office/drawing/2014/main" id="{976CE44C-6E82-1DD7-9566-2C95D9E7D0F1}"/>
+              </a:ext>
+            </a:extLst>
+          </p:cNvPr>
+          <p:cNvSpPr/>
+          <p:nvPr/>
+        </p:nvSpPr>
+        <p:spPr>
+          <a:xfrm>
+            <a:off x="2216426" y="39757"/>
+            <a:ext cx="2325757" cy="5685182"/>
+          </a:xfrm>
+          <a:custGeom>
+            <a:avLst/>
+            <a:gdLst>
+              <a:gd name="csX0" fmla="*/ 0 w 2325757"/>
+              <a:gd name="csY0" fmla="*/ 5685182 h 5685182"/>
+              <a:gd name="csX1" fmla="*/ 755374 w 2325757"/>
+              <a:gd name="csY1" fmla="*/ 5287617 h 5685182"/>
+              <a:gd name="csX2" fmla="*/ 1212574 w 2325757"/>
+              <a:gd name="csY2" fmla="*/ 4273826 h 5685182"/>
+              <a:gd name="csX3" fmla="*/ 1838739 w 2325757"/>
+              <a:gd name="csY3" fmla="*/ 3796747 h 5685182"/>
+              <a:gd name="csX4" fmla="*/ 2325757 w 2325757"/>
+              <a:gd name="csY4" fmla="*/ 2812773 h 5685182"/>
+              <a:gd name="csX5" fmla="*/ 2166731 w 2325757"/>
+              <a:gd name="csY5" fmla="*/ 2117034 h 5685182"/>
+              <a:gd name="csX6" fmla="*/ 1898374 w 2325757"/>
+              <a:gd name="csY6" fmla="*/ 1550504 h 5685182"/>
+              <a:gd name="csX7" fmla="*/ 1938131 w 2325757"/>
+              <a:gd name="csY7" fmla="*/ 815008 h 5685182"/>
+              <a:gd name="csX8" fmla="*/ 1580322 w 2325757"/>
+              <a:gd name="csY8" fmla="*/ 0 h 5685182"/>
+            </a:gdLst>
+            <a:ahLst/>
+            <a:cxnLst>
+              <a:cxn ang="0">
+                <a:pos x="csX0" y="csY0"/>
+              </a:cxn>
+              <a:cxn ang="0">
+                <a:pos x="csX1" y="csY1"/>
+              </a:cxn>
+              <a:cxn ang="0">
+                <a:pos x="csX2" y="csY2"/>
+              </a:cxn>
+              <a:cxn ang="0">
+                <a:pos x="csX3" y="csY3"/>
+              </a:cxn>
+              <a:cxn ang="0">
+                <a:pos x="csX4" y="csY4"/>
+              </a:cxn>
+              <a:cxn ang="0">
+                <a:pos x="csX5" y="csY5"/>
+              </a:cxn>
+              <a:cxn ang="0">
+                <a:pos x="csX6" y="csY6"/>
+              </a:cxn>
+              <a:cxn ang="0">
+                <a:pos x="csX7" y="csY7"/>
+              </a:cxn>
+              <a:cxn ang="0">
+                <a:pos x="csX8" y="csY8"/>
+              </a:cxn>
+            </a:cxnLst>
+            <a:rect l="l" t="t" r="r" b="b"/>
+            <a:pathLst>
+              <a:path w="2325757" h="5685182">
+                <a:moveTo>
+                  <a:pt x="0" y="5685182"/>
+                </a:moveTo>
+                <a:lnTo>
+                  <a:pt x="755374" y="5287617"/>
+                </a:lnTo>
+                <a:lnTo>
+                  <a:pt x="1212574" y="4273826"/>
+                </a:lnTo>
+                <a:lnTo>
+                  <a:pt x="1838739" y="3796747"/>
+                </a:lnTo>
+                <a:lnTo>
+                  <a:pt x="2325757" y="2812773"/>
+                </a:lnTo>
+                <a:lnTo>
+                  <a:pt x="2166731" y="2117034"/>
+                </a:lnTo>
+                <a:lnTo>
+                  <a:pt x="1898374" y="1550504"/>
+                </a:lnTo>
+                <a:lnTo>
+                  <a:pt x="1938131" y="815008"/>
+                </a:lnTo>
+                <a:lnTo>
+                  <a:pt x="1580322" y="0"/>
+                </a:lnTo>
+              </a:path>
+            </a:pathLst>
+          </a:custGeom>
+          <a:noFill/>
+          <a:ln>
+            <a:prstDash val="dashDot"/>
+          </a:ln>
+        </p:spPr>
+        <p:style>
+          <a:lnRef idx="2">
+            <a:schemeClr val="accent1">
+              <a:shade val="15000"/>
+            </a:schemeClr>
+          </a:lnRef>
+          <a:fillRef idx="1">
+            <a:schemeClr val="accent1"/>
+          </a:fillRef>
+          <a:effectRef idx="0">
+            <a:schemeClr val="accent1"/>
+          </a:effectRef>
+          <a:fontRef idx="minor">
+            <a:schemeClr val="lt1"/>
+          </a:fontRef>
+        </p:style>
+        <p:txBody>
+          <a:bodyPr rtlCol="0" anchor="ctr"/>
+          <a:lstStyle/>
+          <a:p>
+            <a:pPr algn="ctr"/>
+            <a:endParaRPr lang="en-US"/>
+          </a:p>
+        </p:txBody>
+      </p:sp>
+      <p:sp>
+        <p:nvSpPr>
+          <p:cNvPr id="8" name="Freeform 7">
+            <a:extLst>
+              <a:ext uri="{FF2B5EF4-FFF2-40B4-BE49-F238E27FC236}">
+                <a16:creationId xmlns:a16="http://schemas.microsoft.com/office/drawing/2014/main" id="{90902CAD-5D24-198F-FFED-2FC004F13B67}"/>
+              </a:ext>
+            </a:extLst>
+          </p:cNvPr>
+          <p:cNvSpPr/>
+          <p:nvPr/>
+        </p:nvSpPr>
+        <p:spPr>
+          <a:xfrm>
+            <a:off x="4658497" y="61784"/>
+            <a:ext cx="1569308" cy="4917989"/>
+          </a:xfrm>
+          <a:custGeom>
+            <a:avLst/>
+            <a:gdLst>
+              <a:gd name="csX0" fmla="*/ 0 w 1569308"/>
+              <a:gd name="csY0" fmla="*/ 4917989 h 4917989"/>
+              <a:gd name="csX1" fmla="*/ 333633 w 1569308"/>
+              <a:gd name="csY1" fmla="*/ 4090086 h 4917989"/>
+              <a:gd name="csX2" fmla="*/ 877330 w 1569308"/>
+              <a:gd name="csY2" fmla="*/ 3447535 h 4917989"/>
+              <a:gd name="csX3" fmla="*/ 1569308 w 1569308"/>
+              <a:gd name="csY3" fmla="*/ 2730843 h 4917989"/>
+              <a:gd name="csX4" fmla="*/ 1458098 w 1569308"/>
+              <a:gd name="csY4" fmla="*/ 1618735 h 4917989"/>
+              <a:gd name="csX5" fmla="*/ 1532238 w 1569308"/>
+              <a:gd name="csY5" fmla="*/ 1396313 h 4917989"/>
+              <a:gd name="csX6" fmla="*/ 1507525 w 1569308"/>
+              <a:gd name="csY6" fmla="*/ 840259 h 4917989"/>
+              <a:gd name="csX7" fmla="*/ 1445741 w 1569308"/>
+              <a:gd name="csY7" fmla="*/ 0 h 4917989"/>
+            </a:gdLst>
+            <a:ahLst/>
+            <a:cxnLst>
+              <a:cxn ang="0">
+                <a:pos x="csX0" y="csY0"/>
+              </a:cxn>
+              <a:cxn ang="0">
+                <a:pos x="csX1" y="csY1"/>
+              </a:cxn>
+              <a:cxn ang="0">
+                <a:pos x="csX2" y="csY2"/>
+              </a:cxn>
+              <a:cxn ang="0">
+                <a:pos x="csX3" y="csY3"/>
+              </a:cxn>
+              <a:cxn ang="0">
+                <a:pos x="csX4" y="csY4"/>
+              </a:cxn>
+              <a:cxn ang="0">
+                <a:pos x="csX5" y="csY5"/>
+              </a:cxn>
+              <a:cxn ang="0">
+                <a:pos x="csX6" y="csY6"/>
+              </a:cxn>
+              <a:cxn ang="0">
+                <a:pos x="csX7" y="csY7"/>
+              </a:cxn>
+            </a:cxnLst>
+            <a:rect l="l" t="t" r="r" b="b"/>
+            <a:pathLst>
+              <a:path w="1569308" h="4917989">
+                <a:moveTo>
+                  <a:pt x="0" y="4917989"/>
+                </a:moveTo>
+                <a:lnTo>
+                  <a:pt x="333633" y="4090086"/>
+                </a:lnTo>
+                <a:lnTo>
+                  <a:pt x="877330" y="3447535"/>
+                </a:lnTo>
+                <a:lnTo>
+                  <a:pt x="1569308" y="2730843"/>
+                </a:lnTo>
+                <a:lnTo>
+                  <a:pt x="1458098" y="1618735"/>
+                </a:lnTo>
+                <a:lnTo>
+                  <a:pt x="1532238" y="1396313"/>
+                </a:lnTo>
+                <a:lnTo>
+                  <a:pt x="1507525" y="840259"/>
+                </a:lnTo>
+                <a:lnTo>
+                  <a:pt x="1445741" y="0"/>
+                </a:lnTo>
+              </a:path>
+            </a:pathLst>
+          </a:custGeom>
+          <a:noFill/>
+          <a:ln>
+            <a:prstDash val="dashDot"/>
+          </a:ln>
+        </p:spPr>
+        <p:style>
+          <a:lnRef idx="2">
+            <a:schemeClr val="accent1">
+              <a:shade val="15000"/>
+            </a:schemeClr>
+          </a:lnRef>
+          <a:fillRef idx="1">
+            <a:schemeClr val="accent1"/>
+          </a:fillRef>
+          <a:effectRef idx="0">
+            <a:schemeClr val="accent1"/>
+          </a:effectRef>
+          <a:fontRef idx="minor">
+            <a:schemeClr val="lt1"/>
+          </a:fontRef>
+        </p:style>
+        <p:txBody>
+          <a:bodyPr rtlCol="0" anchor="ctr"/>
+          <a:lstStyle/>
+          <a:p>
+            <a:pPr algn="ctr"/>
+            <a:endParaRPr lang="en-US"/>
+          </a:p>
+        </p:txBody>
+      </p:sp>
+      <p:sp>
+        <p:nvSpPr>
+          <p:cNvPr id="9" name="Freeform 8">
+            <a:extLst>
+              <a:ext uri="{FF2B5EF4-FFF2-40B4-BE49-F238E27FC236}">
+                <a16:creationId xmlns:a16="http://schemas.microsoft.com/office/drawing/2014/main" id="{595D6823-0DBB-6DFF-C9C4-0717930DBEB2}"/>
+              </a:ext>
+            </a:extLst>
+          </p:cNvPr>
+          <p:cNvSpPr/>
+          <p:nvPr/>
+        </p:nvSpPr>
+        <p:spPr>
+          <a:xfrm>
+            <a:off x="939114" y="37070"/>
+            <a:ext cx="679621" cy="4238368"/>
+          </a:xfrm>
+          <a:custGeom>
+            <a:avLst/>
+            <a:gdLst>
+              <a:gd name="csX0" fmla="*/ 185351 w 679621"/>
+              <a:gd name="csY0" fmla="*/ 4238368 h 4238368"/>
+              <a:gd name="csX1" fmla="*/ 284205 w 679621"/>
+              <a:gd name="csY1" fmla="*/ 2718487 h 4238368"/>
+              <a:gd name="csX2" fmla="*/ 679621 w 679621"/>
+              <a:gd name="csY2" fmla="*/ 1383957 h 4238368"/>
+              <a:gd name="csX3" fmla="*/ 0 w 679621"/>
+              <a:gd name="csY3" fmla="*/ 0 h 4238368"/>
+            </a:gdLst>
+            <a:ahLst/>
+            <a:cxnLst>
+              <a:cxn ang="0">
+                <a:pos x="csX0" y="csY0"/>
+              </a:cxn>
+              <a:cxn ang="0">
+                <a:pos x="csX1" y="csY1"/>
+              </a:cxn>
+              <a:cxn ang="0">
+                <a:pos x="csX2" y="csY2"/>
+              </a:cxn>
+              <a:cxn ang="0">
+                <a:pos x="csX3" y="csY3"/>
+              </a:cxn>
+            </a:cxnLst>
+            <a:rect l="l" t="t" r="r" b="b"/>
+            <a:pathLst>
+              <a:path w="679621" h="4238368">
+                <a:moveTo>
+                  <a:pt x="185351" y="4238368"/>
+                </a:moveTo>
+                <a:lnTo>
+                  <a:pt x="284205" y="2718487"/>
+                </a:lnTo>
+                <a:lnTo>
+                  <a:pt x="679621" y="1383957"/>
+                </a:lnTo>
+                <a:lnTo>
+                  <a:pt x="0" y="0"/>
+                </a:lnTo>
+              </a:path>
+            </a:pathLst>
+          </a:custGeom>
+          <a:noFill/>
+          <a:ln>
+            <a:prstDash val="dashDot"/>
+          </a:ln>
+        </p:spPr>
+        <p:style>
+          <a:lnRef idx="2">
+            <a:schemeClr val="accent1">
+              <a:shade val="15000"/>
+            </a:schemeClr>
+          </a:lnRef>
+          <a:fillRef idx="1">
+            <a:schemeClr val="accent1"/>
+          </a:fillRef>
+          <a:effectRef idx="0">
+            <a:schemeClr val="accent1"/>
+          </a:effectRef>
+          <a:fontRef idx="minor">
+            <a:schemeClr val="lt1"/>
+          </a:fontRef>
+        </p:style>
+        <p:txBody>
+          <a:bodyPr rtlCol="0" anchor="ctr"/>
+          <a:lstStyle/>
+          <a:p>
+            <a:pPr algn="ctr"/>
+            <a:endParaRPr lang="en-US"/>
+          </a:p>
+        </p:txBody>
+      </p:sp>
+      <p:sp>
+        <p:nvSpPr>
+          <p:cNvPr id="10" name="Freeform 9">
+            <a:extLst>
+              <a:ext uri="{FF2B5EF4-FFF2-40B4-BE49-F238E27FC236}">
+                <a16:creationId xmlns:a16="http://schemas.microsoft.com/office/drawing/2014/main" id="{1BDCDF88-4EBF-42E0-C49B-0AC2367BA778}"/>
+              </a:ext>
+            </a:extLst>
+          </p:cNvPr>
+          <p:cNvSpPr/>
+          <p:nvPr/>
+        </p:nvSpPr>
+        <p:spPr>
+          <a:xfrm>
+            <a:off x="5857103" y="61784"/>
+            <a:ext cx="2842054" cy="4695567"/>
+          </a:xfrm>
+          <a:custGeom>
+            <a:avLst/>
+            <a:gdLst>
+              <a:gd name="csX0" fmla="*/ 0 w 2842054"/>
+              <a:gd name="csY0" fmla="*/ 4695567 h 4695567"/>
+              <a:gd name="csX1" fmla="*/ 840259 w 2842054"/>
+              <a:gd name="csY1" fmla="*/ 4090086 h 4695567"/>
+              <a:gd name="csX2" fmla="*/ 2088292 w 2842054"/>
+              <a:gd name="csY2" fmla="*/ 3225113 h 4695567"/>
+              <a:gd name="csX3" fmla="*/ 2347783 w 2842054"/>
+              <a:gd name="csY3" fmla="*/ 2854411 h 4695567"/>
+              <a:gd name="csX4" fmla="*/ 2199502 w 2842054"/>
+              <a:gd name="csY4" fmla="*/ 2224216 h 4695567"/>
+              <a:gd name="csX5" fmla="*/ 2446638 w 2842054"/>
+              <a:gd name="csY5" fmla="*/ 1692875 h 4695567"/>
+              <a:gd name="csX6" fmla="*/ 2631989 w 2842054"/>
+              <a:gd name="csY6" fmla="*/ 1371600 h 4695567"/>
+              <a:gd name="csX7" fmla="*/ 2842054 w 2842054"/>
+              <a:gd name="csY7" fmla="*/ 469557 h 4695567"/>
+              <a:gd name="csX8" fmla="*/ 2842054 w 2842054"/>
+              <a:gd name="csY8" fmla="*/ 0 h 4695567"/>
+            </a:gdLst>
+            <a:ahLst/>
+            <a:cxnLst>
+              <a:cxn ang="0">
+                <a:pos x="csX0" y="csY0"/>
+              </a:cxn>
+              <a:cxn ang="0">
+                <a:pos x="csX1" y="csY1"/>
+              </a:cxn>
+              <a:cxn ang="0">
+                <a:pos x="csX2" y="csY2"/>
+              </a:cxn>
+              <a:cxn ang="0">
+                <a:pos x="csX3" y="csY3"/>
+              </a:cxn>
+              <a:cxn ang="0">
+                <a:pos x="csX4" y="csY4"/>
+              </a:cxn>
+              <a:cxn ang="0">
+                <a:pos x="csX5" y="csY5"/>
+              </a:cxn>
+              <a:cxn ang="0">
+                <a:pos x="csX6" y="csY6"/>
+              </a:cxn>
+              <a:cxn ang="0">
+                <a:pos x="csX7" y="csY7"/>
+              </a:cxn>
+              <a:cxn ang="0">
+                <a:pos x="csX8" y="csY8"/>
+              </a:cxn>
+            </a:cxnLst>
+            <a:rect l="l" t="t" r="r" b="b"/>
+            <a:pathLst>
+              <a:path w="2842054" h="4695567">
+                <a:moveTo>
+                  <a:pt x="0" y="4695567"/>
+                </a:moveTo>
+                <a:lnTo>
+                  <a:pt x="840259" y="4090086"/>
+                </a:lnTo>
+                <a:lnTo>
+                  <a:pt x="2088292" y="3225113"/>
+                </a:lnTo>
+                <a:lnTo>
+                  <a:pt x="2347783" y="2854411"/>
+                </a:lnTo>
+                <a:lnTo>
+                  <a:pt x="2199502" y="2224216"/>
+                </a:lnTo>
+                <a:lnTo>
+                  <a:pt x="2446638" y="1692875"/>
+                </a:lnTo>
+                <a:lnTo>
+                  <a:pt x="2631989" y="1371600"/>
+                </a:lnTo>
+                <a:lnTo>
+                  <a:pt x="2842054" y="469557"/>
+                </a:lnTo>
+                <a:lnTo>
+                  <a:pt x="2842054" y="0"/>
+                </a:lnTo>
+              </a:path>
+            </a:pathLst>
+          </a:custGeom>
+          <a:noFill/>
+          <a:ln>
+            <a:prstDash val="dashDot"/>
+          </a:ln>
+        </p:spPr>
+        <p:style>
+          <a:lnRef idx="2">
+            <a:schemeClr val="accent1">
+              <a:shade val="15000"/>
+            </a:schemeClr>
+          </a:lnRef>
+          <a:fillRef idx="1">
+            <a:schemeClr val="accent1"/>
+          </a:fillRef>
+          <a:effectRef idx="0">
+            <a:schemeClr val="accent1"/>
+          </a:effectRef>
+          <a:fontRef idx="minor">
+            <a:schemeClr val="lt1"/>
+          </a:fontRef>
+        </p:style>
+        <p:txBody>
+          <a:bodyPr rtlCol="0" anchor="ctr"/>
+          <a:lstStyle/>
+          <a:p>
+            <a:pPr algn="ctr"/>
+            <a:endParaRPr lang="en-US"/>
+          </a:p>
+        </p:txBody>
+      </p:sp>
+      <p:sp>
+        <p:nvSpPr>
+          <p:cNvPr id="11" name="Freeform 10">
+            <a:extLst>
+              <a:ext uri="{FF2B5EF4-FFF2-40B4-BE49-F238E27FC236}">
+                <a16:creationId xmlns:a16="http://schemas.microsoft.com/office/drawing/2014/main" id="{C8489904-3500-A50F-7869-E995F73BA225}"/>
+              </a:ext>
+            </a:extLst>
+          </p:cNvPr>
+          <p:cNvSpPr/>
+          <p:nvPr/>
+        </p:nvSpPr>
+        <p:spPr>
+          <a:xfrm>
+            <a:off x="7920681" y="61784"/>
+            <a:ext cx="3015049" cy="5745892"/>
+          </a:xfrm>
+          <a:custGeom>
+            <a:avLst/>
+            <a:gdLst>
+              <a:gd name="csX0" fmla="*/ 0 w 3015049"/>
+              <a:gd name="csY0" fmla="*/ 5745892 h 5745892"/>
+              <a:gd name="csX1" fmla="*/ 914400 w 3015049"/>
+              <a:gd name="csY1" fmla="*/ 4633784 h 5745892"/>
+              <a:gd name="csX2" fmla="*/ 1779373 w 3015049"/>
+              <a:gd name="csY2" fmla="*/ 3929448 h 5745892"/>
+              <a:gd name="csX3" fmla="*/ 2582562 w 3015049"/>
+              <a:gd name="csY3" fmla="*/ 2533135 h 5745892"/>
+              <a:gd name="csX4" fmla="*/ 2928551 w 3015049"/>
+              <a:gd name="csY4" fmla="*/ 1421027 h 5745892"/>
+              <a:gd name="csX5" fmla="*/ 2916195 w 3015049"/>
+              <a:gd name="csY5" fmla="*/ 1075038 h 5745892"/>
+              <a:gd name="csX6" fmla="*/ 2866768 w 3015049"/>
+              <a:gd name="csY6" fmla="*/ 877330 h 5745892"/>
+              <a:gd name="csX7" fmla="*/ 2829697 w 3015049"/>
+              <a:gd name="csY7" fmla="*/ 716692 h 5745892"/>
+              <a:gd name="csX8" fmla="*/ 2817341 w 3015049"/>
+              <a:gd name="csY8" fmla="*/ 531340 h 5745892"/>
+              <a:gd name="csX9" fmla="*/ 3015049 w 3015049"/>
+              <a:gd name="csY9" fmla="*/ 0 h 5745892"/>
+            </a:gdLst>
+            <a:ahLst/>
+            <a:cxnLst>
+              <a:cxn ang="0">
+                <a:pos x="csX0" y="csY0"/>
+              </a:cxn>
+              <a:cxn ang="0">
+                <a:pos x="csX1" y="csY1"/>
+              </a:cxn>
+              <a:cxn ang="0">
+                <a:pos x="csX2" y="csY2"/>
+              </a:cxn>
+              <a:cxn ang="0">
+                <a:pos x="csX3" y="csY3"/>
+              </a:cxn>
+              <a:cxn ang="0">
+                <a:pos x="csX4" y="csY4"/>
+              </a:cxn>
+              <a:cxn ang="0">
+                <a:pos x="csX5" y="csY5"/>
+              </a:cxn>
+              <a:cxn ang="0">
+                <a:pos x="csX6" y="csY6"/>
+              </a:cxn>
+              <a:cxn ang="0">
+                <a:pos x="csX7" y="csY7"/>
+              </a:cxn>
+              <a:cxn ang="0">
+                <a:pos x="csX8" y="csY8"/>
+              </a:cxn>
+              <a:cxn ang="0">
+                <a:pos x="csX9" y="csY9"/>
+              </a:cxn>
+            </a:cxnLst>
+            <a:rect l="l" t="t" r="r" b="b"/>
+            <a:pathLst>
+              <a:path w="3015049" h="5745892">
+                <a:moveTo>
+                  <a:pt x="0" y="5745892"/>
+                </a:moveTo>
+                <a:lnTo>
+                  <a:pt x="914400" y="4633784"/>
+                </a:lnTo>
+                <a:lnTo>
+                  <a:pt x="1779373" y="3929448"/>
+                </a:lnTo>
+                <a:lnTo>
+                  <a:pt x="2582562" y="2533135"/>
+                </a:lnTo>
+                <a:lnTo>
+                  <a:pt x="2928551" y="1421027"/>
+                </a:lnTo>
+                <a:cubicBezTo>
+                  <a:pt x="2924432" y="1305697"/>
+                  <a:pt x="2925521" y="1190064"/>
+                  <a:pt x="2916195" y="1075038"/>
+                </a:cubicBezTo>
+                <a:cubicBezTo>
+                  <a:pt x="2910101" y="999882"/>
+                  <a:pt x="2882074" y="948756"/>
+                  <a:pt x="2866768" y="877330"/>
+                </a:cubicBezTo>
+                <a:cubicBezTo>
+                  <a:pt x="2828272" y="697682"/>
+                  <a:pt x="2883705" y="878712"/>
+                  <a:pt x="2829697" y="716692"/>
+                </a:cubicBezTo>
+                <a:cubicBezTo>
+                  <a:pt x="2811247" y="605985"/>
+                  <a:pt x="2817341" y="667606"/>
+                  <a:pt x="2817341" y="531340"/>
+                </a:cubicBezTo>
+                <a:lnTo>
+                  <a:pt x="3015049" y="0"/>
+                </a:lnTo>
+              </a:path>
+            </a:pathLst>
+          </a:custGeom>
+          <a:noFill/>
+          <a:ln>
+            <a:prstDash val="dashDot"/>
+          </a:ln>
+        </p:spPr>
+        <p:style>
+          <a:lnRef idx="2">
+            <a:schemeClr val="accent1">
+              <a:shade val="15000"/>
+            </a:schemeClr>
+          </a:lnRef>
+          <a:fillRef idx="1">
+            <a:schemeClr val="accent1"/>
+          </a:fillRef>
+          <a:effectRef idx="0">
+            <a:schemeClr val="accent1"/>
+          </a:effectRef>
+          <a:fontRef idx="minor">
+            <a:schemeClr val="lt1"/>
+          </a:fontRef>
+        </p:style>
+        <p:txBody>
+          <a:bodyPr rtlCol="0" anchor="ctr"/>
+          <a:lstStyle/>
+          <a:p>
+            <a:pPr algn="ctr"/>
+            <a:endParaRPr lang="en-US"/>
+          </a:p>
+        </p:txBody>
+      </p:sp>
+      <p:sp>
+        <p:nvSpPr>
+          <p:cNvPr id="12" name="Freeform 11">
+            <a:extLst>
+              <a:ext uri="{FF2B5EF4-FFF2-40B4-BE49-F238E27FC236}">
+                <a16:creationId xmlns:a16="http://schemas.microsoft.com/office/drawing/2014/main" id="{42A95807-E873-AFF9-EF7F-3B027715F88E}"/>
+              </a:ext>
+            </a:extLst>
+          </p:cNvPr>
+          <p:cNvSpPr/>
+          <p:nvPr/>
+        </p:nvSpPr>
+        <p:spPr>
+          <a:xfrm>
+            <a:off x="11442357" y="3805881"/>
+            <a:ext cx="741405" cy="2001795"/>
+          </a:xfrm>
+          <a:custGeom>
+            <a:avLst/>
+            <a:gdLst>
+              <a:gd name="csX0" fmla="*/ 0 w 741405"/>
+              <a:gd name="csY0" fmla="*/ 2001795 h 2001795"/>
+              <a:gd name="csX1" fmla="*/ 172994 w 741405"/>
+              <a:gd name="csY1" fmla="*/ 827903 h 2001795"/>
+              <a:gd name="csX2" fmla="*/ 741405 w 741405"/>
+              <a:gd name="csY2" fmla="*/ 0 h 2001795"/>
+            </a:gdLst>
+            <a:ahLst/>
+            <a:cxnLst>
+              <a:cxn ang="0">
+                <a:pos x="csX0" y="csY0"/>
+              </a:cxn>
+              <a:cxn ang="0">
+                <a:pos x="csX1" y="csY1"/>
+              </a:cxn>
+              <a:cxn ang="0">
+                <a:pos x="csX2" y="csY2"/>
+              </a:cxn>
+            </a:cxnLst>
+            <a:rect l="l" t="t" r="r" b="b"/>
+            <a:pathLst>
+              <a:path w="741405" h="2001795">
+                <a:moveTo>
+                  <a:pt x="0" y="2001795"/>
+                </a:moveTo>
+                <a:lnTo>
+                  <a:pt x="172994" y="827903"/>
+                </a:lnTo>
+                <a:lnTo>
+                  <a:pt x="741405" y="0"/>
+                </a:lnTo>
+              </a:path>
+            </a:pathLst>
+          </a:custGeom>
+          <a:noFill/>
+          <a:ln>
+            <a:prstDash val="dashDot"/>
+          </a:ln>
+        </p:spPr>
+        <p:style>
+          <a:lnRef idx="2">
+            <a:schemeClr val="accent1">
+              <a:shade val="15000"/>
+            </a:schemeClr>
+          </a:lnRef>
+          <a:fillRef idx="1">
+            <a:schemeClr val="accent1"/>
+          </a:fillRef>
+          <a:effectRef idx="0">
+            <a:schemeClr val="accent1"/>
+          </a:effectRef>
+          <a:fontRef idx="minor">
+            <a:schemeClr val="lt1"/>
+          </a:fontRef>
+        </p:style>
+        <p:txBody>
+          <a:bodyPr rtlCol="0" anchor="ctr"/>
+          <a:lstStyle/>
+          <a:p>
+            <a:pPr algn="ctr"/>
+            <a:endParaRPr lang="en-US"/>
+          </a:p>
+        </p:txBody>
+      </p:sp>
+      <p:sp>
+        <p:nvSpPr>
+          <p:cNvPr id="13" name="Oval 12">
+            <a:extLst>
+              <a:ext uri="{FF2B5EF4-FFF2-40B4-BE49-F238E27FC236}">
+                <a16:creationId xmlns:a16="http://schemas.microsoft.com/office/drawing/2014/main" id="{A0D9C9C5-55A3-C737-3D75-43CF6E303AAC}"/>
+              </a:ext>
+            </a:extLst>
+          </p:cNvPr>
+          <p:cNvSpPr/>
+          <p:nvPr/>
+        </p:nvSpPr>
+        <p:spPr>
+          <a:xfrm>
+            <a:off x="3435178" y="1952367"/>
+            <a:ext cx="86497" cy="86497"/>
+          </a:xfrm>
+          <a:prstGeom prst="ellipse">
+            <a:avLst/>
+          </a:prstGeom>
+        </p:spPr>
+        <p:style>
+          <a:lnRef idx="2">
+            <a:schemeClr val="accent1">
+              <a:shade val="15000"/>
+            </a:schemeClr>
+          </a:lnRef>
+          <a:fillRef idx="1">
+            <a:schemeClr val="accent1"/>
+          </a:fillRef>
+          <a:effectRef idx="0">
+            <a:schemeClr val="accent1"/>
+          </a:effectRef>
+          <a:fontRef idx="minor">
+            <a:schemeClr val="lt1"/>
+          </a:fontRef>
+        </p:style>
+        <p:txBody>
+          <a:bodyPr rtlCol="0" anchor="ctr"/>
+          <a:lstStyle/>
+          <a:p>
+            <a:pPr algn="ctr"/>
+            <a:endParaRPr lang="en-US"/>
+          </a:p>
+        </p:txBody>
+      </p:sp>
+      <p:sp>
+        <p:nvSpPr>
+          <p:cNvPr id="14" name="Oval 13">
+            <a:extLst>
+              <a:ext uri="{FF2B5EF4-FFF2-40B4-BE49-F238E27FC236}">
+                <a16:creationId xmlns:a16="http://schemas.microsoft.com/office/drawing/2014/main" id="{E9A646C6-5088-D189-4C77-38B7FB1B4C5E}"/>
+              </a:ext>
+            </a:extLst>
+          </p:cNvPr>
+          <p:cNvSpPr/>
+          <p:nvPr/>
+        </p:nvSpPr>
+        <p:spPr>
+          <a:xfrm>
+            <a:off x="4020067" y="2117124"/>
+            <a:ext cx="86497" cy="86497"/>
+          </a:xfrm>
+          <a:prstGeom prst="ellipse">
+            <a:avLst/>
+          </a:prstGeom>
+        </p:spPr>
+        <p:style>
+          <a:lnRef idx="2">
+            <a:schemeClr val="accent1">
+              <a:shade val="15000"/>
+            </a:schemeClr>
+          </a:lnRef>
+          <a:fillRef idx="1">
+            <a:schemeClr val="accent1"/>
+          </a:fillRef>
+          <a:effectRef idx="0">
+            <a:schemeClr val="accent1"/>
+          </a:effectRef>
+          <a:fontRef idx="minor">
+            <a:schemeClr val="lt1"/>
+          </a:fontRef>
+        </p:style>
+        <p:txBody>
+          <a:bodyPr rtlCol="0" anchor="ctr"/>
+          <a:lstStyle/>
+          <a:p>
+            <a:pPr algn="ctr"/>
+            <a:endParaRPr lang="en-US" dirty="0"/>
+          </a:p>
+        </p:txBody>
+      </p:sp>
+      <p:sp>
+        <p:nvSpPr>
+          <p:cNvPr id="15" name="Oval 14">
+            <a:extLst>
+              <a:ext uri="{FF2B5EF4-FFF2-40B4-BE49-F238E27FC236}">
+                <a16:creationId xmlns:a16="http://schemas.microsoft.com/office/drawing/2014/main" id="{C3DC7664-568D-618B-4C88-6D0174736DD5}"/>
+              </a:ext>
+            </a:extLst>
+          </p:cNvPr>
+          <p:cNvSpPr/>
+          <p:nvPr/>
+        </p:nvSpPr>
+        <p:spPr>
+          <a:xfrm>
+            <a:off x="4464911" y="1523997"/>
+            <a:ext cx="86497" cy="86497"/>
+          </a:xfrm>
+          <a:prstGeom prst="ellipse">
+            <a:avLst/>
+          </a:prstGeom>
+        </p:spPr>
+        <p:style>
+          <a:lnRef idx="2">
+            <a:schemeClr val="accent1">
+              <a:shade val="15000"/>
+            </a:schemeClr>
+          </a:lnRef>
+          <a:fillRef idx="1">
+            <a:schemeClr val="accent1"/>
+          </a:fillRef>
+          <a:effectRef idx="0">
+            <a:schemeClr val="accent1"/>
+          </a:effectRef>
+          <a:fontRef idx="minor">
+            <a:schemeClr val="lt1"/>
+          </a:fontRef>
+        </p:style>
+        <p:txBody>
+          <a:bodyPr rtlCol="0" anchor="ctr"/>
+          <a:lstStyle/>
+          <a:p>
+            <a:pPr algn="ctr"/>
+            <a:endParaRPr lang="en-US"/>
+          </a:p>
+        </p:txBody>
+      </p:sp>
+      <p:sp>
+        <p:nvSpPr>
+          <p:cNvPr id="16" name="Oval 15">
+            <a:extLst>
+              <a:ext uri="{FF2B5EF4-FFF2-40B4-BE49-F238E27FC236}">
+                <a16:creationId xmlns:a16="http://schemas.microsoft.com/office/drawing/2014/main" id="{AC83EC9B-1000-0982-2539-466B8F48A6D2}"/>
+              </a:ext>
+            </a:extLst>
+          </p:cNvPr>
+          <p:cNvSpPr/>
+          <p:nvPr/>
+        </p:nvSpPr>
+        <p:spPr>
+          <a:xfrm>
+            <a:off x="5037442" y="2022388"/>
+            <a:ext cx="86497" cy="86497"/>
+          </a:xfrm>
+          <a:prstGeom prst="ellipse">
+            <a:avLst/>
+          </a:prstGeom>
+        </p:spPr>
+        <p:style>
+          <a:lnRef idx="2">
+            <a:schemeClr val="accent1">
+              <a:shade val="15000"/>
+            </a:schemeClr>
+          </a:lnRef>
+          <a:fillRef idx="1">
+            <a:schemeClr val="accent1"/>
+          </a:fillRef>
+          <a:effectRef idx="0">
+            <a:schemeClr val="accent1"/>
+          </a:effectRef>
+          <a:fontRef idx="minor">
+            <a:schemeClr val="lt1"/>
+          </a:fontRef>
+        </p:style>
+        <p:txBody>
+          <a:bodyPr rtlCol="0" anchor="ctr"/>
+          <a:lstStyle/>
+          <a:p>
+            <a:pPr algn="ctr"/>
+            <a:endParaRPr lang="en-US"/>
+          </a:p>
+        </p:txBody>
+      </p:sp>
+      <p:sp>
+        <p:nvSpPr>
+          <p:cNvPr id="17" name="Oval 16">
+            <a:extLst>
+              <a:ext uri="{FF2B5EF4-FFF2-40B4-BE49-F238E27FC236}">
+                <a16:creationId xmlns:a16="http://schemas.microsoft.com/office/drawing/2014/main" id="{3DF177AB-43F0-8362-5D0E-47645E0BA61A}"/>
+              </a:ext>
+            </a:extLst>
+          </p:cNvPr>
+          <p:cNvSpPr/>
+          <p:nvPr/>
+        </p:nvSpPr>
+        <p:spPr>
+          <a:xfrm>
+            <a:off x="4518456" y="2294238"/>
+            <a:ext cx="86497" cy="86497"/>
+          </a:xfrm>
+          <a:prstGeom prst="ellipse">
+            <a:avLst/>
+          </a:prstGeom>
+        </p:spPr>
+        <p:style>
+          <a:lnRef idx="2">
+            <a:schemeClr val="accent1">
+              <a:shade val="15000"/>
+            </a:schemeClr>
+          </a:lnRef>
+          <a:fillRef idx="1">
+            <a:schemeClr val="accent1"/>
+          </a:fillRef>
+          <a:effectRef idx="0">
+            <a:schemeClr val="accent1"/>
+          </a:effectRef>
+          <a:fontRef idx="minor">
+            <a:schemeClr val="lt1"/>
+          </a:fontRef>
+        </p:style>
+        <p:txBody>
+          <a:bodyPr rtlCol="0" anchor="ctr"/>
+          <a:lstStyle/>
+          <a:p>
+            <a:pPr algn="ctr"/>
+            <a:endParaRPr lang="en-US" dirty="0"/>
+          </a:p>
+        </p:txBody>
+      </p:sp>
+      <p:cxnSp>
+        <p:nvCxnSpPr>
+          <p:cNvPr id="19" name="Straight Arrow Connector 18">
+            <a:extLst>
+              <a:ext uri="{FF2B5EF4-FFF2-40B4-BE49-F238E27FC236}">
+                <a16:creationId xmlns:a16="http://schemas.microsoft.com/office/drawing/2014/main" id="{D7F67AFC-3575-104A-C477-FEFC7FBA82A1}"/>
+              </a:ext>
+            </a:extLst>
+          </p:cNvPr>
+          <p:cNvCxnSpPr>
+            <a:cxnSpLocks/>
+            <a:endCxn id="4" idx="3"/>
+          </p:cNvCxnSpPr>
+          <p:nvPr/>
+        </p:nvCxnSpPr>
+        <p:spPr>
+          <a:xfrm flipV="1">
+            <a:off x="4106564" y="1560443"/>
+            <a:ext cx="1260566" cy="157146"/>
+          </a:xfrm>
+          <a:prstGeom prst="straightConnector1">
+            <a:avLst/>
+          </a:prstGeom>
+          <a:ln>
+            <a:headEnd type="triangle"/>
+            <a:tailEnd type="triangle"/>
+          </a:ln>
+        </p:spPr>
+        <p:style>
+          <a:lnRef idx="1">
+            <a:schemeClr val="accent1"/>
+          </a:lnRef>
+          <a:fillRef idx="0">
+            <a:schemeClr val="accent1"/>
+          </a:fillRef>
+          <a:effectRef idx="0">
+            <a:schemeClr val="accent1"/>
+          </a:effectRef>
+          <a:fontRef idx="minor">
+            <a:schemeClr val="tx1"/>
+          </a:fontRef>
+        </p:style>
+      </p:cxnSp>
+      <p:cxnSp>
+        <p:nvCxnSpPr>
+          <p:cNvPr id="21" name="Straight Arrow Connector 20">
+            <a:extLst>
+              <a:ext uri="{FF2B5EF4-FFF2-40B4-BE49-F238E27FC236}">
+                <a16:creationId xmlns:a16="http://schemas.microsoft.com/office/drawing/2014/main" id="{6740DF52-1886-95DF-19F7-5E249923092D}"/>
+              </a:ext>
+            </a:extLst>
+          </p:cNvPr>
+          <p:cNvCxnSpPr>
+            <a:cxnSpLocks/>
+            <a:endCxn id="15" idx="2"/>
+          </p:cNvCxnSpPr>
+          <p:nvPr/>
+        </p:nvCxnSpPr>
+        <p:spPr>
+          <a:xfrm>
+            <a:off x="4098324" y="1536355"/>
+            <a:ext cx="366587" cy="30891"/>
+          </a:xfrm>
+          <a:prstGeom prst="straightConnector1">
+            <a:avLst/>
+          </a:prstGeom>
+          <a:ln>
+            <a:headEnd type="triangle"/>
+            <a:tailEnd type="triangle"/>
+          </a:ln>
+        </p:spPr>
+        <p:style>
+          <a:lnRef idx="1">
+            <a:schemeClr val="accent1"/>
+          </a:lnRef>
+          <a:fillRef idx="0">
+            <a:schemeClr val="accent1"/>
+          </a:fillRef>
+          <a:effectRef idx="0">
+            <a:schemeClr val="accent1"/>
+          </a:effectRef>
+          <a:fontRef idx="minor">
+            <a:schemeClr val="tx1"/>
+          </a:fontRef>
+        </p:style>
+      </p:cxnSp>
+      <p:cxnSp>
+        <p:nvCxnSpPr>
+          <p:cNvPr id="23" name="Straight Arrow Connector 22">
+            <a:extLst>
+              <a:ext uri="{FF2B5EF4-FFF2-40B4-BE49-F238E27FC236}">
+                <a16:creationId xmlns:a16="http://schemas.microsoft.com/office/drawing/2014/main" id="{164CC66C-F4CD-6EAA-E785-6B5AD0FC4382}"/>
+              </a:ext>
+            </a:extLst>
+          </p:cNvPr>
+          <p:cNvCxnSpPr>
+            <a:cxnSpLocks/>
+            <a:endCxn id="16" idx="3"/>
+          </p:cNvCxnSpPr>
+          <p:nvPr/>
+        </p:nvCxnSpPr>
+        <p:spPr>
+          <a:xfrm flipV="1">
+            <a:off x="4342238" y="2096218"/>
+            <a:ext cx="707871" cy="116448"/>
+          </a:xfrm>
+          <a:prstGeom prst="straightConnector1">
+            <a:avLst/>
+          </a:prstGeom>
+          <a:ln>
+            <a:headEnd type="triangle"/>
+            <a:tailEnd type="triangle"/>
+          </a:ln>
+        </p:spPr>
+        <p:style>
+          <a:lnRef idx="1">
+            <a:schemeClr val="accent1"/>
+          </a:lnRef>
+          <a:fillRef idx="0">
+            <a:schemeClr val="accent1"/>
+          </a:fillRef>
+          <a:effectRef idx="0">
+            <a:schemeClr val="accent1"/>
+          </a:effectRef>
+          <a:fontRef idx="minor">
+            <a:schemeClr val="tx1"/>
+          </a:fontRef>
+        </p:style>
+      </p:cxnSp>
+      <p:cxnSp>
+        <p:nvCxnSpPr>
+          <p:cNvPr id="27" name="Straight Arrow Connector 26">
+            <a:extLst>
+              <a:ext uri="{FF2B5EF4-FFF2-40B4-BE49-F238E27FC236}">
+                <a16:creationId xmlns:a16="http://schemas.microsoft.com/office/drawing/2014/main" id="{C74BC687-699D-E94C-220B-779EAC26FE38}"/>
+              </a:ext>
+            </a:extLst>
+          </p:cNvPr>
+          <p:cNvCxnSpPr>
+            <a:cxnSpLocks/>
+          </p:cNvCxnSpPr>
+          <p:nvPr/>
+        </p:nvCxnSpPr>
+        <p:spPr>
+          <a:xfrm flipV="1">
+            <a:off x="3558742" y="1717589"/>
+            <a:ext cx="588471" cy="255373"/>
+          </a:xfrm>
+          <a:prstGeom prst="straightConnector1">
+            <a:avLst/>
+          </a:prstGeom>
+          <a:ln>
+            <a:headEnd type="triangle"/>
+            <a:tailEnd type="triangle"/>
+          </a:ln>
+        </p:spPr>
+        <p:style>
+          <a:lnRef idx="1">
+            <a:schemeClr val="accent1"/>
+          </a:lnRef>
+          <a:fillRef idx="0">
+            <a:schemeClr val="accent1"/>
+          </a:fillRef>
+          <a:effectRef idx="0">
+            <a:schemeClr val="accent1"/>
+          </a:effectRef>
+          <a:fontRef idx="minor">
+            <a:schemeClr val="tx1"/>
+          </a:fontRef>
+        </p:style>
+      </p:cxnSp>
+      <p:cxnSp>
+        <p:nvCxnSpPr>
+          <p:cNvPr id="29" name="Straight Arrow Connector 28">
+            <a:extLst>
+              <a:ext uri="{FF2B5EF4-FFF2-40B4-BE49-F238E27FC236}">
+                <a16:creationId xmlns:a16="http://schemas.microsoft.com/office/drawing/2014/main" id="{27522187-44C0-0D14-051A-49A8ADA8C611}"/>
+              </a:ext>
+            </a:extLst>
+          </p:cNvPr>
+          <p:cNvCxnSpPr>
+            <a:cxnSpLocks/>
+            <a:stCxn id="14" idx="7"/>
+          </p:cNvCxnSpPr>
+          <p:nvPr/>
+        </p:nvCxnSpPr>
+        <p:spPr>
+          <a:xfrm flipV="1">
+            <a:off x="4093897" y="2043879"/>
+            <a:ext cx="230522" cy="85912"/>
+          </a:xfrm>
+          <a:prstGeom prst="straightConnector1">
+            <a:avLst/>
+          </a:prstGeom>
+          <a:ln>
+            <a:headEnd type="triangle"/>
+            <a:tailEnd type="triangle"/>
+          </a:ln>
+        </p:spPr>
+        <p:style>
+          <a:lnRef idx="1">
+            <a:schemeClr val="accent1"/>
+          </a:lnRef>
+          <a:fillRef idx="0">
+            <a:schemeClr val="accent1"/>
+          </a:fillRef>
+          <a:effectRef idx="0">
+            <a:schemeClr val="accent1"/>
+          </a:effectRef>
+          <a:fontRef idx="minor">
+            <a:schemeClr val="tx1"/>
+          </a:fontRef>
+        </p:style>
+      </p:cxnSp>
+      <p:sp>
+        <p:nvSpPr>
+          <p:cNvPr id="31" name="TextBox 30">
+            <a:extLst>
+              <a:ext uri="{FF2B5EF4-FFF2-40B4-BE49-F238E27FC236}">
+                <a16:creationId xmlns:a16="http://schemas.microsoft.com/office/drawing/2014/main" id="{CEFE6ABD-864B-2E18-E698-DC4BA61CFE53}"/>
+              </a:ext>
+            </a:extLst>
+          </p:cNvPr>
+          <p:cNvSpPr txBox="1"/>
+          <p:nvPr/>
+        </p:nvSpPr>
+        <p:spPr>
+          <a:xfrm>
+            <a:off x="7617945" y="803189"/>
+            <a:ext cx="306494" cy="369332"/>
+          </a:xfrm>
+          <a:prstGeom prst="rect">
+            <a:avLst/>
+          </a:prstGeom>
+          <a:noFill/>
+        </p:spPr>
+        <p:txBody>
+          <a:bodyPr wrap="none" rtlCol="0">
+            <a:spAutoFit/>
+          </a:bodyPr>
+          <a:lstStyle/>
+          <a:p>
+            <a:r>
+              <a:rPr lang="en-US" i="1" dirty="0"/>
+              <a:t>b</a:t>
+            </a:r>
+          </a:p>
+        </p:txBody>
+      </p:sp>
+      <p:sp>
+        <p:nvSpPr>
+          <p:cNvPr id="32" name="TextBox 31">
+            <a:extLst>
+              <a:ext uri="{FF2B5EF4-FFF2-40B4-BE49-F238E27FC236}">
+                <a16:creationId xmlns:a16="http://schemas.microsoft.com/office/drawing/2014/main" id="{029B24AE-45E8-FE9E-396D-2E64CC392E2E}"/>
+              </a:ext>
+            </a:extLst>
+          </p:cNvPr>
+          <p:cNvSpPr txBox="1"/>
+          <p:nvPr/>
+        </p:nvSpPr>
+        <p:spPr>
+          <a:xfrm>
+            <a:off x="4668789" y="1462220"/>
+            <a:ext cx="306494" cy="369332"/>
+          </a:xfrm>
+          <a:prstGeom prst="rect">
+            <a:avLst/>
+          </a:prstGeom>
+          <a:noFill/>
+        </p:spPr>
+        <p:txBody>
+          <a:bodyPr wrap="none" rtlCol="0">
+            <a:spAutoFit/>
+          </a:bodyPr>
+          <a:lstStyle/>
+          <a:p>
+            <a:r>
+              <a:rPr lang="en-US" i="1" dirty="0"/>
+              <a:t>b</a:t>
+            </a:r>
+          </a:p>
+        </p:txBody>
+      </p:sp>
+      <p:sp>
+        <p:nvSpPr>
+          <p:cNvPr id="33" name="TextBox 32">
+            <a:extLst>
+              <a:ext uri="{FF2B5EF4-FFF2-40B4-BE49-F238E27FC236}">
+                <a16:creationId xmlns:a16="http://schemas.microsoft.com/office/drawing/2014/main" id="{C9858257-5D86-C55B-D2D2-2ACE93FA1397}"/>
+              </a:ext>
+            </a:extLst>
+          </p:cNvPr>
+          <p:cNvSpPr txBox="1"/>
+          <p:nvPr/>
+        </p:nvSpPr>
+        <p:spPr>
+          <a:xfrm>
+            <a:off x="4598767" y="1948254"/>
+            <a:ext cx="284052" cy="369332"/>
+          </a:xfrm>
+          <a:prstGeom prst="rect">
+            <a:avLst/>
+          </a:prstGeom>
+          <a:noFill/>
+        </p:spPr>
+        <p:txBody>
+          <a:bodyPr wrap="none" rtlCol="0">
+            <a:spAutoFit/>
+          </a:bodyPr>
+          <a:lstStyle/>
+          <a:p>
+            <a:r>
+              <a:rPr lang="en-US" i="1" dirty="0"/>
+              <a:t>x</a:t>
+            </a:r>
+          </a:p>
+        </p:txBody>
+      </p:sp>
+      <p:sp>
+        <p:nvSpPr>
+          <p:cNvPr id="34" name="TextBox 33">
+            <a:extLst>
+              <a:ext uri="{FF2B5EF4-FFF2-40B4-BE49-F238E27FC236}">
+                <a16:creationId xmlns:a16="http://schemas.microsoft.com/office/drawing/2014/main" id="{1FB88581-012B-961A-BAD6-CEE2F078E8E7}"/>
+              </a:ext>
+            </a:extLst>
+          </p:cNvPr>
+          <p:cNvSpPr txBox="1"/>
+          <p:nvPr/>
+        </p:nvSpPr>
+        <p:spPr>
+          <a:xfrm>
+            <a:off x="3700842" y="1631099"/>
+            <a:ext cx="284052" cy="369332"/>
+          </a:xfrm>
+          <a:prstGeom prst="rect">
+            <a:avLst/>
+          </a:prstGeom>
+          <a:noFill/>
+        </p:spPr>
+        <p:txBody>
+          <a:bodyPr wrap="none" rtlCol="0">
+            <a:spAutoFit/>
+          </a:bodyPr>
+          <a:lstStyle/>
+          <a:p>
+            <a:r>
+              <a:rPr lang="en-US" i="1" dirty="0"/>
+              <a:t>x</a:t>
+            </a:r>
+          </a:p>
+        </p:txBody>
+      </p:sp>
+      <p:sp>
+        <p:nvSpPr>
+          <p:cNvPr id="35" name="TextBox 34">
+            <a:extLst>
+              <a:ext uri="{FF2B5EF4-FFF2-40B4-BE49-F238E27FC236}">
+                <a16:creationId xmlns:a16="http://schemas.microsoft.com/office/drawing/2014/main" id="{92500BEF-E0C4-A162-2ABF-CF83DEBD3A03}"/>
+              </a:ext>
+            </a:extLst>
+          </p:cNvPr>
+          <p:cNvSpPr txBox="1"/>
+          <p:nvPr/>
+        </p:nvSpPr>
+        <p:spPr>
+          <a:xfrm>
+            <a:off x="4162163" y="1252159"/>
+            <a:ext cx="284052" cy="369332"/>
+          </a:xfrm>
+          <a:prstGeom prst="rect">
+            <a:avLst/>
+          </a:prstGeom>
+          <a:noFill/>
+        </p:spPr>
+        <p:txBody>
+          <a:bodyPr wrap="none" rtlCol="0">
+            <a:spAutoFit/>
+          </a:bodyPr>
+          <a:lstStyle/>
+          <a:p>
+            <a:r>
+              <a:rPr lang="en-US" i="1" dirty="0"/>
+              <a:t>x</a:t>
+            </a:r>
+          </a:p>
+        </p:txBody>
+      </p:sp>
+      <p:cxnSp>
+        <p:nvCxnSpPr>
+          <p:cNvPr id="36" name="Straight Arrow Connector 35">
+            <a:extLst>
+              <a:ext uri="{FF2B5EF4-FFF2-40B4-BE49-F238E27FC236}">
+                <a16:creationId xmlns:a16="http://schemas.microsoft.com/office/drawing/2014/main" id="{AAEF5D77-A1AD-30CD-1228-57E3C809FB6B}"/>
+              </a:ext>
+            </a:extLst>
+          </p:cNvPr>
+          <p:cNvCxnSpPr>
+            <a:cxnSpLocks/>
+          </p:cNvCxnSpPr>
+          <p:nvPr/>
+        </p:nvCxnSpPr>
+        <p:spPr>
+          <a:xfrm>
+            <a:off x="8550787" y="1330732"/>
+            <a:ext cx="1337485" cy="221068"/>
+          </a:xfrm>
+          <a:prstGeom prst="straightConnector1">
+            <a:avLst/>
+          </a:prstGeom>
+          <a:ln>
+            <a:headEnd type="triangle"/>
+            <a:tailEnd type="triangle"/>
+          </a:ln>
+        </p:spPr>
+        <p:style>
+          <a:lnRef idx="1">
+            <a:schemeClr val="accent1"/>
+          </a:lnRef>
+          <a:fillRef idx="0">
+            <a:schemeClr val="accent1"/>
+          </a:fillRef>
+          <a:effectRef idx="0">
+            <a:schemeClr val="accent1"/>
+          </a:effectRef>
+          <a:fontRef idx="minor">
+            <a:schemeClr val="tx1"/>
+          </a:fontRef>
+        </p:style>
+      </p:cxnSp>
+      <p:sp>
+        <p:nvSpPr>
+          <p:cNvPr id="38" name="TextBox 37">
+            <a:extLst>
+              <a:ext uri="{FF2B5EF4-FFF2-40B4-BE49-F238E27FC236}">
+                <a16:creationId xmlns:a16="http://schemas.microsoft.com/office/drawing/2014/main" id="{72F0CDDB-E822-264B-971E-0324FECA26CC}"/>
+              </a:ext>
+            </a:extLst>
+          </p:cNvPr>
+          <p:cNvSpPr txBox="1"/>
+          <p:nvPr/>
+        </p:nvSpPr>
+        <p:spPr>
+          <a:xfrm>
+            <a:off x="9133710" y="1243916"/>
+            <a:ext cx="306494" cy="369332"/>
+          </a:xfrm>
+          <a:prstGeom prst="rect">
+            <a:avLst/>
+          </a:prstGeom>
+          <a:noFill/>
+        </p:spPr>
+        <p:txBody>
+          <a:bodyPr wrap="none" rtlCol="0">
+            <a:spAutoFit/>
+          </a:bodyPr>
+          <a:lstStyle/>
+          <a:p>
+            <a:r>
+              <a:rPr lang="en-US" i="1" dirty="0"/>
+              <a:t>b</a:t>
+            </a:r>
+          </a:p>
+        </p:txBody>
+      </p:sp>
+      <p:cxnSp>
+        <p:nvCxnSpPr>
+          <p:cNvPr id="39" name="Straight Arrow Connector 38">
+            <a:extLst>
+              <a:ext uri="{FF2B5EF4-FFF2-40B4-BE49-F238E27FC236}">
+                <a16:creationId xmlns:a16="http://schemas.microsoft.com/office/drawing/2014/main" id="{DB82FDF0-7C82-511A-EE2B-8E599BFB9F25}"/>
+              </a:ext>
+            </a:extLst>
+          </p:cNvPr>
+          <p:cNvCxnSpPr>
+            <a:cxnSpLocks/>
+          </p:cNvCxnSpPr>
+          <p:nvPr/>
+        </p:nvCxnSpPr>
+        <p:spPr>
+          <a:xfrm>
+            <a:off x="6985591" y="976503"/>
+            <a:ext cx="1600475" cy="73821"/>
+          </a:xfrm>
+          <a:prstGeom prst="straightConnector1">
+            <a:avLst/>
+          </a:prstGeom>
+          <a:ln>
+            <a:headEnd type="triangle"/>
+            <a:tailEnd type="triangle"/>
+          </a:ln>
+        </p:spPr>
+        <p:style>
+          <a:lnRef idx="1">
+            <a:schemeClr val="accent1"/>
+          </a:lnRef>
+          <a:fillRef idx="0">
+            <a:schemeClr val="accent1"/>
+          </a:fillRef>
+          <a:effectRef idx="0">
+            <a:schemeClr val="accent1"/>
+          </a:effectRef>
+          <a:fontRef idx="minor">
+            <a:schemeClr val="tx1"/>
+          </a:fontRef>
+        </p:style>
+      </p:cxnSp>
+      <p:cxnSp>
+        <p:nvCxnSpPr>
+          <p:cNvPr id="41" name="Straight Arrow Connector 40">
+            <a:extLst>
+              <a:ext uri="{FF2B5EF4-FFF2-40B4-BE49-F238E27FC236}">
+                <a16:creationId xmlns:a16="http://schemas.microsoft.com/office/drawing/2014/main" id="{170B1F97-20C3-E1E0-AF35-516CF5D60A0C}"/>
+              </a:ext>
+            </a:extLst>
+          </p:cNvPr>
+          <p:cNvCxnSpPr>
+            <a:cxnSpLocks/>
+          </p:cNvCxnSpPr>
+          <p:nvPr/>
+        </p:nvCxnSpPr>
+        <p:spPr>
+          <a:xfrm>
+            <a:off x="7508265" y="1669018"/>
+            <a:ext cx="671639" cy="303944"/>
+          </a:xfrm>
+          <a:prstGeom prst="straightConnector1">
+            <a:avLst/>
+          </a:prstGeom>
+          <a:ln>
+            <a:headEnd type="triangle"/>
+            <a:tailEnd type="triangle"/>
+          </a:ln>
+        </p:spPr>
+        <p:style>
+          <a:lnRef idx="1">
+            <a:schemeClr val="accent1"/>
+          </a:lnRef>
+          <a:fillRef idx="0">
+            <a:schemeClr val="accent1"/>
+          </a:fillRef>
+          <a:effectRef idx="0">
+            <a:schemeClr val="accent1"/>
+          </a:effectRef>
+          <a:fontRef idx="minor">
+            <a:schemeClr val="tx1"/>
+          </a:fontRef>
+        </p:style>
+      </p:cxnSp>
+      <p:sp>
+        <p:nvSpPr>
+          <p:cNvPr id="43" name="Oval 42">
+            <a:extLst>
+              <a:ext uri="{FF2B5EF4-FFF2-40B4-BE49-F238E27FC236}">
+                <a16:creationId xmlns:a16="http://schemas.microsoft.com/office/drawing/2014/main" id="{A303F984-201D-D2F2-B891-54894AC6F372}"/>
+              </a:ext>
+            </a:extLst>
+          </p:cNvPr>
+          <p:cNvSpPr/>
+          <p:nvPr/>
+        </p:nvSpPr>
+        <p:spPr>
+          <a:xfrm>
+            <a:off x="7463490" y="1631085"/>
+            <a:ext cx="86497" cy="86497"/>
+          </a:xfrm>
+          <a:prstGeom prst="ellipse">
+            <a:avLst/>
+          </a:prstGeom>
+        </p:spPr>
+        <p:style>
+          <a:lnRef idx="2">
+            <a:schemeClr val="accent1">
+              <a:shade val="15000"/>
+            </a:schemeClr>
+          </a:lnRef>
+          <a:fillRef idx="1">
+            <a:schemeClr val="accent1"/>
+          </a:fillRef>
+          <a:effectRef idx="0">
+            <a:schemeClr val="accent1"/>
+          </a:effectRef>
+          <a:fontRef idx="minor">
+            <a:schemeClr val="lt1"/>
+          </a:fontRef>
+        </p:style>
+        <p:txBody>
+          <a:bodyPr rtlCol="0" anchor="ctr"/>
+          <a:lstStyle/>
+          <a:p>
+            <a:pPr algn="ctr"/>
+            <a:endParaRPr lang="en-US" dirty="0"/>
+          </a:p>
+        </p:txBody>
+      </p:sp>
+      <p:sp>
+        <p:nvSpPr>
+          <p:cNvPr id="44" name="TextBox 43">
+            <a:extLst>
+              <a:ext uri="{FF2B5EF4-FFF2-40B4-BE49-F238E27FC236}">
+                <a16:creationId xmlns:a16="http://schemas.microsoft.com/office/drawing/2014/main" id="{AB616B36-67B8-6146-1BAE-688450ADA9A0}"/>
+              </a:ext>
+            </a:extLst>
+          </p:cNvPr>
+          <p:cNvSpPr txBox="1"/>
+          <p:nvPr/>
+        </p:nvSpPr>
+        <p:spPr>
+          <a:xfrm>
+            <a:off x="7729154" y="1631098"/>
+            <a:ext cx="284052" cy="369332"/>
+          </a:xfrm>
+          <a:prstGeom prst="rect">
+            <a:avLst/>
+          </a:prstGeom>
+          <a:noFill/>
+        </p:spPr>
+        <p:txBody>
+          <a:bodyPr wrap="none" rtlCol="0">
+            <a:spAutoFit/>
+          </a:bodyPr>
+          <a:lstStyle/>
+          <a:p>
+            <a:r>
+              <a:rPr lang="en-US" i="1" dirty="0"/>
+              <a:t>x</a:t>
+            </a:r>
+          </a:p>
+        </p:txBody>
+      </p:sp>
+    </p:spTree>
+    <p:extLst>
+      <p:ext uri="{BB962C8B-B14F-4D97-AF65-F5344CB8AC3E}">
+        <p14:creationId xmlns:p14="http://schemas.microsoft.com/office/powerpoint/2010/main" val="3711882525"/>
+      </p:ext>
+    </p:extLst>
+  </p:cSld>
+  <p:clrMapOvr>
+    <a:masterClrMapping/>
+  </p:clrMapOvr>
+</p:sld>
+</file>
+
 <file path=ppt/theme/theme1.xml><?xml version="1.0" encoding="utf-8"?>
 <a:theme xmlns:a="http://schemas.openxmlformats.org/drawingml/2006/main" name="Office Theme">
   <a:themeElements>
